--- a/docs/ppt/PPT2_팀프로젝트_발표양식.pptx
+++ b/docs/ppt/PPT2_팀프로젝트_발표양식.pptx
@@ -506,7 +506,7 @@
           <a:p>
             <a:r>
               <a:rPr lang="en-US" dirty="0"/>
-              <a:t>[발표 메모] 프로젝트 목적 → 현재 단계 → 성과 수치 → 다음 계획 순으로 30초 내 설명. 회색 글씨는 모두 교체용 안내문이므로 발표 전 실제 내용으로 바꾸세요.</a:t>
+              <a:t>[발표 메모] 프로젝트명·담당자 → 목적 → 현재 단계 → 핵심 지표 → 향후 계획 순으로 30초 내 설명. 회색 글씨는 모두 교체용 안내문이므로 발표 전 실제 내용으로 바꾸세요. 사진 영역은 정사각형이라 화면 캡처를 넣어도 비율이 뭉개지지 않습니다.</a:t>
             </a:r>
             <a:endParaRPr lang="en-US" dirty="0"/>
           </a:p>
@@ -594,7 +594,7 @@
           <a:p>
             <a:r>
               <a:rPr lang="en-US" dirty="0"/>
-              <a:t>[발표 메모] 프로젝트 목적 → 현재 단계 → 성과 수치 → 다음 계획 순으로 30초 내 설명. 회색 글씨는 모두 교체용 안내문이므로 발표 전 실제 내용으로 바꾸세요.</a:t>
+              <a:t>[발표 메모] 프로젝트명·담당자 → 목적 → 현재 단계 → 핵심 지표 → 향후 계획 순으로 30초 내 설명. 회색 글씨는 모두 교체용 안내문이므로 발표 전 실제 내용으로 바꾸세요. 사진 영역은 정사각형이라 화면 캡처를 넣어도 비율이 뭉개지지 않습니다.</a:t>
             </a:r>
             <a:endParaRPr lang="en-US" dirty="0"/>
           </a:p>
@@ -682,7 +682,7 @@
           <a:p>
             <a:r>
               <a:rPr lang="en-US" dirty="0"/>
-              <a:t>[발표 메모] 프로젝트 목적 → 현재 단계 → 성과 수치 → 다음 계획 순으로 30초 내 설명. 회색 글씨는 모두 교체용 안내문이므로 발표 전 실제 내용으로 바꾸세요.</a:t>
+              <a:t>[발표 메모] 프로젝트명·담당자 → 목적 → 현재 단계 → 핵심 지표 → 향후 계획 순으로 30초 내 설명. 회색 글씨는 모두 교체용 안내문이므로 발표 전 실제 내용으로 바꾸세요. 사진 영역은 정사각형이라 화면 캡처를 넣어도 비율이 뭉개지지 않습니다.</a:t>
             </a:r>
             <a:endParaRPr lang="en-US" dirty="0"/>
           </a:p>
@@ -770,7 +770,7 @@
           <a:p>
             <a:r>
               <a:rPr lang="en-US" dirty="0"/>
-              <a:t>[발표 메모] 프로젝트 목적 → 현재 단계 → 성과 수치 → 다음 계획 순으로 30초 내 설명. 회색 글씨는 모두 교체용 안내문이므로 발표 전 실제 내용으로 바꾸세요.</a:t>
+              <a:t>[발표 메모] 프로젝트명·담당자 → 목적 → 현재 단계 → 핵심 지표 → 향후 계획 순으로 30초 내 설명. 회색 글씨는 모두 교체용 안내문이므로 발표 전 실제 내용으로 바꾸세요. 사진 영역은 정사각형이라 화면 캡처를 넣어도 비율이 뭉개지지 않습니다.</a:t>
             </a:r>
             <a:endParaRPr lang="en-US" dirty="0"/>
           </a:p>
@@ -858,7 +858,7 @@
           <a:p>
             <a:r>
               <a:rPr lang="en-US" dirty="0"/>
-              <a:t>[발표 메모] 프로젝트 목적 → 현재 단계 → 성과 수치 → 다음 계획 순으로 30초 내 설명. 회색 글씨는 모두 교체용 안내문이므로 발표 전 실제 내용으로 바꾸세요.</a:t>
+              <a:t>[발표 메모] 프로젝트명·담당자 → 목적 → 현재 단계 → 핵심 지표 → 향후 계획 순으로 30초 내 설명. 회색 글씨는 모두 교체용 안내문이므로 발표 전 실제 내용으로 바꾸세요. 사진 영역은 정사각형이라 화면 캡처를 넣어도 비율이 뭉개지지 않습니다.</a:t>
             </a:r>
             <a:endParaRPr lang="en-US" dirty="0"/>
           </a:p>
@@ -1259,8 +1259,8 @@
         </p:nvSpPr>
         <p:spPr>
           <a:xfrm>
-            <a:off x="411480" y="164592"/>
-            <a:ext cx="640080" cy="566928"/>
+            <a:off x="411480" y="182880"/>
+            <a:ext cx="640080" cy="548640"/>
           </a:xfrm>
           <a:prstGeom prst="rect">
             <a:avLst/>
@@ -1298,8 +1298,8 @@
         </p:nvSpPr>
         <p:spPr>
           <a:xfrm>
-            <a:off x="1051560" y="164592"/>
-            <a:ext cx="5120640" cy="566928"/>
+            <a:off x="1051560" y="182880"/>
+            <a:ext cx="6766560" cy="548640"/>
           </a:xfrm>
           <a:prstGeom prst="rect">
             <a:avLst/>
@@ -1317,66 +1317,105 @@
             <a:r>
               <a:rPr lang="en-US" sz="2300" b="1" dirty="0">
                 <a:solidFill>
+                  <a:srgbClr val="8E8480"/>
+                </a:solidFill>
+                <a:latin typeface="맑은 고딕" pitchFamily="34" charset="0"/>
+                <a:ea typeface="맑은 고딕" pitchFamily="34" charset="-122"/>
+                <a:cs typeface="맑은 고딕" pitchFamily="34" charset="-120"/>
+              </a:rPr>
+              <a:t>프로젝트명을 입력하세요</a:t>
+            </a:r>
+            <a:endParaRPr lang="en-US" sz="2300" dirty="0"/>
+          </a:p>
+        </p:txBody>
+      </p:sp>
+      <p:sp>
+        <p:nvSpPr>
+          <p:cNvPr id="5" name="Text 3"/>
+          <p:cNvSpPr/>
+          <p:nvPr/>
+        </p:nvSpPr>
+        <p:spPr>
+          <a:xfrm>
+            <a:off x="7955280" y="155448"/>
+            <a:ext cx="3840480" cy="292608"/>
+          </a:xfrm>
+          <a:prstGeom prst="rect">
+            <a:avLst/>
+          </a:prstGeom>
+          <a:noFill/>
+          <a:ln/>
+        </p:spPr>
+        <p:txBody>
+          <a:bodyPr wrap="square" lIns="0" tIns="0" rIns="0" bIns="0" rtlCol="0" anchor="ctr"/>
+          <a:lstStyle/>
+          <a:p>
+            <a:pPr algn="r" indent="0" marL="0">
+              <a:buNone/>
+            </a:pPr>
+            <a:r>
+              <a:rPr lang="en-US" sz="1200" dirty="0">
+                <a:solidFill>
+                  <a:srgbClr val="C9BFBB"/>
+                </a:solidFill>
+                <a:latin typeface="맑은 고딕" pitchFamily="34" charset="0"/>
+                <a:ea typeface="맑은 고딕" pitchFamily="34" charset="-122"/>
+                <a:cs typeface="맑은 고딕" pitchFamily="34" charset="-120"/>
+              </a:rPr>
+              <a:t>소속 : ○○팀</a:t>
+            </a:r>
+            <a:endParaRPr lang="en-US" sz="1200" dirty="0"/>
+          </a:p>
+        </p:txBody>
+      </p:sp>
+      <p:sp>
+        <p:nvSpPr>
+          <p:cNvPr id="6" name="Text 4"/>
+          <p:cNvSpPr/>
+          <p:nvPr/>
+        </p:nvSpPr>
+        <p:spPr>
+          <a:xfrm>
+            <a:off x="7955280" y="457200"/>
+            <a:ext cx="3840480" cy="292608"/>
+          </a:xfrm>
+          <a:prstGeom prst="rect">
+            <a:avLst/>
+          </a:prstGeom>
+          <a:noFill/>
+          <a:ln/>
+        </p:spPr>
+        <p:txBody>
+          <a:bodyPr wrap="square" lIns="0" tIns="0" rIns="0" bIns="0" rtlCol="0" anchor="ctr"/>
+          <a:lstStyle/>
+          <a:p>
+            <a:pPr algn="r" indent="0" marL="0">
+              <a:buNone/>
+            </a:pPr>
+            <a:r>
+              <a:rPr lang="en-US" sz="1200" b="1" dirty="0">
+                <a:solidFill>
                   <a:srgbClr val="FFFFFF"/>
                 </a:solidFill>
                 <a:latin typeface="맑은 고딕" pitchFamily="34" charset="0"/>
                 <a:ea typeface="맑은 고딕" pitchFamily="34" charset="-122"/>
                 <a:cs typeface="맑은 고딕" pitchFamily="34" charset="-120"/>
               </a:rPr>
-              <a:t>프로젝트 ①</a:t>
-            </a:r>
-            <a:endParaRPr lang="en-US" sz="2300" dirty="0"/>
-          </a:p>
-        </p:txBody>
-      </p:sp>
-      <p:sp>
-        <p:nvSpPr>
-          <p:cNvPr id="5" name="Text 3"/>
-          <p:cNvSpPr/>
-          <p:nvPr/>
-        </p:nvSpPr>
-        <p:spPr>
-          <a:xfrm>
-            <a:off x="6263640" y="164592"/>
-            <a:ext cx="5532120" cy="566928"/>
-          </a:xfrm>
-          <a:prstGeom prst="rect">
-            <a:avLst/>
-          </a:prstGeom>
-          <a:noFill/>
-          <a:ln/>
-        </p:spPr>
-        <p:txBody>
-          <a:bodyPr wrap="square" lIns="0" tIns="0" rIns="0" bIns="0" rtlCol="0" anchor="ctr"/>
-          <a:lstStyle/>
-          <a:p>
-            <a:pPr algn="r" indent="0" marL="0">
-              <a:buNone/>
-            </a:pPr>
-            <a:r>
-              <a:rPr lang="en-US" sz="1250" dirty="0">
-                <a:solidFill>
-                  <a:srgbClr val="C9BFBB"/>
-                </a:solidFill>
-                <a:latin typeface="맑은 고딕" pitchFamily="34" charset="0"/>
-                <a:ea typeface="맑은 고딕" pitchFamily="34" charset="-122"/>
-                <a:cs typeface="맑은 고딕" pitchFamily="34" charset="-120"/>
-              </a:rPr>
-              <a:t>프로젝트명을 입력하세요</a:t>
-            </a:r>
-            <a:endParaRPr lang="en-US" sz="1250" dirty="0"/>
-          </a:p>
-        </p:txBody>
-      </p:sp>
-      <p:sp>
-        <p:nvSpPr>
-          <p:cNvPr id="6" name="Shape 4"/>
-          <p:cNvSpPr/>
-          <p:nvPr/>
-        </p:nvSpPr>
-        <p:spPr>
-          <a:xfrm>
-            <a:off x="502920" y="1161288"/>
+              <a:t>담당자 : 홍길동</a:t>
+            </a:r>
+            <a:endParaRPr lang="en-US" sz="1200" dirty="0"/>
+          </a:p>
+        </p:txBody>
+      </p:sp>
+      <p:sp>
+        <p:nvSpPr>
+          <p:cNvPr id="7" name="Shape 5"/>
+          <p:cNvSpPr/>
+          <p:nvPr/>
+        </p:nvSpPr>
+        <p:spPr>
+          <a:xfrm>
+            <a:off x="502920" y="1124712"/>
             <a:ext cx="237744" cy="237744"/>
           </a:xfrm>
           <a:prstGeom prst="ellipse">
@@ -1390,14 +1429,14 @@
       </p:sp>
       <p:sp>
         <p:nvSpPr>
-          <p:cNvPr id="7" name="Text 5"/>
-          <p:cNvSpPr/>
-          <p:nvPr/>
-        </p:nvSpPr>
-        <p:spPr>
-          <a:xfrm>
-            <a:off x="868680" y="1115568"/>
-            <a:ext cx="4023360" cy="329184"/>
+          <p:cNvPr id="8" name="Text 6"/>
+          <p:cNvSpPr/>
+          <p:nvPr/>
+        </p:nvSpPr>
+        <p:spPr>
+          <a:xfrm>
+            <a:off x="868680" y="1078992"/>
+            <a:ext cx="2377440" cy="310896"/>
           </a:xfrm>
           <a:prstGeom prst="rect">
             <a:avLst/>
@@ -1429,18 +1468,18 @@
       </p:sp>
       <p:sp>
         <p:nvSpPr>
-          <p:cNvPr id="8" name="Shape 6"/>
-          <p:cNvSpPr/>
-          <p:nvPr/>
-        </p:nvSpPr>
-        <p:spPr>
-          <a:xfrm>
-            <a:off x="502920" y="1536192"/>
-            <a:ext cx="5394960" cy="1783080"/>
+          <p:cNvPr id="9" name="Shape 7"/>
+          <p:cNvSpPr/>
+          <p:nvPr/>
+        </p:nvSpPr>
+        <p:spPr>
+          <a:xfrm>
+            <a:off x="502920" y="1463040"/>
+            <a:ext cx="5394960" cy="1481328"/>
           </a:xfrm>
           <a:prstGeom prst="roundRect">
             <a:avLst>
-              <a:gd name="adj" fmla="val 3077"/>
+              <a:gd name="adj" fmla="val 3704"/>
             </a:avLst>
           </a:prstGeom>
           <a:solidFill>
@@ -1463,14 +1502,14 @@
       </p:sp>
       <p:sp>
         <p:nvSpPr>
-          <p:cNvPr id="9" name="Text 7"/>
-          <p:cNvSpPr/>
-          <p:nvPr/>
-        </p:nvSpPr>
-        <p:spPr>
-          <a:xfrm>
-            <a:off x="822960" y="1783080"/>
-            <a:ext cx="4754880" cy="1325880"/>
+          <p:cNvPr id="10" name="Text 8"/>
+          <p:cNvSpPr/>
+          <p:nvPr/>
+        </p:nvSpPr>
+        <p:spPr>
+          <a:xfrm>
+            <a:off x="822960" y="1682496"/>
+            <a:ext cx="4800600" cy="1097280"/>
           </a:xfrm>
           <a:prstGeom prst="rect">
             <a:avLst/>
@@ -1484,16 +1523,16 @@
           <a:p>
             <a:pPr marL="342900" indent="-342900">
               <a:lnSpc>
-                <a:spcPts val="1600"/>
+                <a:spcPts val="1500"/>
               </a:lnSpc>
               <a:spcAft>
-                <a:spcPts val="800"/>
+                <a:spcPts val="700"/>
               </a:spcAft>
               <a:buSzPct val="100000"/>
               <a:buChar char="•"/>
             </a:pPr>
             <a:r>
-              <a:rPr lang="en-US" sz="1250" dirty="0">
+              <a:rPr lang="en-US" sz="1200" dirty="0">
                 <a:solidFill>
                   <a:srgbClr val="B3A9A5"/>
                 </a:solidFill>
@@ -1501,23 +1540,23 @@
                 <a:ea typeface="맑은 고딕" pitchFamily="34" charset="-122"/>
                 <a:cs typeface="맑은 고딕" pitchFamily="34" charset="-120"/>
               </a:rPr>
-              <a:t>해결하려는 문제를 한 줄로 적으세요</a:t>
-            </a:r>
-            <a:endParaRPr lang="en-US" sz="1250" dirty="0"/>
+              <a:t>해결하려는 문제를 한 줄로</a:t>
+            </a:r>
+            <a:endParaRPr lang="en-US" sz="1200" dirty="0"/>
           </a:p>
           <a:p>
             <a:pPr marL="342900" indent="-342900">
               <a:lnSpc>
-                <a:spcPts val="1600"/>
+                <a:spcPts val="1500"/>
               </a:lnSpc>
               <a:spcAft>
-                <a:spcPts val="800"/>
+                <a:spcPts val="700"/>
               </a:spcAft>
               <a:buSzPct val="100000"/>
               <a:buChar char="•"/>
             </a:pPr>
             <a:r>
-              <a:rPr lang="en-US" sz="1250" dirty="0">
+              <a:rPr lang="en-US" sz="1200" dirty="0">
                 <a:solidFill>
                   <a:srgbClr val="B3A9A5"/>
                 </a:solidFill>
@@ -1525,23 +1564,23 @@
                 <a:ea typeface="맑은 고딕" pitchFamily="34" charset="-122"/>
                 <a:cs typeface="맑은 고딕" pitchFamily="34" charset="-120"/>
               </a:rPr>
-              <a:t>기대 효과(시간 절감·정확도·비용 등)</a:t>
-            </a:r>
-            <a:endParaRPr lang="en-US" sz="1250" dirty="0"/>
+              <a:t>기대 효과 (시간 절감 · 정확도 · 비용 등)</a:t>
+            </a:r>
+            <a:endParaRPr lang="en-US" sz="1200" dirty="0"/>
           </a:p>
           <a:p>
             <a:pPr marL="342900" indent="-342900">
               <a:lnSpc>
-                <a:spcPts val="1600"/>
+                <a:spcPts val="1500"/>
               </a:lnSpc>
               <a:spcAft>
-                <a:spcPts val="800"/>
+                <a:spcPts val="700"/>
               </a:spcAft>
               <a:buSzPct val="100000"/>
               <a:buChar char="•"/>
             </a:pPr>
             <a:r>
-              <a:rPr lang="en-US" sz="1250" dirty="0">
+              <a:rPr lang="en-US" sz="1200" dirty="0">
                 <a:solidFill>
                   <a:srgbClr val="B3A9A5"/>
                 </a:solidFill>
@@ -1551,19 +1590,19 @@
               </a:rPr>
               <a:t>적용 대상 설비 또는 업무 범위</a:t>
             </a:r>
-            <a:endParaRPr lang="en-US" sz="1250" dirty="0"/>
-          </a:p>
-        </p:txBody>
-      </p:sp>
-      <p:sp>
-        <p:nvSpPr>
-          <p:cNvPr id="10" name="Shape 8"/>
-          <p:cNvSpPr/>
-          <p:nvPr/>
-        </p:nvSpPr>
-        <p:spPr>
-          <a:xfrm>
-            <a:off x="502920" y="3538728"/>
+            <a:endParaRPr lang="en-US" sz="1200" dirty="0"/>
+          </a:p>
+        </p:txBody>
+      </p:sp>
+      <p:sp>
+        <p:nvSpPr>
+          <p:cNvPr id="11" name="Shape 9"/>
+          <p:cNvSpPr/>
+          <p:nvPr/>
+        </p:nvSpPr>
+        <p:spPr>
+          <a:xfrm>
+            <a:off x="502920" y="3154680"/>
             <a:ext cx="237744" cy="237744"/>
           </a:xfrm>
           <a:prstGeom prst="ellipse">
@@ -1577,14 +1616,14 @@
       </p:sp>
       <p:sp>
         <p:nvSpPr>
-          <p:cNvPr id="11" name="Text 9"/>
-          <p:cNvSpPr/>
-          <p:nvPr/>
-        </p:nvSpPr>
-        <p:spPr>
-          <a:xfrm>
-            <a:off x="868680" y="3493008"/>
-            <a:ext cx="4023360" cy="329184"/>
+          <p:cNvPr id="12" name="Text 10"/>
+          <p:cNvSpPr/>
+          <p:nvPr/>
+        </p:nvSpPr>
+        <p:spPr>
+          <a:xfrm>
+            <a:off x="868680" y="3108960"/>
+            <a:ext cx="2377440" cy="310896"/>
           </a:xfrm>
           <a:prstGeom prst="rect">
             <a:avLst/>
@@ -1616,13 +1655,52 @@
       </p:sp>
       <p:sp>
         <p:nvSpPr>
-          <p:cNvPr id="12" name="Shape 10"/>
-          <p:cNvSpPr/>
-          <p:nvPr/>
-        </p:nvSpPr>
-        <p:spPr>
-          <a:xfrm>
-            <a:off x="960120" y="4572000"/>
+          <p:cNvPr id="13" name="Text 11"/>
+          <p:cNvSpPr/>
+          <p:nvPr/>
+        </p:nvSpPr>
+        <p:spPr>
+          <a:xfrm>
+            <a:off x="3291840" y="3108960"/>
+            <a:ext cx="2606040" cy="310896"/>
+          </a:xfrm>
+          <a:prstGeom prst="rect">
+            <a:avLst/>
+          </a:prstGeom>
+          <a:noFill/>
+          <a:ln/>
+        </p:spPr>
+        <p:txBody>
+          <a:bodyPr wrap="square" lIns="0" tIns="0" rIns="0" bIns="0" rtlCol="0" anchor="ctr"/>
+          <a:lstStyle/>
+          <a:p>
+            <a:pPr algn="r" indent="0" marL="0">
+              <a:buNone/>
+            </a:pPr>
+            <a:r>
+              <a:rPr lang="en-US" sz="950" dirty="0">
+                <a:solidFill>
+                  <a:srgbClr val="B3A9A5"/>
+                </a:solidFill>
+                <a:latin typeface="맑은 고딕" pitchFamily="34" charset="0"/>
+                <a:ea typeface="맑은 고딕" pitchFamily="34" charset="-122"/>
+                <a:cs typeface="맑은 고딕" pitchFamily="34" charset="-120"/>
+              </a:rPr>
+              <a:t>단계명·색은 수정 가능</a:t>
+            </a:r>
+            <a:endParaRPr lang="en-US" sz="950" dirty="0"/>
+          </a:p>
+        </p:txBody>
+      </p:sp>
+      <p:sp>
+        <p:nvSpPr>
+          <p:cNvPr id="14" name="Shape 12"/>
+          <p:cNvSpPr/>
+          <p:nvPr/>
+        </p:nvSpPr>
+        <p:spPr>
+          <a:xfrm>
+            <a:off x="960120" y="3950208"/>
             <a:ext cx="4443984" cy="0"/>
           </a:xfrm>
           <a:prstGeom prst="line">
@@ -1639,13 +1717,13 @@
       </p:sp>
       <p:sp>
         <p:nvSpPr>
-          <p:cNvPr id="13" name="Shape 11"/>
-          <p:cNvSpPr/>
-          <p:nvPr/>
-        </p:nvSpPr>
-        <p:spPr>
-          <a:xfrm>
-            <a:off x="960120" y="4572000"/>
+          <p:cNvPr id="15" name="Shape 13"/>
+          <p:cNvSpPr/>
+          <p:nvPr/>
+        </p:nvSpPr>
+        <p:spPr>
+          <a:xfrm>
+            <a:off x="960120" y="3950208"/>
             <a:ext cx="1481328" cy="0"/>
           </a:xfrm>
           <a:prstGeom prst="line">
@@ -1662,13 +1740,13 @@
       </p:sp>
       <p:sp>
         <p:nvSpPr>
-          <p:cNvPr id="14" name="Shape 12"/>
-          <p:cNvSpPr/>
-          <p:nvPr/>
-        </p:nvSpPr>
-        <p:spPr>
-          <a:xfrm>
-            <a:off x="822960" y="4434840"/>
+          <p:cNvPr id="16" name="Shape 14"/>
+          <p:cNvSpPr/>
+          <p:nvPr/>
+        </p:nvSpPr>
+        <p:spPr>
+          <a:xfrm>
+            <a:off x="822960" y="3813048"/>
             <a:ext cx="274320" cy="274320"/>
           </a:xfrm>
           <a:prstGeom prst="ellipse">
@@ -1687,13 +1765,13 @@
       </p:sp>
       <p:sp>
         <p:nvSpPr>
-          <p:cNvPr id="15" name="Text 13"/>
-          <p:cNvSpPr/>
-          <p:nvPr/>
-        </p:nvSpPr>
-        <p:spPr>
-          <a:xfrm>
-            <a:off x="411480" y="4041648"/>
+          <p:cNvPr id="17" name="Text 15"/>
+          <p:cNvSpPr/>
+          <p:nvPr/>
+        </p:nvSpPr>
+        <p:spPr>
+          <a:xfrm>
+            <a:off x="411480" y="3438144"/>
             <a:ext cx="1097280" cy="219456"/>
           </a:xfrm>
           <a:prstGeom prst="rect">
@@ -1726,13 +1804,13 @@
       </p:sp>
       <p:sp>
         <p:nvSpPr>
-          <p:cNvPr id="16" name="Text 14"/>
-          <p:cNvSpPr/>
-          <p:nvPr/>
-        </p:nvSpPr>
-        <p:spPr>
-          <a:xfrm>
-            <a:off x="320040" y="4773168"/>
+          <p:cNvPr id="18" name="Text 16"/>
+          <p:cNvSpPr/>
+          <p:nvPr/>
+        </p:nvSpPr>
+        <p:spPr>
+          <a:xfrm>
+            <a:off x="320040" y="4151376"/>
             <a:ext cx="1280160" cy="256032"/>
           </a:xfrm>
           <a:prstGeom prst="rect">
@@ -1765,13 +1843,13 @@
       </p:sp>
       <p:sp>
         <p:nvSpPr>
-          <p:cNvPr id="17" name="Shape 15"/>
-          <p:cNvSpPr/>
-          <p:nvPr/>
-        </p:nvSpPr>
-        <p:spPr>
-          <a:xfrm>
-            <a:off x="2304288" y="4434840"/>
+          <p:cNvPr id="19" name="Shape 17"/>
+          <p:cNvSpPr/>
+          <p:nvPr/>
+        </p:nvSpPr>
+        <p:spPr>
+          <a:xfrm>
+            <a:off x="2304288" y="3813048"/>
             <a:ext cx="274320" cy="274320"/>
           </a:xfrm>
           <a:prstGeom prst="ellipse">
@@ -1790,13 +1868,13 @@
       </p:sp>
       <p:sp>
         <p:nvSpPr>
-          <p:cNvPr id="18" name="Text 16"/>
-          <p:cNvSpPr/>
-          <p:nvPr/>
-        </p:nvSpPr>
-        <p:spPr>
-          <a:xfrm>
-            <a:off x="1892808" y="4041648"/>
+          <p:cNvPr id="20" name="Text 18"/>
+          <p:cNvSpPr/>
+          <p:nvPr/>
+        </p:nvSpPr>
+        <p:spPr>
+          <a:xfrm>
+            <a:off x="1892808" y="3438144"/>
             <a:ext cx="1097280" cy="219456"/>
           </a:xfrm>
           <a:prstGeom prst="rect">
@@ -1829,13 +1907,13 @@
       </p:sp>
       <p:sp>
         <p:nvSpPr>
-          <p:cNvPr id="19" name="Text 17"/>
-          <p:cNvSpPr/>
-          <p:nvPr/>
-        </p:nvSpPr>
-        <p:spPr>
-          <a:xfrm>
-            <a:off x="1801368" y="4773168"/>
+          <p:cNvPr id="21" name="Text 19"/>
+          <p:cNvSpPr/>
+          <p:nvPr/>
+        </p:nvSpPr>
+        <p:spPr>
+          <a:xfrm>
+            <a:off x="1801368" y="4151376"/>
             <a:ext cx="1280160" cy="256032"/>
           </a:xfrm>
           <a:prstGeom prst="rect">
@@ -1868,13 +1946,13 @@
       </p:sp>
       <p:sp>
         <p:nvSpPr>
-          <p:cNvPr id="20" name="Shape 18"/>
-          <p:cNvSpPr/>
-          <p:nvPr/>
-        </p:nvSpPr>
-        <p:spPr>
-          <a:xfrm>
-            <a:off x="3785616" y="4434840"/>
+          <p:cNvPr id="22" name="Shape 20"/>
+          <p:cNvSpPr/>
+          <p:nvPr/>
+        </p:nvSpPr>
+        <p:spPr>
+          <a:xfrm>
+            <a:off x="3785616" y="3813048"/>
             <a:ext cx="274320" cy="274320"/>
           </a:xfrm>
           <a:prstGeom prst="ellipse">
@@ -1893,13 +1971,13 @@
       </p:sp>
       <p:sp>
         <p:nvSpPr>
-          <p:cNvPr id="21" name="Text 19"/>
-          <p:cNvSpPr/>
-          <p:nvPr/>
-        </p:nvSpPr>
-        <p:spPr>
-          <a:xfrm>
-            <a:off x="3374136" y="4041648"/>
+          <p:cNvPr id="23" name="Text 21"/>
+          <p:cNvSpPr/>
+          <p:nvPr/>
+        </p:nvSpPr>
+        <p:spPr>
+          <a:xfrm>
+            <a:off x="3374136" y="3438144"/>
             <a:ext cx="1097280" cy="219456"/>
           </a:xfrm>
           <a:prstGeom prst="rect">
@@ -1932,13 +2010,13 @@
       </p:sp>
       <p:sp>
         <p:nvSpPr>
-          <p:cNvPr id="22" name="Text 20"/>
-          <p:cNvSpPr/>
-          <p:nvPr/>
-        </p:nvSpPr>
-        <p:spPr>
-          <a:xfrm>
-            <a:off x="3282696" y="4773168"/>
+          <p:cNvPr id="24" name="Text 22"/>
+          <p:cNvSpPr/>
+          <p:nvPr/>
+        </p:nvSpPr>
+        <p:spPr>
+          <a:xfrm>
+            <a:off x="3282696" y="4151376"/>
             <a:ext cx="1280160" cy="256032"/>
           </a:xfrm>
           <a:prstGeom prst="rect">
@@ -1971,13 +2049,13 @@
       </p:sp>
       <p:sp>
         <p:nvSpPr>
-          <p:cNvPr id="23" name="Shape 21"/>
-          <p:cNvSpPr/>
-          <p:nvPr/>
-        </p:nvSpPr>
-        <p:spPr>
-          <a:xfrm>
-            <a:off x="5266944" y="4434840"/>
+          <p:cNvPr id="25" name="Shape 23"/>
+          <p:cNvSpPr/>
+          <p:nvPr/>
+        </p:nvSpPr>
+        <p:spPr>
+          <a:xfrm>
+            <a:off x="5266944" y="3813048"/>
             <a:ext cx="274320" cy="274320"/>
           </a:xfrm>
           <a:prstGeom prst="ellipse">
@@ -1996,13 +2074,13 @@
       </p:sp>
       <p:sp>
         <p:nvSpPr>
-          <p:cNvPr id="24" name="Text 22"/>
-          <p:cNvSpPr/>
-          <p:nvPr/>
-        </p:nvSpPr>
-        <p:spPr>
-          <a:xfrm>
-            <a:off x="4855464" y="4041648"/>
+          <p:cNvPr id="26" name="Text 24"/>
+          <p:cNvSpPr/>
+          <p:nvPr/>
+        </p:nvSpPr>
+        <p:spPr>
+          <a:xfrm>
+            <a:off x="4855464" y="3438144"/>
             <a:ext cx="1097280" cy="219456"/>
           </a:xfrm>
           <a:prstGeom prst="rect">
@@ -2035,13 +2113,13 @@
       </p:sp>
       <p:sp>
         <p:nvSpPr>
-          <p:cNvPr id="25" name="Text 23"/>
-          <p:cNvSpPr/>
-          <p:nvPr/>
-        </p:nvSpPr>
-        <p:spPr>
-          <a:xfrm>
-            <a:off x="4764024" y="4773168"/>
+          <p:cNvPr id="27" name="Text 25"/>
+          <p:cNvSpPr/>
+          <p:nvPr/>
+        </p:nvSpPr>
+        <p:spPr>
+          <a:xfrm>
+            <a:off x="4764024" y="4151376"/>
             <a:ext cx="1280160" cy="256032"/>
           </a:xfrm>
           <a:prstGeom prst="rect">
@@ -2074,14 +2152,34 @@
       </p:sp>
       <p:sp>
         <p:nvSpPr>
-          <p:cNvPr id="26" name="Text 24"/>
-          <p:cNvSpPr/>
-          <p:nvPr/>
-        </p:nvSpPr>
-        <p:spPr>
-          <a:xfrm>
-            <a:off x="502920" y="5084064"/>
-            <a:ext cx="5394960" cy="237744"/>
+          <p:cNvPr id="28" name="Shape 26"/>
+          <p:cNvSpPr/>
+          <p:nvPr/>
+        </p:nvSpPr>
+        <p:spPr>
+          <a:xfrm>
+            <a:off x="502920" y="4800600"/>
+            <a:ext cx="237744" cy="237744"/>
+          </a:xfrm>
+          <a:prstGeom prst="ellipse">
+            <a:avLst/>
+          </a:prstGeom>
+          <a:solidFill>
+            <a:srgbClr val="8A7F7A"/>
+          </a:solidFill>
+          <a:ln/>
+        </p:spPr>
+      </p:sp>
+      <p:sp>
+        <p:nvSpPr>
+          <p:cNvPr id="29" name="Text 27"/>
+          <p:cNvSpPr/>
+          <p:nvPr/>
+        </p:nvSpPr>
+        <p:spPr>
+          <a:xfrm>
+            <a:off x="868680" y="4754880"/>
+            <a:ext cx="2377440" cy="310896"/>
           </a:xfrm>
           <a:prstGeom prst="rect">
             <a:avLst/>
@@ -2097,6 +2195,45 @@
               <a:buNone/>
             </a:pPr>
             <a:r>
+              <a:rPr lang="en-US" sz="1350" b="1" dirty="0">
+                <a:solidFill>
+                  <a:srgbClr val="1F1A18"/>
+                </a:solidFill>
+                <a:latin typeface="맑은 고딕" pitchFamily="34" charset="0"/>
+                <a:ea typeface="맑은 고딕" pitchFamily="34" charset="-122"/>
+                <a:cs typeface="맑은 고딕" pitchFamily="34" charset="-120"/>
+              </a:rPr>
+              <a:t>핵심 지표</a:t>
+            </a:r>
+            <a:endParaRPr lang="en-US" sz="1350" dirty="0"/>
+          </a:p>
+        </p:txBody>
+      </p:sp>
+      <p:sp>
+        <p:nvSpPr>
+          <p:cNvPr id="30" name="Text 28"/>
+          <p:cNvSpPr/>
+          <p:nvPr/>
+        </p:nvSpPr>
+        <p:spPr>
+          <a:xfrm>
+            <a:off x="3291840" y="4754880"/>
+            <a:ext cx="2606040" cy="310896"/>
+          </a:xfrm>
+          <a:prstGeom prst="rect">
+            <a:avLst/>
+          </a:prstGeom>
+          <a:noFill/>
+          <a:ln/>
+        </p:spPr>
+        <p:txBody>
+          <a:bodyPr wrap="square" lIns="0" tIns="0" rIns="0" bIns="0" rtlCol="0" anchor="ctr"/>
+          <a:lstStyle/>
+          <a:p>
+            <a:pPr algn="r" indent="0" marL="0">
+              <a:buNone/>
+            </a:pPr>
+            <a:r>
               <a:rPr lang="en-US" sz="950" dirty="0">
                 <a:solidFill>
                   <a:srgbClr val="B3A9A5"/>
@@ -2105,7 +2242,7 @@
                 <a:ea typeface="맑은 고딕" pitchFamily="34" charset="-122"/>
                 <a:cs typeface="맑은 고딕" pitchFamily="34" charset="-120"/>
               </a:rPr>
-              <a:t>※ 단계명·완료 표시는 프로젝트에 맞게 수정</a:t>
+              <a:t>정량 수치가 있으면 기입</a:t>
             </a:r>
             <a:endParaRPr lang="en-US" sz="950" dirty="0"/>
           </a:p>
@@ -2113,18 +2250,18 @@
       </p:sp>
       <p:sp>
         <p:nvSpPr>
-          <p:cNvPr id="27" name="Shape 25"/>
-          <p:cNvSpPr/>
-          <p:nvPr/>
-        </p:nvSpPr>
-        <p:spPr>
-          <a:xfrm>
-            <a:off x="502920" y="5358384"/>
-            <a:ext cx="5394960" cy="1261872"/>
+          <p:cNvPr id="31" name="Shape 29"/>
+          <p:cNvSpPr/>
+          <p:nvPr/>
+        </p:nvSpPr>
+        <p:spPr>
+          <a:xfrm>
+            <a:off x="502920" y="5138928"/>
+            <a:ext cx="5394960" cy="1481328"/>
           </a:xfrm>
           <a:prstGeom prst="roundRect">
             <a:avLst>
-              <a:gd name="adj" fmla="val 4348"/>
+              <a:gd name="adj" fmla="val 3704"/>
             </a:avLst>
           </a:prstGeom>
           <a:solidFill>
@@ -2147,14 +2284,14 @@
       </p:sp>
       <p:sp>
         <p:nvSpPr>
-          <p:cNvPr id="28" name="Text 26"/>
-          <p:cNvSpPr/>
-          <p:nvPr/>
-        </p:nvSpPr>
-        <p:spPr>
-          <a:xfrm>
-            <a:off x="822960" y="5504688"/>
-            <a:ext cx="4754880" cy="237744"/>
+          <p:cNvPr id="32" name="Text 30"/>
+          <p:cNvSpPr/>
+          <p:nvPr/>
+        </p:nvSpPr>
+        <p:spPr>
+          <a:xfrm>
+            <a:off x="822960" y="5321808"/>
+            <a:ext cx="1572768" cy="219456"/>
           </a:xfrm>
           <a:prstGeom prst="rect">
             <a:avLst/>
@@ -2170,30 +2307,30 @@
               <a:buNone/>
             </a:pPr>
             <a:r>
-              <a:rPr lang="en-US" sz="1150" b="1" dirty="0">
-                <a:solidFill>
-                  <a:srgbClr val="EA002C"/>
-                </a:solidFill>
-                <a:latin typeface="맑은 고딕" pitchFamily="34" charset="0"/>
-                <a:ea typeface="맑은 고딕" pitchFamily="34" charset="-122"/>
-                <a:cs typeface="맑은 고딕" pitchFamily="34" charset="-120"/>
-              </a:rPr>
-              <a:t>주요 성과 · 수치</a:t>
-            </a:r>
-            <a:endParaRPr lang="en-US" sz="1150" dirty="0"/>
-          </a:p>
-        </p:txBody>
-      </p:sp>
-      <p:sp>
-        <p:nvSpPr>
-          <p:cNvPr id="29" name="Text 27"/>
-          <p:cNvSpPr/>
-          <p:nvPr/>
-        </p:nvSpPr>
-        <p:spPr>
-          <a:xfrm>
-            <a:off x="822960" y="5833872"/>
-            <a:ext cx="1463040" cy="201168"/>
+              <a:rPr lang="en-US" sz="950" dirty="0">
+                <a:solidFill>
+                  <a:srgbClr val="B3A9A5"/>
+                </a:solidFill>
+                <a:latin typeface="맑은 고딕" pitchFamily="34" charset="0"/>
+                <a:ea typeface="맑은 고딕" pitchFamily="34" charset="-122"/>
+                <a:cs typeface="맑은 고딕" pitchFamily="34" charset="-120"/>
+              </a:rPr>
+              <a:t>예) 작업시간</a:t>
+            </a:r>
+            <a:endParaRPr lang="en-US" sz="950" dirty="0"/>
+          </a:p>
+        </p:txBody>
+      </p:sp>
+      <p:sp>
+        <p:nvSpPr>
+          <p:cNvPr id="33" name="Text 31"/>
+          <p:cNvSpPr/>
+          <p:nvPr/>
+        </p:nvSpPr>
+        <p:spPr>
+          <a:xfrm>
+            <a:off x="822960" y="5541264"/>
+            <a:ext cx="1572768" cy="329184"/>
           </a:xfrm>
           <a:prstGeom prst="rect">
             <a:avLst/>
@@ -2209,6 +2346,45 @@
               <a:buNone/>
             </a:pPr>
             <a:r>
+              <a:rPr lang="en-US" sz="1500" b="1" dirty="0">
+                <a:solidFill>
+                  <a:srgbClr val="1F1A18"/>
+                </a:solidFill>
+                <a:latin typeface="맑은 고딕" pitchFamily="34" charset="0"/>
+                <a:ea typeface="맑은 고딕" pitchFamily="34" charset="-122"/>
+                <a:cs typeface="맑은 고딕" pitchFamily="34" charset="-120"/>
+              </a:rPr>
+              <a:t>3h → 10분</a:t>
+            </a:r>
+            <a:endParaRPr lang="en-US" sz="1500" dirty="0"/>
+          </a:p>
+        </p:txBody>
+      </p:sp>
+      <p:sp>
+        <p:nvSpPr>
+          <p:cNvPr id="34" name="Text 32"/>
+          <p:cNvSpPr/>
+          <p:nvPr/>
+        </p:nvSpPr>
+        <p:spPr>
+          <a:xfrm>
+            <a:off x="2496312" y="5321808"/>
+            <a:ext cx="1572768" cy="219456"/>
+          </a:xfrm>
+          <a:prstGeom prst="rect">
+            <a:avLst/>
+          </a:prstGeom>
+          <a:noFill/>
+          <a:ln/>
+        </p:spPr>
+        <p:txBody>
+          <a:bodyPr wrap="square" lIns="0" tIns="0" rIns="0" bIns="0" rtlCol="0" anchor="ctr"/>
+          <a:lstStyle/>
+          <a:p>
+            <a:pPr indent="0" marL="0">
+              <a:buNone/>
+            </a:pPr>
+            <a:r>
               <a:rPr lang="en-US" sz="950" dirty="0">
                 <a:solidFill>
                   <a:srgbClr val="B3A9A5"/>
@@ -2217,7 +2393,7 @@
                 <a:ea typeface="맑은 고딕" pitchFamily="34" charset="-122"/>
                 <a:cs typeface="맑은 고딕" pitchFamily="34" charset="-120"/>
               </a:rPr>
-              <a:t>항목</a:t>
+              <a:t>예) 오류 건수</a:t>
             </a:r>
             <a:endParaRPr lang="en-US" sz="950" dirty="0"/>
           </a:p>
@@ -2225,14 +2401,14 @@
       </p:sp>
       <p:sp>
         <p:nvSpPr>
-          <p:cNvPr id="30" name="Text 28"/>
-          <p:cNvSpPr/>
-          <p:nvPr/>
-        </p:nvSpPr>
-        <p:spPr>
-          <a:xfrm>
-            <a:off x="822960" y="6035040"/>
-            <a:ext cx="1463040" cy="384048"/>
+          <p:cNvPr id="35" name="Text 33"/>
+          <p:cNvSpPr/>
+          <p:nvPr/>
+        </p:nvSpPr>
+        <p:spPr>
+          <a:xfrm>
+            <a:off x="2496312" y="5541264"/>
+            <a:ext cx="1572768" cy="329184"/>
           </a:xfrm>
           <a:prstGeom prst="rect">
             <a:avLst/>
@@ -2248,7 +2424,7 @@
               <a:buNone/>
             </a:pPr>
             <a:r>
-              <a:rPr lang="en-US" sz="2000" b="1" dirty="0">
+              <a:rPr lang="en-US" sz="1500" b="1" dirty="0">
                 <a:solidFill>
                   <a:srgbClr val="1F1A18"/>
                 </a:solidFill>
@@ -2256,22 +2432,22 @@
                 <a:ea typeface="맑은 고딕" pitchFamily="34" charset="-122"/>
                 <a:cs typeface="맑은 고딕" pitchFamily="34" charset="-120"/>
               </a:rPr>
-              <a:t>00</a:t>
-            </a:r>
-            <a:endParaRPr lang="en-US" sz="2000" dirty="0"/>
-          </a:p>
-        </p:txBody>
-      </p:sp>
-      <p:sp>
-        <p:nvSpPr>
-          <p:cNvPr id="31" name="Text 29"/>
-          <p:cNvSpPr/>
-          <p:nvPr/>
-        </p:nvSpPr>
-        <p:spPr>
-          <a:xfrm>
-            <a:off x="2450592" y="5833872"/>
-            <a:ext cx="1463040" cy="201168"/>
+              <a:t>월 5건 → 0</a:t>
+            </a:r>
+            <a:endParaRPr lang="en-US" sz="1500" dirty="0"/>
+          </a:p>
+        </p:txBody>
+      </p:sp>
+      <p:sp>
+        <p:nvSpPr>
+          <p:cNvPr id="36" name="Text 34"/>
+          <p:cNvSpPr/>
+          <p:nvPr/>
+        </p:nvSpPr>
+        <p:spPr>
+          <a:xfrm>
+            <a:off x="4169664" y="5321808"/>
+            <a:ext cx="1572768" cy="219456"/>
           </a:xfrm>
           <a:prstGeom prst="rect">
             <a:avLst/>
@@ -2295,7 +2471,7 @@
                 <a:ea typeface="맑은 고딕" pitchFamily="34" charset="-122"/>
                 <a:cs typeface="맑은 고딕" pitchFamily="34" charset="-120"/>
               </a:rPr>
-              <a:t>항목</a:t>
+              <a:t>예) 적용 설비</a:t>
             </a:r>
             <a:endParaRPr lang="en-US" sz="950" dirty="0"/>
           </a:p>
@@ -2303,14 +2479,14 @@
       </p:sp>
       <p:sp>
         <p:nvSpPr>
-          <p:cNvPr id="32" name="Text 30"/>
-          <p:cNvSpPr/>
-          <p:nvPr/>
-        </p:nvSpPr>
-        <p:spPr>
-          <a:xfrm>
-            <a:off x="2450592" y="6035040"/>
-            <a:ext cx="1463040" cy="384048"/>
+          <p:cNvPr id="37" name="Text 35"/>
+          <p:cNvSpPr/>
+          <p:nvPr/>
+        </p:nvSpPr>
+        <p:spPr>
+          <a:xfrm>
+            <a:off x="4169664" y="5541264"/>
+            <a:ext cx="1572768" cy="329184"/>
           </a:xfrm>
           <a:prstGeom prst="rect">
             <a:avLst/>
@@ -2326,7 +2502,7 @@
               <a:buNone/>
             </a:pPr>
             <a:r>
-              <a:rPr lang="en-US" sz="2000" b="1" dirty="0">
+              <a:rPr lang="en-US" sz="1500" b="1" dirty="0">
                 <a:solidFill>
                   <a:srgbClr val="1F1A18"/>
                 </a:solidFill>
@@ -2334,22 +2510,22 @@
                 <a:ea typeface="맑은 고딕" pitchFamily="34" charset="-122"/>
                 <a:cs typeface="맑은 고딕" pitchFamily="34" charset="-120"/>
               </a:rPr>
-              <a:t>00</a:t>
-            </a:r>
-            <a:endParaRPr lang="en-US" sz="2000" dirty="0"/>
-          </a:p>
-        </p:txBody>
-      </p:sp>
-      <p:sp>
-        <p:nvSpPr>
-          <p:cNvPr id="33" name="Text 31"/>
-          <p:cNvSpPr/>
-          <p:nvPr/>
-        </p:nvSpPr>
-        <p:spPr>
-          <a:xfrm>
-            <a:off x="4078224" y="5833872"/>
-            <a:ext cx="1463040" cy="201168"/>
+              <a:t>3 호기</a:t>
+            </a:r>
+            <a:endParaRPr lang="en-US" sz="1500" dirty="0"/>
+          </a:p>
+        </p:txBody>
+      </p:sp>
+      <p:sp>
+        <p:nvSpPr>
+          <p:cNvPr id="38" name="Text 36"/>
+          <p:cNvSpPr/>
+          <p:nvPr/>
+        </p:nvSpPr>
+        <p:spPr>
+          <a:xfrm>
+            <a:off x="822960" y="5989320"/>
+            <a:ext cx="4800600" cy="512064"/>
           </a:xfrm>
           <a:prstGeom prst="rect">
             <a:avLst/>
@@ -2362,18 +2538,21 @@
           <a:lstStyle/>
           <a:p>
             <a:pPr indent="0" marL="0">
+              <a:lnSpc>
+                <a:spcPts val="1300"/>
+              </a:lnSpc>
               <a:buNone/>
             </a:pPr>
             <a:r>
               <a:rPr lang="en-US" sz="950" dirty="0">
                 <a:solidFill>
-                  <a:srgbClr val="B3A9A5"/>
-                </a:solidFill>
-                <a:latin typeface="맑은 고딕" pitchFamily="34" charset="0"/>
-                <a:ea typeface="맑은 고딕" pitchFamily="34" charset="-122"/>
-                <a:cs typeface="맑은 고딕" pitchFamily="34" charset="-120"/>
-              </a:rPr>
-              <a:t>항목</a:t>
+                  <a:srgbClr val="9A908C"/>
+                </a:solidFill>
+                <a:latin typeface="맑은 고딕" pitchFamily="34" charset="0"/>
+                <a:ea typeface="맑은 고딕" pitchFamily="34" charset="-122"/>
+                <a:cs typeface="맑은 고딕" pitchFamily="34" charset="-120"/>
+              </a:rPr>
+              <a:t>※ 정량 수치가 없으면 정성 효과로 대체 — 예) 수작업 제거, 이력 관리 체계화, 판단 근거 확보</a:t>
             </a:r>
             <a:endParaRPr lang="en-US" sz="950" dirty="0"/>
           </a:p>
@@ -2381,52 +2560,13 @@
       </p:sp>
       <p:sp>
         <p:nvSpPr>
-          <p:cNvPr id="34" name="Text 32"/>
-          <p:cNvSpPr/>
-          <p:nvPr/>
-        </p:nvSpPr>
-        <p:spPr>
-          <a:xfrm>
-            <a:off x="4078224" y="6035040"/>
-            <a:ext cx="1463040" cy="384048"/>
-          </a:xfrm>
-          <a:prstGeom prst="rect">
-            <a:avLst/>
-          </a:prstGeom>
-          <a:noFill/>
-          <a:ln/>
-        </p:spPr>
-        <p:txBody>
-          <a:bodyPr wrap="square" lIns="0" tIns="0" rIns="0" bIns="0" rtlCol="0" anchor="ctr"/>
-          <a:lstStyle/>
-          <a:p>
-            <a:pPr indent="0" marL="0">
-              <a:buNone/>
-            </a:pPr>
-            <a:r>
-              <a:rPr lang="en-US" sz="2000" b="1" dirty="0">
-                <a:solidFill>
-                  <a:srgbClr val="1F1A18"/>
-                </a:solidFill>
-                <a:latin typeface="맑은 고딕" pitchFamily="34" charset="0"/>
-                <a:ea typeface="맑은 고딕" pitchFamily="34" charset="-122"/>
-                <a:cs typeface="맑은 고딕" pitchFamily="34" charset="-120"/>
-              </a:rPr>
-              <a:t>00</a:t>
-            </a:r>
-            <a:endParaRPr lang="en-US" sz="2000" dirty="0"/>
-          </a:p>
-        </p:txBody>
-      </p:sp>
-      <p:sp>
-        <p:nvSpPr>
-          <p:cNvPr id="35" name="Shape 33"/>
-          <p:cNvSpPr/>
-          <p:nvPr/>
-        </p:nvSpPr>
-        <p:spPr>
-          <a:xfrm>
-            <a:off x="6291072" y="1161288"/>
+          <p:cNvPr id="39" name="Shape 37"/>
+          <p:cNvSpPr/>
+          <p:nvPr/>
+        </p:nvSpPr>
+        <p:spPr>
+          <a:xfrm>
+            <a:off x="6291072" y="1124712"/>
             <a:ext cx="237744" cy="237744"/>
           </a:xfrm>
           <a:prstGeom prst="ellipse">
@@ -2440,14 +2580,14 @@
       </p:sp>
       <p:sp>
         <p:nvSpPr>
-          <p:cNvPr id="36" name="Text 34"/>
-          <p:cNvSpPr/>
-          <p:nvPr/>
-        </p:nvSpPr>
-        <p:spPr>
-          <a:xfrm>
-            <a:off x="6656832" y="1115568"/>
-            <a:ext cx="4023360" cy="329184"/>
+          <p:cNvPr id="40" name="Text 38"/>
+          <p:cNvSpPr/>
+          <p:nvPr/>
+        </p:nvSpPr>
+        <p:spPr>
+          <a:xfrm>
+            <a:off x="6656832" y="1078992"/>
+            <a:ext cx="2377440" cy="310896"/>
           </a:xfrm>
           <a:prstGeom prst="rect">
             <a:avLst/>
@@ -2479,18 +2619,57 @@
       </p:sp>
       <p:sp>
         <p:nvSpPr>
-          <p:cNvPr id="37" name="Shape 35"/>
-          <p:cNvSpPr/>
-          <p:nvPr/>
-        </p:nvSpPr>
-        <p:spPr>
-          <a:xfrm>
-            <a:off x="6291072" y="1536192"/>
-            <a:ext cx="5394960" cy="2121408"/>
+          <p:cNvPr id="41" name="Text 39"/>
+          <p:cNvSpPr/>
+          <p:nvPr/>
+        </p:nvSpPr>
+        <p:spPr>
+          <a:xfrm>
+            <a:off x="9079992" y="1078992"/>
+            <a:ext cx="2606040" cy="310896"/>
+          </a:xfrm>
+          <a:prstGeom prst="rect">
+            <a:avLst/>
+          </a:prstGeom>
+          <a:noFill/>
+          <a:ln/>
+        </p:spPr>
+        <p:txBody>
+          <a:bodyPr wrap="square" lIns="0" tIns="0" rIns="0" bIns="0" rtlCol="0" anchor="ctr"/>
+          <a:lstStyle/>
+          <a:p>
+            <a:pPr algn="r" indent="0" marL="0">
+              <a:buNone/>
+            </a:pPr>
+            <a:r>
+              <a:rPr lang="en-US" sz="950" dirty="0">
+                <a:solidFill>
+                  <a:srgbClr val="B3A9A5"/>
+                </a:solidFill>
+                <a:latin typeface="맑은 고딕" pitchFamily="34" charset="0"/>
+                <a:ea typeface="맑은 고딕" pitchFamily="34" charset="-122"/>
+                <a:cs typeface="맑은 고딕" pitchFamily="34" charset="-120"/>
+              </a:rPr>
+              <a:t>정사각형 영역</a:t>
+            </a:r>
+            <a:endParaRPr lang="en-US" sz="950" dirty="0"/>
+          </a:p>
+        </p:txBody>
+      </p:sp>
+      <p:sp>
+        <p:nvSpPr>
+          <p:cNvPr id="42" name="Shape 40"/>
+          <p:cNvSpPr/>
+          <p:nvPr/>
+        </p:nvSpPr>
+        <p:spPr>
+          <a:xfrm>
+            <a:off x="6291072" y="1463040"/>
+            <a:ext cx="2633472" cy="2889504"/>
           </a:xfrm>
           <a:prstGeom prst="roundRect">
             <a:avLst>
-              <a:gd name="adj" fmla="val 2586"/>
+              <a:gd name="adj" fmla="val 2083"/>
             </a:avLst>
           </a:prstGeom>
           <a:solidFill>
@@ -2513,18 +2692,18 @@
       </p:sp>
       <p:sp>
         <p:nvSpPr>
-          <p:cNvPr id="38" name="Shape 36"/>
-          <p:cNvSpPr/>
-          <p:nvPr/>
-        </p:nvSpPr>
-        <p:spPr>
-          <a:xfrm>
-            <a:off x="6519672" y="1691640"/>
-            <a:ext cx="4937760" cy="1572768"/>
+          <p:cNvPr id="43" name="Shape 41"/>
+          <p:cNvSpPr/>
+          <p:nvPr/>
+        </p:nvSpPr>
+        <p:spPr>
+          <a:xfrm>
+            <a:off x="6446520" y="1618488"/>
+            <a:ext cx="2322576" cy="2322576"/>
           </a:xfrm>
           <a:prstGeom prst="roundRect">
             <a:avLst>
-              <a:gd name="adj" fmla="val 2326"/>
+              <a:gd name="adj" fmla="val 1575"/>
             </a:avLst>
           </a:prstGeom>
           <a:solidFill>
@@ -2540,14 +2719,14 @@
       </p:sp>
       <p:sp>
         <p:nvSpPr>
-          <p:cNvPr id="39" name="Text 37"/>
-          <p:cNvSpPr/>
-          <p:nvPr/>
-        </p:nvSpPr>
-        <p:spPr>
-          <a:xfrm>
-            <a:off x="6519672" y="1691640"/>
-            <a:ext cx="4937760" cy="1572768"/>
+          <p:cNvPr id="44" name="Text 42"/>
+          <p:cNvSpPr/>
+          <p:nvPr/>
+        </p:nvSpPr>
+        <p:spPr>
+          <a:xfrm>
+            <a:off x="6446520" y="1618488"/>
+            <a:ext cx="2322576" cy="2322576"/>
           </a:xfrm>
           <a:prstGeom prst="rect">
             <a:avLst/>
@@ -2560,10 +2739,13 @@
           <a:lstStyle/>
           <a:p>
             <a:pPr algn="ctr" indent="0" marL="0">
-              <a:buNone/>
-            </a:pPr>
-            <a:r>
-              <a:rPr lang="en-US" sz="1200" dirty="0">
+              <a:lnSpc>
+                <a:spcPts val="1600"/>
+              </a:lnSpc>
+              <a:buNone/>
+            </a:pPr>
+            <a:r>
+              <a:rPr lang="en-US" sz="1100" dirty="0">
                 <a:solidFill>
                   <a:srgbClr val="B3A9A5"/>
                 </a:solidFill>
@@ -2571,38 +2753,19 @@
                 <a:ea typeface="맑은 고딕" pitchFamily="34" charset="-122"/>
                 <a:cs typeface="맑은 고딕" pitchFamily="34" charset="-120"/>
               </a:rPr>
-              <a:t>이곳에 사진 또는 화면 캡처를 넣으세요</a:t>
-            </a:r>
-            <a:endParaRPr lang="en-US" sz="1200" dirty="0"/>
-          </a:p>
-        </p:txBody>
-      </p:sp>
-      <p:sp>
-        <p:nvSpPr>
-          <p:cNvPr id="40" name="Text 38"/>
-          <p:cNvSpPr/>
-          <p:nvPr/>
-        </p:nvSpPr>
-        <p:spPr>
-          <a:xfrm>
-            <a:off x="6519672" y="3319272"/>
-            <a:ext cx="4937760" cy="237744"/>
-          </a:xfrm>
-          <a:prstGeom prst="rect">
-            <a:avLst/>
-          </a:prstGeom>
-          <a:noFill/>
-          <a:ln/>
-        </p:spPr>
-        <p:txBody>
-          <a:bodyPr wrap="square" lIns="0" tIns="0" rIns="0" bIns="0" rtlCol="0" anchor="ctr"/>
-          <a:lstStyle/>
+              <a:t>사진 / 화면</a:t>
+            </a:r>
+            <a:endParaRPr lang="en-US" sz="1100" dirty="0"/>
+          </a:p>
           <a:p>
             <a:pPr algn="ctr" indent="0" marL="0">
-              <a:buNone/>
-            </a:pPr>
-            <a:r>
-              <a:rPr lang="en-US" sz="1050" dirty="0">
+              <a:lnSpc>
+                <a:spcPts val="1600"/>
+              </a:lnSpc>
+              <a:buNone/>
+            </a:pPr>
+            <a:r>
+              <a:rPr lang="en-US" sz="1100" dirty="0">
                 <a:solidFill>
                   <a:srgbClr val="B3A9A5"/>
                 </a:solidFill>
@@ -2610,26 +2773,65 @@
                 <a:ea typeface="맑은 고딕" pitchFamily="34" charset="-122"/>
                 <a:cs typeface="맑은 고딕" pitchFamily="34" charset="-120"/>
               </a:rPr>
-              <a:t>캡션 — 무엇을 보여주는 화면인지 한 줄</a:t>
-            </a:r>
-            <a:endParaRPr lang="en-US" sz="1050" dirty="0"/>
-          </a:p>
-        </p:txBody>
-      </p:sp>
-      <p:sp>
-        <p:nvSpPr>
-          <p:cNvPr id="41" name="Shape 39"/>
-          <p:cNvSpPr/>
-          <p:nvPr/>
-        </p:nvSpPr>
-        <p:spPr>
-          <a:xfrm>
-            <a:off x="6291072" y="3794760"/>
-            <a:ext cx="5394960" cy="2121408"/>
+              <a:t>(정사각형)</a:t>
+            </a:r>
+            <a:endParaRPr lang="en-US" sz="1100" dirty="0"/>
+          </a:p>
+        </p:txBody>
+      </p:sp>
+      <p:sp>
+        <p:nvSpPr>
+          <p:cNvPr id="45" name="Text 43"/>
+          <p:cNvSpPr/>
+          <p:nvPr/>
+        </p:nvSpPr>
+        <p:spPr>
+          <a:xfrm>
+            <a:off x="6400800" y="4005072"/>
+            <a:ext cx="2414016" cy="274320"/>
+          </a:xfrm>
+          <a:prstGeom prst="rect">
+            <a:avLst/>
+          </a:prstGeom>
+          <a:noFill/>
+          <a:ln/>
+        </p:spPr>
+        <p:txBody>
+          <a:bodyPr wrap="square" lIns="0" tIns="0" rIns="0" bIns="0" rtlCol="0" anchor="ctr"/>
+          <a:lstStyle/>
+          <a:p>
+            <a:pPr algn="ctr" indent="0" marL="0">
+              <a:buNone/>
+            </a:pPr>
+            <a:r>
+              <a:rPr lang="en-US" sz="950" dirty="0">
+                <a:solidFill>
+                  <a:srgbClr val="B3A9A5"/>
+                </a:solidFill>
+                <a:latin typeface="맑은 고딕" pitchFamily="34" charset="0"/>
+                <a:ea typeface="맑은 고딕" pitchFamily="34" charset="-122"/>
+                <a:cs typeface="맑은 고딕" pitchFamily="34" charset="-120"/>
+              </a:rPr>
+              <a:t>캡션 — 무엇을 보여주는지 한 줄</a:t>
+            </a:r>
+            <a:endParaRPr lang="en-US" sz="950" dirty="0"/>
+          </a:p>
+        </p:txBody>
+      </p:sp>
+      <p:sp>
+        <p:nvSpPr>
+          <p:cNvPr id="46" name="Shape 44"/>
+          <p:cNvSpPr/>
+          <p:nvPr/>
+        </p:nvSpPr>
+        <p:spPr>
+          <a:xfrm>
+            <a:off x="9052560" y="1463040"/>
+            <a:ext cx="2633472" cy="2889504"/>
           </a:xfrm>
           <a:prstGeom prst="roundRect">
             <a:avLst>
-              <a:gd name="adj" fmla="val 2586"/>
+              <a:gd name="adj" fmla="val 2083"/>
             </a:avLst>
           </a:prstGeom>
           <a:solidFill>
@@ -2652,18 +2854,18 @@
       </p:sp>
       <p:sp>
         <p:nvSpPr>
-          <p:cNvPr id="42" name="Shape 40"/>
-          <p:cNvSpPr/>
-          <p:nvPr/>
-        </p:nvSpPr>
-        <p:spPr>
-          <a:xfrm>
-            <a:off x="6519672" y="3950208"/>
-            <a:ext cx="4937760" cy="1572768"/>
+          <p:cNvPr id="47" name="Shape 45"/>
+          <p:cNvSpPr/>
+          <p:nvPr/>
+        </p:nvSpPr>
+        <p:spPr>
+          <a:xfrm>
+            <a:off x="9208008" y="1618488"/>
+            <a:ext cx="2322576" cy="2322576"/>
           </a:xfrm>
           <a:prstGeom prst="roundRect">
             <a:avLst>
-              <a:gd name="adj" fmla="val 2326"/>
+              <a:gd name="adj" fmla="val 1575"/>
             </a:avLst>
           </a:prstGeom>
           <a:solidFill>
@@ -2679,14 +2881,14 @@
       </p:sp>
       <p:sp>
         <p:nvSpPr>
-          <p:cNvPr id="43" name="Text 41"/>
-          <p:cNvSpPr/>
-          <p:nvPr/>
-        </p:nvSpPr>
-        <p:spPr>
-          <a:xfrm>
-            <a:off x="6519672" y="3950208"/>
-            <a:ext cx="4937760" cy="1572768"/>
+          <p:cNvPr id="48" name="Text 46"/>
+          <p:cNvSpPr/>
+          <p:nvPr/>
+        </p:nvSpPr>
+        <p:spPr>
+          <a:xfrm>
+            <a:off x="9208008" y="1618488"/>
+            <a:ext cx="2322576" cy="2322576"/>
           </a:xfrm>
           <a:prstGeom prst="rect">
             <a:avLst/>
@@ -2699,10 +2901,13 @@
           <a:lstStyle/>
           <a:p>
             <a:pPr algn="ctr" indent="0" marL="0">
-              <a:buNone/>
-            </a:pPr>
-            <a:r>
-              <a:rPr lang="en-US" sz="1200" dirty="0">
+              <a:lnSpc>
+                <a:spcPts val="1600"/>
+              </a:lnSpc>
+              <a:buNone/>
+            </a:pPr>
+            <a:r>
+              <a:rPr lang="en-US" sz="1100" dirty="0">
                 <a:solidFill>
                   <a:srgbClr val="B3A9A5"/>
                 </a:solidFill>
@@ -2710,38 +2915,19 @@
                 <a:ea typeface="맑은 고딕" pitchFamily="34" charset="-122"/>
                 <a:cs typeface="맑은 고딕" pitchFamily="34" charset="-120"/>
               </a:rPr>
-              <a:t>이곳에 사진 또는 화면 캡처를 넣으세요</a:t>
-            </a:r>
-            <a:endParaRPr lang="en-US" sz="1200" dirty="0"/>
-          </a:p>
-        </p:txBody>
-      </p:sp>
-      <p:sp>
-        <p:nvSpPr>
-          <p:cNvPr id="44" name="Text 42"/>
-          <p:cNvSpPr/>
-          <p:nvPr/>
-        </p:nvSpPr>
-        <p:spPr>
-          <a:xfrm>
-            <a:off x="6519672" y="5577840"/>
-            <a:ext cx="4937760" cy="237744"/>
-          </a:xfrm>
-          <a:prstGeom prst="rect">
-            <a:avLst/>
-          </a:prstGeom>
-          <a:noFill/>
-          <a:ln/>
-        </p:spPr>
-        <p:txBody>
-          <a:bodyPr wrap="square" lIns="0" tIns="0" rIns="0" bIns="0" rtlCol="0" anchor="ctr"/>
-          <a:lstStyle/>
+              <a:t>사진 / 화면</a:t>
+            </a:r>
+            <a:endParaRPr lang="en-US" sz="1100" dirty="0"/>
+          </a:p>
           <a:p>
             <a:pPr algn="ctr" indent="0" marL="0">
-              <a:buNone/>
-            </a:pPr>
-            <a:r>
-              <a:rPr lang="en-US" sz="1050" dirty="0">
+              <a:lnSpc>
+                <a:spcPts val="1600"/>
+              </a:lnSpc>
+              <a:buNone/>
+            </a:pPr>
+            <a:r>
+              <a:rPr lang="en-US" sz="1100" dirty="0">
                 <a:solidFill>
                   <a:srgbClr val="B3A9A5"/>
                 </a:solidFill>
@@ -2749,30 +2935,167 @@
                 <a:ea typeface="맑은 고딕" pitchFamily="34" charset="-122"/>
                 <a:cs typeface="맑은 고딕" pitchFamily="34" charset="-120"/>
               </a:rPr>
-              <a:t>캡션 — 무엇을 보여주는 화면인지 한 줄</a:t>
-            </a:r>
-            <a:endParaRPr lang="en-US" sz="1050" dirty="0"/>
-          </a:p>
-        </p:txBody>
-      </p:sp>
-      <p:sp>
-        <p:nvSpPr>
-          <p:cNvPr id="45" name="Shape 43"/>
-          <p:cNvSpPr/>
-          <p:nvPr/>
-        </p:nvSpPr>
-        <p:spPr>
-          <a:xfrm>
-            <a:off x="6291072" y="6053328"/>
-            <a:ext cx="5394960" cy="566928"/>
+              <a:t>(정사각형)</a:t>
+            </a:r>
+            <a:endParaRPr lang="en-US" sz="1100" dirty="0"/>
+          </a:p>
+        </p:txBody>
+      </p:sp>
+      <p:sp>
+        <p:nvSpPr>
+          <p:cNvPr id="49" name="Text 47"/>
+          <p:cNvSpPr/>
+          <p:nvPr/>
+        </p:nvSpPr>
+        <p:spPr>
+          <a:xfrm>
+            <a:off x="9162288" y="4005072"/>
+            <a:ext cx="2414016" cy="274320"/>
+          </a:xfrm>
+          <a:prstGeom prst="rect">
+            <a:avLst/>
+          </a:prstGeom>
+          <a:noFill/>
+          <a:ln/>
+        </p:spPr>
+        <p:txBody>
+          <a:bodyPr wrap="square" lIns="0" tIns="0" rIns="0" bIns="0" rtlCol="0" anchor="ctr"/>
+          <a:lstStyle/>
+          <a:p>
+            <a:pPr algn="ctr" indent="0" marL="0">
+              <a:buNone/>
+            </a:pPr>
+            <a:r>
+              <a:rPr lang="en-US" sz="950" dirty="0">
+                <a:solidFill>
+                  <a:srgbClr val="B3A9A5"/>
+                </a:solidFill>
+                <a:latin typeface="맑은 고딕" pitchFamily="34" charset="0"/>
+                <a:ea typeface="맑은 고딕" pitchFamily="34" charset="-122"/>
+                <a:cs typeface="맑은 고딕" pitchFamily="34" charset="-120"/>
+              </a:rPr>
+              <a:t>캡션 — 무엇을 보여주는지 한 줄</a:t>
+            </a:r>
+            <a:endParaRPr lang="en-US" sz="950" dirty="0"/>
+          </a:p>
+        </p:txBody>
+      </p:sp>
+      <p:sp>
+        <p:nvSpPr>
+          <p:cNvPr id="50" name="Shape 48"/>
+          <p:cNvSpPr/>
+          <p:nvPr/>
+        </p:nvSpPr>
+        <p:spPr>
+          <a:xfrm>
+            <a:off x="6291072" y="4581144"/>
+            <a:ext cx="237744" cy="237744"/>
+          </a:xfrm>
+          <a:prstGeom prst="ellipse">
+            <a:avLst/>
+          </a:prstGeom>
+          <a:solidFill>
+            <a:srgbClr val="EA002C"/>
+          </a:solidFill>
+          <a:ln/>
+        </p:spPr>
+      </p:sp>
+      <p:sp>
+        <p:nvSpPr>
+          <p:cNvPr id="51" name="Text 49"/>
+          <p:cNvSpPr/>
+          <p:nvPr/>
+        </p:nvSpPr>
+        <p:spPr>
+          <a:xfrm>
+            <a:off x="6656832" y="4535424"/>
+            <a:ext cx="2377440" cy="310896"/>
+          </a:xfrm>
+          <a:prstGeom prst="rect">
+            <a:avLst/>
+          </a:prstGeom>
+          <a:noFill/>
+          <a:ln/>
+        </p:spPr>
+        <p:txBody>
+          <a:bodyPr wrap="square" lIns="0" tIns="0" rIns="0" bIns="0" rtlCol="0" anchor="ctr"/>
+          <a:lstStyle/>
+          <a:p>
+            <a:pPr indent="0" marL="0">
+              <a:buNone/>
+            </a:pPr>
+            <a:r>
+              <a:rPr lang="en-US" sz="1350" b="1" dirty="0">
+                <a:solidFill>
+                  <a:srgbClr val="1F1A18"/>
+                </a:solidFill>
+                <a:latin typeface="맑은 고딕" pitchFamily="34" charset="0"/>
+                <a:ea typeface="맑은 고딕" pitchFamily="34" charset="-122"/>
+                <a:cs typeface="맑은 고딕" pitchFamily="34" charset="-120"/>
+              </a:rPr>
+              <a:t>향후 계획</a:t>
+            </a:r>
+            <a:endParaRPr lang="en-US" sz="1350" dirty="0"/>
+          </a:p>
+        </p:txBody>
+      </p:sp>
+      <p:sp>
+        <p:nvSpPr>
+          <p:cNvPr id="52" name="Text 50"/>
+          <p:cNvSpPr/>
+          <p:nvPr/>
+        </p:nvSpPr>
+        <p:spPr>
+          <a:xfrm>
+            <a:off x="9079992" y="4535424"/>
+            <a:ext cx="2606040" cy="310896"/>
+          </a:xfrm>
+          <a:prstGeom prst="rect">
+            <a:avLst/>
+          </a:prstGeom>
+          <a:noFill/>
+          <a:ln/>
+        </p:spPr>
+        <p:txBody>
+          <a:bodyPr wrap="square" lIns="0" tIns="0" rIns="0" bIns="0" rtlCol="0" anchor="ctr"/>
+          <a:lstStyle/>
+          <a:p>
+            <a:pPr algn="r" indent="0" marL="0">
+              <a:buNone/>
+            </a:pPr>
+            <a:r>
+              <a:rPr lang="en-US" sz="950" dirty="0">
+                <a:solidFill>
+                  <a:srgbClr val="B3A9A5"/>
+                </a:solidFill>
+                <a:latin typeface="맑은 고딕" pitchFamily="34" charset="0"/>
+                <a:ea typeface="맑은 고딕" pitchFamily="34" charset="-122"/>
+                <a:cs typeface="맑은 고딕" pitchFamily="34" charset="-120"/>
+              </a:rPr>
+              <a:t>다음 단계 · 일정</a:t>
+            </a:r>
+            <a:endParaRPr lang="en-US" sz="950" dirty="0"/>
+          </a:p>
+        </p:txBody>
+      </p:sp>
+      <p:sp>
+        <p:nvSpPr>
+          <p:cNvPr id="53" name="Shape 51"/>
+          <p:cNvSpPr/>
+          <p:nvPr/>
+        </p:nvSpPr>
+        <p:spPr>
+          <a:xfrm>
+            <a:off x="6291072" y="4919472"/>
+            <a:ext cx="5394960" cy="1700784"/>
           </a:xfrm>
           <a:prstGeom prst="roundRect">
             <a:avLst>
-              <a:gd name="adj" fmla="val 9677"/>
+              <a:gd name="adj" fmla="val 3226"/>
             </a:avLst>
           </a:prstGeom>
           <a:solidFill>
-            <a:srgbClr val="1F1A18"/>
+            <a:srgbClr val="FFFFFF"/>
           </a:solidFill>
           <a:ln w="12700">
             <a:solidFill>
@@ -2791,40 +3114,95 @@
       </p:sp>
       <p:sp>
         <p:nvSpPr>
-          <p:cNvPr id="46" name="Text 44"/>
-          <p:cNvSpPr/>
-          <p:nvPr/>
-        </p:nvSpPr>
-        <p:spPr>
-          <a:xfrm>
-            <a:off x="6565392" y="6144768"/>
-            <a:ext cx="4846320" cy="384048"/>
-          </a:xfrm>
-          <a:prstGeom prst="rect">
-            <a:avLst/>
-          </a:prstGeom>
-          <a:noFill/>
-          <a:ln/>
-        </p:spPr>
-        <p:txBody>
-          <a:bodyPr wrap="square" lIns="0" tIns="0" rIns="0" bIns="0" rtlCol="0" anchor="ctr"/>
-          <a:lstStyle/>
-          <a:p>
-            <a:pPr indent="0" marL="0">
-              <a:buNone/>
-            </a:pPr>
-            <a:r>
-              <a:rPr lang="en-US" sz="1150" b="1" dirty="0">
-                <a:solidFill>
-                  <a:srgbClr val="E8DFDB"/>
-                </a:solidFill>
-                <a:latin typeface="맑은 고딕" pitchFamily="34" charset="0"/>
-                <a:ea typeface="맑은 고딕" pitchFamily="34" charset="-122"/>
-                <a:cs typeface="맑은 고딕" pitchFamily="34" charset="-120"/>
-              </a:rPr>
-              <a:t>향후 계획 :  다음 단계에서 할 일을 한 줄로</a:t>
-            </a:r>
-            <a:endParaRPr lang="en-US" sz="1150" dirty="0"/>
+          <p:cNvPr id="54" name="Text 52"/>
+          <p:cNvSpPr/>
+          <p:nvPr/>
+        </p:nvSpPr>
+        <p:spPr>
+          <a:xfrm>
+            <a:off x="6611112" y="5138928"/>
+            <a:ext cx="4800600" cy="1280160"/>
+          </a:xfrm>
+          <a:prstGeom prst="rect">
+            <a:avLst/>
+          </a:prstGeom>
+          <a:noFill/>
+          <a:ln/>
+        </p:spPr>
+        <p:txBody>
+          <a:bodyPr wrap="square" lIns="0" tIns="0" rIns="0" bIns="0" rtlCol="0" anchor="ctr"/>
+          <a:lstStyle/>
+          <a:p>
+            <a:pPr marL="342900" indent="-342900">
+              <a:lnSpc>
+                <a:spcPts val="1500"/>
+              </a:lnSpc>
+              <a:spcAft>
+                <a:spcPts val="700"/>
+              </a:spcAft>
+              <a:buSzPct val="100000"/>
+              <a:buChar char="•"/>
+            </a:pPr>
+            <a:r>
+              <a:rPr lang="en-US" sz="1200" dirty="0">
+                <a:solidFill>
+                  <a:srgbClr val="B3A9A5"/>
+                </a:solidFill>
+                <a:latin typeface="맑은 고딕" pitchFamily="34" charset="0"/>
+                <a:ea typeface="맑은 고딕" pitchFamily="34" charset="-122"/>
+                <a:cs typeface="맑은 고딕" pitchFamily="34" charset="-120"/>
+              </a:rPr>
+              <a:t>다음 단계에서 할 일</a:t>
+            </a:r>
+            <a:endParaRPr lang="en-US" sz="1200" dirty="0"/>
+          </a:p>
+          <a:p>
+            <a:pPr marL="342900" indent="-342900">
+              <a:lnSpc>
+                <a:spcPts val="1500"/>
+              </a:lnSpc>
+              <a:spcAft>
+                <a:spcPts val="700"/>
+              </a:spcAft>
+              <a:buSzPct val="100000"/>
+              <a:buChar char="•"/>
+            </a:pPr>
+            <a:r>
+              <a:rPr lang="en-US" sz="1200" dirty="0">
+                <a:solidFill>
+                  <a:srgbClr val="B3A9A5"/>
+                </a:solidFill>
+                <a:latin typeface="맑은 고딕" pitchFamily="34" charset="0"/>
+                <a:ea typeface="맑은 고딕" pitchFamily="34" charset="-122"/>
+                <a:cs typeface="맑은 고딕" pitchFamily="34" charset="-120"/>
+              </a:rPr>
+              <a:t>목표 시점 (예: 26년 4분기)</a:t>
+            </a:r>
+            <a:endParaRPr lang="en-US" sz="1200" dirty="0"/>
+          </a:p>
+          <a:p>
+            <a:pPr marL="342900" indent="-342900">
+              <a:lnSpc>
+                <a:spcPts val="1500"/>
+              </a:lnSpc>
+              <a:spcAft>
+                <a:spcPts val="700"/>
+              </a:spcAft>
+              <a:buSzPct val="100000"/>
+              <a:buChar char="•"/>
+            </a:pPr>
+            <a:r>
+              <a:rPr lang="en-US" sz="1200" dirty="0">
+                <a:solidFill>
+                  <a:srgbClr val="B3A9A5"/>
+                </a:solidFill>
+                <a:latin typeface="맑은 고딕" pitchFamily="34" charset="0"/>
+                <a:ea typeface="맑은 고딕" pitchFamily="34" charset="-122"/>
+                <a:cs typeface="맑은 고딕" pitchFamily="34" charset="-120"/>
+              </a:rPr>
+              <a:t>필요한 지원 · 협조 사항</a:t>
+            </a:r>
+            <a:endParaRPr lang="en-US" sz="1200" dirty="0"/>
           </a:p>
         </p:txBody>
       </p:sp>
@@ -2888,8 +3266,8 @@
         </p:nvSpPr>
         <p:spPr>
           <a:xfrm>
-            <a:off x="411480" y="164592"/>
-            <a:ext cx="640080" cy="566928"/>
+            <a:off x="411480" y="182880"/>
+            <a:ext cx="640080" cy="548640"/>
           </a:xfrm>
           <a:prstGeom prst="rect">
             <a:avLst/>
@@ -2927,8 +3305,8 @@
         </p:nvSpPr>
         <p:spPr>
           <a:xfrm>
-            <a:off x="1051560" y="164592"/>
-            <a:ext cx="5120640" cy="566928"/>
+            <a:off x="1051560" y="182880"/>
+            <a:ext cx="6766560" cy="548640"/>
           </a:xfrm>
           <a:prstGeom prst="rect">
             <a:avLst/>
@@ -2946,66 +3324,105 @@
             <a:r>
               <a:rPr lang="en-US" sz="2300" b="1" dirty="0">
                 <a:solidFill>
+                  <a:srgbClr val="8E8480"/>
+                </a:solidFill>
+                <a:latin typeface="맑은 고딕" pitchFamily="34" charset="0"/>
+                <a:ea typeface="맑은 고딕" pitchFamily="34" charset="-122"/>
+                <a:cs typeface="맑은 고딕" pitchFamily="34" charset="-120"/>
+              </a:rPr>
+              <a:t>프로젝트명을 입력하세요</a:t>
+            </a:r>
+            <a:endParaRPr lang="en-US" sz="2300" dirty="0"/>
+          </a:p>
+        </p:txBody>
+      </p:sp>
+      <p:sp>
+        <p:nvSpPr>
+          <p:cNvPr id="5" name="Text 3"/>
+          <p:cNvSpPr/>
+          <p:nvPr/>
+        </p:nvSpPr>
+        <p:spPr>
+          <a:xfrm>
+            <a:off x="7955280" y="155448"/>
+            <a:ext cx="3840480" cy="292608"/>
+          </a:xfrm>
+          <a:prstGeom prst="rect">
+            <a:avLst/>
+          </a:prstGeom>
+          <a:noFill/>
+          <a:ln/>
+        </p:spPr>
+        <p:txBody>
+          <a:bodyPr wrap="square" lIns="0" tIns="0" rIns="0" bIns="0" rtlCol="0" anchor="ctr"/>
+          <a:lstStyle/>
+          <a:p>
+            <a:pPr algn="r" indent="0" marL="0">
+              <a:buNone/>
+            </a:pPr>
+            <a:r>
+              <a:rPr lang="en-US" sz="1200" dirty="0">
+                <a:solidFill>
+                  <a:srgbClr val="C9BFBB"/>
+                </a:solidFill>
+                <a:latin typeface="맑은 고딕" pitchFamily="34" charset="0"/>
+                <a:ea typeface="맑은 고딕" pitchFamily="34" charset="-122"/>
+                <a:cs typeface="맑은 고딕" pitchFamily="34" charset="-120"/>
+              </a:rPr>
+              <a:t>소속 : ○○팀</a:t>
+            </a:r>
+            <a:endParaRPr lang="en-US" sz="1200" dirty="0"/>
+          </a:p>
+        </p:txBody>
+      </p:sp>
+      <p:sp>
+        <p:nvSpPr>
+          <p:cNvPr id="6" name="Text 4"/>
+          <p:cNvSpPr/>
+          <p:nvPr/>
+        </p:nvSpPr>
+        <p:spPr>
+          <a:xfrm>
+            <a:off x="7955280" y="457200"/>
+            <a:ext cx="3840480" cy="292608"/>
+          </a:xfrm>
+          <a:prstGeom prst="rect">
+            <a:avLst/>
+          </a:prstGeom>
+          <a:noFill/>
+          <a:ln/>
+        </p:spPr>
+        <p:txBody>
+          <a:bodyPr wrap="square" lIns="0" tIns="0" rIns="0" bIns="0" rtlCol="0" anchor="ctr"/>
+          <a:lstStyle/>
+          <a:p>
+            <a:pPr algn="r" indent="0" marL="0">
+              <a:buNone/>
+            </a:pPr>
+            <a:r>
+              <a:rPr lang="en-US" sz="1200" b="1" dirty="0">
+                <a:solidFill>
                   <a:srgbClr val="FFFFFF"/>
                 </a:solidFill>
                 <a:latin typeface="맑은 고딕" pitchFamily="34" charset="0"/>
                 <a:ea typeface="맑은 고딕" pitchFamily="34" charset="-122"/>
                 <a:cs typeface="맑은 고딕" pitchFamily="34" charset="-120"/>
               </a:rPr>
-              <a:t>프로젝트 ②</a:t>
-            </a:r>
-            <a:endParaRPr lang="en-US" sz="2300" dirty="0"/>
-          </a:p>
-        </p:txBody>
-      </p:sp>
-      <p:sp>
-        <p:nvSpPr>
-          <p:cNvPr id="5" name="Text 3"/>
-          <p:cNvSpPr/>
-          <p:nvPr/>
-        </p:nvSpPr>
-        <p:spPr>
-          <a:xfrm>
-            <a:off x="6263640" y="164592"/>
-            <a:ext cx="5532120" cy="566928"/>
-          </a:xfrm>
-          <a:prstGeom prst="rect">
-            <a:avLst/>
-          </a:prstGeom>
-          <a:noFill/>
-          <a:ln/>
-        </p:spPr>
-        <p:txBody>
-          <a:bodyPr wrap="square" lIns="0" tIns="0" rIns="0" bIns="0" rtlCol="0" anchor="ctr"/>
-          <a:lstStyle/>
-          <a:p>
-            <a:pPr algn="r" indent="0" marL="0">
-              <a:buNone/>
-            </a:pPr>
-            <a:r>
-              <a:rPr lang="en-US" sz="1250" dirty="0">
-                <a:solidFill>
-                  <a:srgbClr val="C9BFBB"/>
-                </a:solidFill>
-                <a:latin typeface="맑은 고딕" pitchFamily="34" charset="0"/>
-                <a:ea typeface="맑은 고딕" pitchFamily="34" charset="-122"/>
-                <a:cs typeface="맑은 고딕" pitchFamily="34" charset="-120"/>
-              </a:rPr>
-              <a:t>프로젝트명을 입력하세요</a:t>
-            </a:r>
-            <a:endParaRPr lang="en-US" sz="1250" dirty="0"/>
-          </a:p>
-        </p:txBody>
-      </p:sp>
-      <p:sp>
-        <p:nvSpPr>
-          <p:cNvPr id="6" name="Shape 4"/>
-          <p:cNvSpPr/>
-          <p:nvPr/>
-        </p:nvSpPr>
-        <p:spPr>
-          <a:xfrm>
-            <a:off x="502920" y="1161288"/>
+              <a:t>담당자 : 홍길동</a:t>
+            </a:r>
+            <a:endParaRPr lang="en-US" sz="1200" dirty="0"/>
+          </a:p>
+        </p:txBody>
+      </p:sp>
+      <p:sp>
+        <p:nvSpPr>
+          <p:cNvPr id="7" name="Shape 5"/>
+          <p:cNvSpPr/>
+          <p:nvPr/>
+        </p:nvSpPr>
+        <p:spPr>
+          <a:xfrm>
+            <a:off x="502920" y="1124712"/>
             <a:ext cx="237744" cy="237744"/>
           </a:xfrm>
           <a:prstGeom prst="ellipse">
@@ -3019,14 +3436,14 @@
       </p:sp>
       <p:sp>
         <p:nvSpPr>
-          <p:cNvPr id="7" name="Text 5"/>
-          <p:cNvSpPr/>
-          <p:nvPr/>
-        </p:nvSpPr>
-        <p:spPr>
-          <a:xfrm>
-            <a:off x="868680" y="1115568"/>
-            <a:ext cx="4023360" cy="329184"/>
+          <p:cNvPr id="8" name="Text 6"/>
+          <p:cNvSpPr/>
+          <p:nvPr/>
+        </p:nvSpPr>
+        <p:spPr>
+          <a:xfrm>
+            <a:off x="868680" y="1078992"/>
+            <a:ext cx="2377440" cy="310896"/>
           </a:xfrm>
           <a:prstGeom prst="rect">
             <a:avLst/>
@@ -3058,18 +3475,18 @@
       </p:sp>
       <p:sp>
         <p:nvSpPr>
-          <p:cNvPr id="8" name="Shape 6"/>
-          <p:cNvSpPr/>
-          <p:nvPr/>
-        </p:nvSpPr>
-        <p:spPr>
-          <a:xfrm>
-            <a:off x="502920" y="1536192"/>
-            <a:ext cx="5394960" cy="1783080"/>
+          <p:cNvPr id="9" name="Shape 7"/>
+          <p:cNvSpPr/>
+          <p:nvPr/>
+        </p:nvSpPr>
+        <p:spPr>
+          <a:xfrm>
+            <a:off x="502920" y="1463040"/>
+            <a:ext cx="5394960" cy="1481328"/>
           </a:xfrm>
           <a:prstGeom prst="roundRect">
             <a:avLst>
-              <a:gd name="adj" fmla="val 3077"/>
+              <a:gd name="adj" fmla="val 3704"/>
             </a:avLst>
           </a:prstGeom>
           <a:solidFill>
@@ -3092,14 +3509,14 @@
       </p:sp>
       <p:sp>
         <p:nvSpPr>
-          <p:cNvPr id="9" name="Text 7"/>
-          <p:cNvSpPr/>
-          <p:nvPr/>
-        </p:nvSpPr>
-        <p:spPr>
-          <a:xfrm>
-            <a:off x="822960" y="1783080"/>
-            <a:ext cx="4754880" cy="1325880"/>
+          <p:cNvPr id="10" name="Text 8"/>
+          <p:cNvSpPr/>
+          <p:nvPr/>
+        </p:nvSpPr>
+        <p:spPr>
+          <a:xfrm>
+            <a:off x="822960" y="1682496"/>
+            <a:ext cx="4800600" cy="1097280"/>
           </a:xfrm>
           <a:prstGeom prst="rect">
             <a:avLst/>
@@ -3113,16 +3530,16 @@
           <a:p>
             <a:pPr marL="342900" indent="-342900">
               <a:lnSpc>
-                <a:spcPts val="1600"/>
+                <a:spcPts val="1500"/>
               </a:lnSpc>
               <a:spcAft>
-                <a:spcPts val="800"/>
+                <a:spcPts val="700"/>
               </a:spcAft>
               <a:buSzPct val="100000"/>
               <a:buChar char="•"/>
             </a:pPr>
             <a:r>
-              <a:rPr lang="en-US" sz="1250" dirty="0">
+              <a:rPr lang="en-US" sz="1200" dirty="0">
                 <a:solidFill>
                   <a:srgbClr val="B3A9A5"/>
                 </a:solidFill>
@@ -3130,23 +3547,23 @@
                 <a:ea typeface="맑은 고딕" pitchFamily="34" charset="-122"/>
                 <a:cs typeface="맑은 고딕" pitchFamily="34" charset="-120"/>
               </a:rPr>
-              <a:t>해결하려는 문제를 한 줄로 적으세요</a:t>
-            </a:r>
-            <a:endParaRPr lang="en-US" sz="1250" dirty="0"/>
+              <a:t>해결하려는 문제를 한 줄로</a:t>
+            </a:r>
+            <a:endParaRPr lang="en-US" sz="1200" dirty="0"/>
           </a:p>
           <a:p>
             <a:pPr marL="342900" indent="-342900">
               <a:lnSpc>
-                <a:spcPts val="1600"/>
+                <a:spcPts val="1500"/>
               </a:lnSpc>
               <a:spcAft>
-                <a:spcPts val="800"/>
+                <a:spcPts val="700"/>
               </a:spcAft>
               <a:buSzPct val="100000"/>
               <a:buChar char="•"/>
             </a:pPr>
             <a:r>
-              <a:rPr lang="en-US" sz="1250" dirty="0">
+              <a:rPr lang="en-US" sz="1200" dirty="0">
                 <a:solidFill>
                   <a:srgbClr val="B3A9A5"/>
                 </a:solidFill>
@@ -3154,23 +3571,23 @@
                 <a:ea typeface="맑은 고딕" pitchFamily="34" charset="-122"/>
                 <a:cs typeface="맑은 고딕" pitchFamily="34" charset="-120"/>
               </a:rPr>
-              <a:t>기대 효과(시간 절감·정확도·비용 등)</a:t>
-            </a:r>
-            <a:endParaRPr lang="en-US" sz="1250" dirty="0"/>
+              <a:t>기대 효과 (시간 절감 · 정확도 · 비용 등)</a:t>
+            </a:r>
+            <a:endParaRPr lang="en-US" sz="1200" dirty="0"/>
           </a:p>
           <a:p>
             <a:pPr marL="342900" indent="-342900">
               <a:lnSpc>
-                <a:spcPts val="1600"/>
+                <a:spcPts val="1500"/>
               </a:lnSpc>
               <a:spcAft>
-                <a:spcPts val="800"/>
+                <a:spcPts val="700"/>
               </a:spcAft>
               <a:buSzPct val="100000"/>
               <a:buChar char="•"/>
             </a:pPr>
             <a:r>
-              <a:rPr lang="en-US" sz="1250" dirty="0">
+              <a:rPr lang="en-US" sz="1200" dirty="0">
                 <a:solidFill>
                   <a:srgbClr val="B3A9A5"/>
                 </a:solidFill>
@@ -3180,19 +3597,19 @@
               </a:rPr>
               <a:t>적용 대상 설비 또는 업무 범위</a:t>
             </a:r>
-            <a:endParaRPr lang="en-US" sz="1250" dirty="0"/>
-          </a:p>
-        </p:txBody>
-      </p:sp>
-      <p:sp>
-        <p:nvSpPr>
-          <p:cNvPr id="10" name="Shape 8"/>
-          <p:cNvSpPr/>
-          <p:nvPr/>
-        </p:nvSpPr>
-        <p:spPr>
-          <a:xfrm>
-            <a:off x="502920" y="3538728"/>
+            <a:endParaRPr lang="en-US" sz="1200" dirty="0"/>
+          </a:p>
+        </p:txBody>
+      </p:sp>
+      <p:sp>
+        <p:nvSpPr>
+          <p:cNvPr id="11" name="Shape 9"/>
+          <p:cNvSpPr/>
+          <p:nvPr/>
+        </p:nvSpPr>
+        <p:spPr>
+          <a:xfrm>
+            <a:off x="502920" y="3154680"/>
             <a:ext cx="237744" cy="237744"/>
           </a:xfrm>
           <a:prstGeom prst="ellipse">
@@ -3206,14 +3623,14 @@
       </p:sp>
       <p:sp>
         <p:nvSpPr>
-          <p:cNvPr id="11" name="Text 9"/>
-          <p:cNvSpPr/>
-          <p:nvPr/>
-        </p:nvSpPr>
-        <p:spPr>
-          <a:xfrm>
-            <a:off x="868680" y="3493008"/>
-            <a:ext cx="4023360" cy="329184"/>
+          <p:cNvPr id="12" name="Text 10"/>
+          <p:cNvSpPr/>
+          <p:nvPr/>
+        </p:nvSpPr>
+        <p:spPr>
+          <a:xfrm>
+            <a:off x="868680" y="3108960"/>
+            <a:ext cx="2377440" cy="310896"/>
           </a:xfrm>
           <a:prstGeom prst="rect">
             <a:avLst/>
@@ -3245,13 +3662,52 @@
       </p:sp>
       <p:sp>
         <p:nvSpPr>
-          <p:cNvPr id="12" name="Shape 10"/>
-          <p:cNvSpPr/>
-          <p:nvPr/>
-        </p:nvSpPr>
-        <p:spPr>
-          <a:xfrm>
-            <a:off x="960120" y="4572000"/>
+          <p:cNvPr id="13" name="Text 11"/>
+          <p:cNvSpPr/>
+          <p:nvPr/>
+        </p:nvSpPr>
+        <p:spPr>
+          <a:xfrm>
+            <a:off x="3291840" y="3108960"/>
+            <a:ext cx="2606040" cy="310896"/>
+          </a:xfrm>
+          <a:prstGeom prst="rect">
+            <a:avLst/>
+          </a:prstGeom>
+          <a:noFill/>
+          <a:ln/>
+        </p:spPr>
+        <p:txBody>
+          <a:bodyPr wrap="square" lIns="0" tIns="0" rIns="0" bIns="0" rtlCol="0" anchor="ctr"/>
+          <a:lstStyle/>
+          <a:p>
+            <a:pPr algn="r" indent="0" marL="0">
+              <a:buNone/>
+            </a:pPr>
+            <a:r>
+              <a:rPr lang="en-US" sz="950" dirty="0">
+                <a:solidFill>
+                  <a:srgbClr val="B3A9A5"/>
+                </a:solidFill>
+                <a:latin typeface="맑은 고딕" pitchFamily="34" charset="0"/>
+                <a:ea typeface="맑은 고딕" pitchFamily="34" charset="-122"/>
+                <a:cs typeface="맑은 고딕" pitchFamily="34" charset="-120"/>
+              </a:rPr>
+              <a:t>단계명·색은 수정 가능</a:t>
+            </a:r>
+            <a:endParaRPr lang="en-US" sz="950" dirty="0"/>
+          </a:p>
+        </p:txBody>
+      </p:sp>
+      <p:sp>
+        <p:nvSpPr>
+          <p:cNvPr id="14" name="Shape 12"/>
+          <p:cNvSpPr/>
+          <p:nvPr/>
+        </p:nvSpPr>
+        <p:spPr>
+          <a:xfrm>
+            <a:off x="960120" y="3950208"/>
             <a:ext cx="4443984" cy="0"/>
           </a:xfrm>
           <a:prstGeom prst="line">
@@ -3268,13 +3724,13 @@
       </p:sp>
       <p:sp>
         <p:nvSpPr>
-          <p:cNvPr id="13" name="Shape 11"/>
-          <p:cNvSpPr/>
-          <p:nvPr/>
-        </p:nvSpPr>
-        <p:spPr>
-          <a:xfrm>
-            <a:off x="960120" y="4572000"/>
+          <p:cNvPr id="15" name="Shape 13"/>
+          <p:cNvSpPr/>
+          <p:nvPr/>
+        </p:nvSpPr>
+        <p:spPr>
+          <a:xfrm>
+            <a:off x="960120" y="3950208"/>
             <a:ext cx="1481328" cy="0"/>
           </a:xfrm>
           <a:prstGeom prst="line">
@@ -3291,13 +3747,13 @@
       </p:sp>
       <p:sp>
         <p:nvSpPr>
-          <p:cNvPr id="14" name="Shape 12"/>
-          <p:cNvSpPr/>
-          <p:nvPr/>
-        </p:nvSpPr>
-        <p:spPr>
-          <a:xfrm>
-            <a:off x="822960" y="4434840"/>
+          <p:cNvPr id="16" name="Shape 14"/>
+          <p:cNvSpPr/>
+          <p:nvPr/>
+        </p:nvSpPr>
+        <p:spPr>
+          <a:xfrm>
+            <a:off x="822960" y="3813048"/>
             <a:ext cx="274320" cy="274320"/>
           </a:xfrm>
           <a:prstGeom prst="ellipse">
@@ -3316,13 +3772,13 @@
       </p:sp>
       <p:sp>
         <p:nvSpPr>
-          <p:cNvPr id="15" name="Text 13"/>
-          <p:cNvSpPr/>
-          <p:nvPr/>
-        </p:nvSpPr>
-        <p:spPr>
-          <a:xfrm>
-            <a:off x="411480" y="4041648"/>
+          <p:cNvPr id="17" name="Text 15"/>
+          <p:cNvSpPr/>
+          <p:nvPr/>
+        </p:nvSpPr>
+        <p:spPr>
+          <a:xfrm>
+            <a:off x="411480" y="3438144"/>
             <a:ext cx="1097280" cy="219456"/>
           </a:xfrm>
           <a:prstGeom prst="rect">
@@ -3355,13 +3811,13 @@
       </p:sp>
       <p:sp>
         <p:nvSpPr>
-          <p:cNvPr id="16" name="Text 14"/>
-          <p:cNvSpPr/>
-          <p:nvPr/>
-        </p:nvSpPr>
-        <p:spPr>
-          <a:xfrm>
-            <a:off x="320040" y="4773168"/>
+          <p:cNvPr id="18" name="Text 16"/>
+          <p:cNvSpPr/>
+          <p:nvPr/>
+        </p:nvSpPr>
+        <p:spPr>
+          <a:xfrm>
+            <a:off x="320040" y="4151376"/>
             <a:ext cx="1280160" cy="256032"/>
           </a:xfrm>
           <a:prstGeom prst="rect">
@@ -3394,13 +3850,13 @@
       </p:sp>
       <p:sp>
         <p:nvSpPr>
-          <p:cNvPr id="17" name="Shape 15"/>
-          <p:cNvSpPr/>
-          <p:nvPr/>
-        </p:nvSpPr>
-        <p:spPr>
-          <a:xfrm>
-            <a:off x="2304288" y="4434840"/>
+          <p:cNvPr id="19" name="Shape 17"/>
+          <p:cNvSpPr/>
+          <p:nvPr/>
+        </p:nvSpPr>
+        <p:spPr>
+          <a:xfrm>
+            <a:off x="2304288" y="3813048"/>
             <a:ext cx="274320" cy="274320"/>
           </a:xfrm>
           <a:prstGeom prst="ellipse">
@@ -3419,13 +3875,13 @@
       </p:sp>
       <p:sp>
         <p:nvSpPr>
-          <p:cNvPr id="18" name="Text 16"/>
-          <p:cNvSpPr/>
-          <p:nvPr/>
-        </p:nvSpPr>
-        <p:spPr>
-          <a:xfrm>
-            <a:off x="1892808" y="4041648"/>
+          <p:cNvPr id="20" name="Text 18"/>
+          <p:cNvSpPr/>
+          <p:nvPr/>
+        </p:nvSpPr>
+        <p:spPr>
+          <a:xfrm>
+            <a:off x="1892808" y="3438144"/>
             <a:ext cx="1097280" cy="219456"/>
           </a:xfrm>
           <a:prstGeom prst="rect">
@@ -3458,13 +3914,13 @@
       </p:sp>
       <p:sp>
         <p:nvSpPr>
-          <p:cNvPr id="19" name="Text 17"/>
-          <p:cNvSpPr/>
-          <p:nvPr/>
-        </p:nvSpPr>
-        <p:spPr>
-          <a:xfrm>
-            <a:off x="1801368" y="4773168"/>
+          <p:cNvPr id="21" name="Text 19"/>
+          <p:cNvSpPr/>
+          <p:nvPr/>
+        </p:nvSpPr>
+        <p:spPr>
+          <a:xfrm>
+            <a:off x="1801368" y="4151376"/>
             <a:ext cx="1280160" cy="256032"/>
           </a:xfrm>
           <a:prstGeom prst="rect">
@@ -3497,13 +3953,13 @@
       </p:sp>
       <p:sp>
         <p:nvSpPr>
-          <p:cNvPr id="20" name="Shape 18"/>
-          <p:cNvSpPr/>
-          <p:nvPr/>
-        </p:nvSpPr>
-        <p:spPr>
-          <a:xfrm>
-            <a:off x="3785616" y="4434840"/>
+          <p:cNvPr id="22" name="Shape 20"/>
+          <p:cNvSpPr/>
+          <p:nvPr/>
+        </p:nvSpPr>
+        <p:spPr>
+          <a:xfrm>
+            <a:off x="3785616" y="3813048"/>
             <a:ext cx="274320" cy="274320"/>
           </a:xfrm>
           <a:prstGeom prst="ellipse">
@@ -3522,13 +3978,13 @@
       </p:sp>
       <p:sp>
         <p:nvSpPr>
-          <p:cNvPr id="21" name="Text 19"/>
-          <p:cNvSpPr/>
-          <p:nvPr/>
-        </p:nvSpPr>
-        <p:spPr>
-          <a:xfrm>
-            <a:off x="3374136" y="4041648"/>
+          <p:cNvPr id="23" name="Text 21"/>
+          <p:cNvSpPr/>
+          <p:nvPr/>
+        </p:nvSpPr>
+        <p:spPr>
+          <a:xfrm>
+            <a:off x="3374136" y="3438144"/>
             <a:ext cx="1097280" cy="219456"/>
           </a:xfrm>
           <a:prstGeom prst="rect">
@@ -3561,13 +4017,13 @@
       </p:sp>
       <p:sp>
         <p:nvSpPr>
-          <p:cNvPr id="22" name="Text 20"/>
-          <p:cNvSpPr/>
-          <p:nvPr/>
-        </p:nvSpPr>
-        <p:spPr>
-          <a:xfrm>
-            <a:off x="3282696" y="4773168"/>
+          <p:cNvPr id="24" name="Text 22"/>
+          <p:cNvSpPr/>
+          <p:nvPr/>
+        </p:nvSpPr>
+        <p:spPr>
+          <a:xfrm>
+            <a:off x="3282696" y="4151376"/>
             <a:ext cx="1280160" cy="256032"/>
           </a:xfrm>
           <a:prstGeom prst="rect">
@@ -3600,13 +4056,13 @@
       </p:sp>
       <p:sp>
         <p:nvSpPr>
-          <p:cNvPr id="23" name="Shape 21"/>
-          <p:cNvSpPr/>
-          <p:nvPr/>
-        </p:nvSpPr>
-        <p:spPr>
-          <a:xfrm>
-            <a:off x="5266944" y="4434840"/>
+          <p:cNvPr id="25" name="Shape 23"/>
+          <p:cNvSpPr/>
+          <p:nvPr/>
+        </p:nvSpPr>
+        <p:spPr>
+          <a:xfrm>
+            <a:off x="5266944" y="3813048"/>
             <a:ext cx="274320" cy="274320"/>
           </a:xfrm>
           <a:prstGeom prst="ellipse">
@@ -3625,13 +4081,13 @@
       </p:sp>
       <p:sp>
         <p:nvSpPr>
-          <p:cNvPr id="24" name="Text 22"/>
-          <p:cNvSpPr/>
-          <p:nvPr/>
-        </p:nvSpPr>
-        <p:spPr>
-          <a:xfrm>
-            <a:off x="4855464" y="4041648"/>
+          <p:cNvPr id="26" name="Text 24"/>
+          <p:cNvSpPr/>
+          <p:nvPr/>
+        </p:nvSpPr>
+        <p:spPr>
+          <a:xfrm>
+            <a:off x="4855464" y="3438144"/>
             <a:ext cx="1097280" cy="219456"/>
           </a:xfrm>
           <a:prstGeom prst="rect">
@@ -3664,13 +4120,13 @@
       </p:sp>
       <p:sp>
         <p:nvSpPr>
-          <p:cNvPr id="25" name="Text 23"/>
-          <p:cNvSpPr/>
-          <p:nvPr/>
-        </p:nvSpPr>
-        <p:spPr>
-          <a:xfrm>
-            <a:off x="4764024" y="4773168"/>
+          <p:cNvPr id="27" name="Text 25"/>
+          <p:cNvSpPr/>
+          <p:nvPr/>
+        </p:nvSpPr>
+        <p:spPr>
+          <a:xfrm>
+            <a:off x="4764024" y="4151376"/>
             <a:ext cx="1280160" cy="256032"/>
           </a:xfrm>
           <a:prstGeom prst="rect">
@@ -3703,14 +4159,34 @@
       </p:sp>
       <p:sp>
         <p:nvSpPr>
-          <p:cNvPr id="26" name="Text 24"/>
-          <p:cNvSpPr/>
-          <p:nvPr/>
-        </p:nvSpPr>
-        <p:spPr>
-          <a:xfrm>
-            <a:off x="502920" y="5084064"/>
-            <a:ext cx="5394960" cy="237744"/>
+          <p:cNvPr id="28" name="Shape 26"/>
+          <p:cNvSpPr/>
+          <p:nvPr/>
+        </p:nvSpPr>
+        <p:spPr>
+          <a:xfrm>
+            <a:off x="502920" y="4800600"/>
+            <a:ext cx="237744" cy="237744"/>
+          </a:xfrm>
+          <a:prstGeom prst="ellipse">
+            <a:avLst/>
+          </a:prstGeom>
+          <a:solidFill>
+            <a:srgbClr val="8A7F7A"/>
+          </a:solidFill>
+          <a:ln/>
+        </p:spPr>
+      </p:sp>
+      <p:sp>
+        <p:nvSpPr>
+          <p:cNvPr id="29" name="Text 27"/>
+          <p:cNvSpPr/>
+          <p:nvPr/>
+        </p:nvSpPr>
+        <p:spPr>
+          <a:xfrm>
+            <a:off x="868680" y="4754880"/>
+            <a:ext cx="2377440" cy="310896"/>
           </a:xfrm>
           <a:prstGeom prst="rect">
             <a:avLst/>
@@ -3726,6 +4202,45 @@
               <a:buNone/>
             </a:pPr>
             <a:r>
+              <a:rPr lang="en-US" sz="1350" b="1" dirty="0">
+                <a:solidFill>
+                  <a:srgbClr val="1F1A18"/>
+                </a:solidFill>
+                <a:latin typeface="맑은 고딕" pitchFamily="34" charset="0"/>
+                <a:ea typeface="맑은 고딕" pitchFamily="34" charset="-122"/>
+                <a:cs typeface="맑은 고딕" pitchFamily="34" charset="-120"/>
+              </a:rPr>
+              <a:t>핵심 지표</a:t>
+            </a:r>
+            <a:endParaRPr lang="en-US" sz="1350" dirty="0"/>
+          </a:p>
+        </p:txBody>
+      </p:sp>
+      <p:sp>
+        <p:nvSpPr>
+          <p:cNvPr id="30" name="Text 28"/>
+          <p:cNvSpPr/>
+          <p:nvPr/>
+        </p:nvSpPr>
+        <p:spPr>
+          <a:xfrm>
+            <a:off x="3291840" y="4754880"/>
+            <a:ext cx="2606040" cy="310896"/>
+          </a:xfrm>
+          <a:prstGeom prst="rect">
+            <a:avLst/>
+          </a:prstGeom>
+          <a:noFill/>
+          <a:ln/>
+        </p:spPr>
+        <p:txBody>
+          <a:bodyPr wrap="square" lIns="0" tIns="0" rIns="0" bIns="0" rtlCol="0" anchor="ctr"/>
+          <a:lstStyle/>
+          <a:p>
+            <a:pPr algn="r" indent="0" marL="0">
+              <a:buNone/>
+            </a:pPr>
+            <a:r>
               <a:rPr lang="en-US" sz="950" dirty="0">
                 <a:solidFill>
                   <a:srgbClr val="B3A9A5"/>
@@ -3734,7 +4249,7 @@
                 <a:ea typeface="맑은 고딕" pitchFamily="34" charset="-122"/>
                 <a:cs typeface="맑은 고딕" pitchFamily="34" charset="-120"/>
               </a:rPr>
-              <a:t>※ 단계명·완료 표시는 프로젝트에 맞게 수정</a:t>
+              <a:t>정량 수치가 있으면 기입</a:t>
             </a:r>
             <a:endParaRPr lang="en-US" sz="950" dirty="0"/>
           </a:p>
@@ -3742,18 +4257,18 @@
       </p:sp>
       <p:sp>
         <p:nvSpPr>
-          <p:cNvPr id="27" name="Shape 25"/>
-          <p:cNvSpPr/>
-          <p:nvPr/>
-        </p:nvSpPr>
-        <p:spPr>
-          <a:xfrm>
-            <a:off x="502920" y="5358384"/>
-            <a:ext cx="5394960" cy="1261872"/>
+          <p:cNvPr id="31" name="Shape 29"/>
+          <p:cNvSpPr/>
+          <p:nvPr/>
+        </p:nvSpPr>
+        <p:spPr>
+          <a:xfrm>
+            <a:off x="502920" y="5138928"/>
+            <a:ext cx="5394960" cy="1481328"/>
           </a:xfrm>
           <a:prstGeom prst="roundRect">
             <a:avLst>
-              <a:gd name="adj" fmla="val 4348"/>
+              <a:gd name="adj" fmla="val 3704"/>
             </a:avLst>
           </a:prstGeom>
           <a:solidFill>
@@ -3776,14 +4291,14 @@
       </p:sp>
       <p:sp>
         <p:nvSpPr>
-          <p:cNvPr id="28" name="Text 26"/>
-          <p:cNvSpPr/>
-          <p:nvPr/>
-        </p:nvSpPr>
-        <p:spPr>
-          <a:xfrm>
-            <a:off x="822960" y="5504688"/>
-            <a:ext cx="4754880" cy="237744"/>
+          <p:cNvPr id="32" name="Text 30"/>
+          <p:cNvSpPr/>
+          <p:nvPr/>
+        </p:nvSpPr>
+        <p:spPr>
+          <a:xfrm>
+            <a:off x="822960" y="5321808"/>
+            <a:ext cx="1572768" cy="219456"/>
           </a:xfrm>
           <a:prstGeom prst="rect">
             <a:avLst/>
@@ -3799,30 +4314,30 @@
               <a:buNone/>
             </a:pPr>
             <a:r>
-              <a:rPr lang="en-US" sz="1150" b="1" dirty="0">
-                <a:solidFill>
-                  <a:srgbClr val="EA002C"/>
-                </a:solidFill>
-                <a:latin typeface="맑은 고딕" pitchFamily="34" charset="0"/>
-                <a:ea typeface="맑은 고딕" pitchFamily="34" charset="-122"/>
-                <a:cs typeface="맑은 고딕" pitchFamily="34" charset="-120"/>
-              </a:rPr>
-              <a:t>주요 성과 · 수치</a:t>
-            </a:r>
-            <a:endParaRPr lang="en-US" sz="1150" dirty="0"/>
-          </a:p>
-        </p:txBody>
-      </p:sp>
-      <p:sp>
-        <p:nvSpPr>
-          <p:cNvPr id="29" name="Text 27"/>
-          <p:cNvSpPr/>
-          <p:nvPr/>
-        </p:nvSpPr>
-        <p:spPr>
-          <a:xfrm>
-            <a:off x="822960" y="5833872"/>
-            <a:ext cx="1463040" cy="201168"/>
+              <a:rPr lang="en-US" sz="950" dirty="0">
+                <a:solidFill>
+                  <a:srgbClr val="B3A9A5"/>
+                </a:solidFill>
+                <a:latin typeface="맑은 고딕" pitchFamily="34" charset="0"/>
+                <a:ea typeface="맑은 고딕" pitchFamily="34" charset="-122"/>
+                <a:cs typeface="맑은 고딕" pitchFamily="34" charset="-120"/>
+              </a:rPr>
+              <a:t>예) 작업시간</a:t>
+            </a:r>
+            <a:endParaRPr lang="en-US" sz="950" dirty="0"/>
+          </a:p>
+        </p:txBody>
+      </p:sp>
+      <p:sp>
+        <p:nvSpPr>
+          <p:cNvPr id="33" name="Text 31"/>
+          <p:cNvSpPr/>
+          <p:nvPr/>
+        </p:nvSpPr>
+        <p:spPr>
+          <a:xfrm>
+            <a:off x="822960" y="5541264"/>
+            <a:ext cx="1572768" cy="329184"/>
           </a:xfrm>
           <a:prstGeom prst="rect">
             <a:avLst/>
@@ -3838,6 +4353,45 @@
               <a:buNone/>
             </a:pPr>
             <a:r>
+              <a:rPr lang="en-US" sz="1500" b="1" dirty="0">
+                <a:solidFill>
+                  <a:srgbClr val="1F1A18"/>
+                </a:solidFill>
+                <a:latin typeface="맑은 고딕" pitchFamily="34" charset="0"/>
+                <a:ea typeface="맑은 고딕" pitchFamily="34" charset="-122"/>
+                <a:cs typeface="맑은 고딕" pitchFamily="34" charset="-120"/>
+              </a:rPr>
+              <a:t>3h → 10분</a:t>
+            </a:r>
+            <a:endParaRPr lang="en-US" sz="1500" dirty="0"/>
+          </a:p>
+        </p:txBody>
+      </p:sp>
+      <p:sp>
+        <p:nvSpPr>
+          <p:cNvPr id="34" name="Text 32"/>
+          <p:cNvSpPr/>
+          <p:nvPr/>
+        </p:nvSpPr>
+        <p:spPr>
+          <a:xfrm>
+            <a:off x="2496312" y="5321808"/>
+            <a:ext cx="1572768" cy="219456"/>
+          </a:xfrm>
+          <a:prstGeom prst="rect">
+            <a:avLst/>
+          </a:prstGeom>
+          <a:noFill/>
+          <a:ln/>
+        </p:spPr>
+        <p:txBody>
+          <a:bodyPr wrap="square" lIns="0" tIns="0" rIns="0" bIns="0" rtlCol="0" anchor="ctr"/>
+          <a:lstStyle/>
+          <a:p>
+            <a:pPr indent="0" marL="0">
+              <a:buNone/>
+            </a:pPr>
+            <a:r>
               <a:rPr lang="en-US" sz="950" dirty="0">
                 <a:solidFill>
                   <a:srgbClr val="B3A9A5"/>
@@ -3846,7 +4400,7 @@
                 <a:ea typeface="맑은 고딕" pitchFamily="34" charset="-122"/>
                 <a:cs typeface="맑은 고딕" pitchFamily="34" charset="-120"/>
               </a:rPr>
-              <a:t>항목</a:t>
+              <a:t>예) 오류 건수</a:t>
             </a:r>
             <a:endParaRPr lang="en-US" sz="950" dirty="0"/>
           </a:p>
@@ -3854,14 +4408,14 @@
       </p:sp>
       <p:sp>
         <p:nvSpPr>
-          <p:cNvPr id="30" name="Text 28"/>
-          <p:cNvSpPr/>
-          <p:nvPr/>
-        </p:nvSpPr>
-        <p:spPr>
-          <a:xfrm>
-            <a:off x="822960" y="6035040"/>
-            <a:ext cx="1463040" cy="384048"/>
+          <p:cNvPr id="35" name="Text 33"/>
+          <p:cNvSpPr/>
+          <p:nvPr/>
+        </p:nvSpPr>
+        <p:spPr>
+          <a:xfrm>
+            <a:off x="2496312" y="5541264"/>
+            <a:ext cx="1572768" cy="329184"/>
           </a:xfrm>
           <a:prstGeom prst="rect">
             <a:avLst/>
@@ -3877,7 +4431,7 @@
               <a:buNone/>
             </a:pPr>
             <a:r>
-              <a:rPr lang="en-US" sz="2000" b="1" dirty="0">
+              <a:rPr lang="en-US" sz="1500" b="1" dirty="0">
                 <a:solidFill>
                   <a:srgbClr val="1F1A18"/>
                 </a:solidFill>
@@ -3885,22 +4439,22 @@
                 <a:ea typeface="맑은 고딕" pitchFamily="34" charset="-122"/>
                 <a:cs typeface="맑은 고딕" pitchFamily="34" charset="-120"/>
               </a:rPr>
-              <a:t>00</a:t>
-            </a:r>
-            <a:endParaRPr lang="en-US" sz="2000" dirty="0"/>
-          </a:p>
-        </p:txBody>
-      </p:sp>
-      <p:sp>
-        <p:nvSpPr>
-          <p:cNvPr id="31" name="Text 29"/>
-          <p:cNvSpPr/>
-          <p:nvPr/>
-        </p:nvSpPr>
-        <p:spPr>
-          <a:xfrm>
-            <a:off x="2450592" y="5833872"/>
-            <a:ext cx="1463040" cy="201168"/>
+              <a:t>월 5건 → 0</a:t>
+            </a:r>
+            <a:endParaRPr lang="en-US" sz="1500" dirty="0"/>
+          </a:p>
+        </p:txBody>
+      </p:sp>
+      <p:sp>
+        <p:nvSpPr>
+          <p:cNvPr id="36" name="Text 34"/>
+          <p:cNvSpPr/>
+          <p:nvPr/>
+        </p:nvSpPr>
+        <p:spPr>
+          <a:xfrm>
+            <a:off x="4169664" y="5321808"/>
+            <a:ext cx="1572768" cy="219456"/>
           </a:xfrm>
           <a:prstGeom prst="rect">
             <a:avLst/>
@@ -3924,7 +4478,7 @@
                 <a:ea typeface="맑은 고딕" pitchFamily="34" charset="-122"/>
                 <a:cs typeface="맑은 고딕" pitchFamily="34" charset="-120"/>
               </a:rPr>
-              <a:t>항목</a:t>
+              <a:t>예) 적용 설비</a:t>
             </a:r>
             <a:endParaRPr lang="en-US" sz="950" dirty="0"/>
           </a:p>
@@ -3932,14 +4486,14 @@
       </p:sp>
       <p:sp>
         <p:nvSpPr>
-          <p:cNvPr id="32" name="Text 30"/>
-          <p:cNvSpPr/>
-          <p:nvPr/>
-        </p:nvSpPr>
-        <p:spPr>
-          <a:xfrm>
-            <a:off x="2450592" y="6035040"/>
-            <a:ext cx="1463040" cy="384048"/>
+          <p:cNvPr id="37" name="Text 35"/>
+          <p:cNvSpPr/>
+          <p:nvPr/>
+        </p:nvSpPr>
+        <p:spPr>
+          <a:xfrm>
+            <a:off x="4169664" y="5541264"/>
+            <a:ext cx="1572768" cy="329184"/>
           </a:xfrm>
           <a:prstGeom prst="rect">
             <a:avLst/>
@@ -3955,7 +4509,7 @@
               <a:buNone/>
             </a:pPr>
             <a:r>
-              <a:rPr lang="en-US" sz="2000" b="1" dirty="0">
+              <a:rPr lang="en-US" sz="1500" b="1" dirty="0">
                 <a:solidFill>
                   <a:srgbClr val="1F1A18"/>
                 </a:solidFill>
@@ -3963,22 +4517,22 @@
                 <a:ea typeface="맑은 고딕" pitchFamily="34" charset="-122"/>
                 <a:cs typeface="맑은 고딕" pitchFamily="34" charset="-120"/>
               </a:rPr>
-              <a:t>00</a:t>
-            </a:r>
-            <a:endParaRPr lang="en-US" sz="2000" dirty="0"/>
-          </a:p>
-        </p:txBody>
-      </p:sp>
-      <p:sp>
-        <p:nvSpPr>
-          <p:cNvPr id="33" name="Text 31"/>
-          <p:cNvSpPr/>
-          <p:nvPr/>
-        </p:nvSpPr>
-        <p:spPr>
-          <a:xfrm>
-            <a:off x="4078224" y="5833872"/>
-            <a:ext cx="1463040" cy="201168"/>
+              <a:t>3 호기</a:t>
+            </a:r>
+            <a:endParaRPr lang="en-US" sz="1500" dirty="0"/>
+          </a:p>
+        </p:txBody>
+      </p:sp>
+      <p:sp>
+        <p:nvSpPr>
+          <p:cNvPr id="38" name="Text 36"/>
+          <p:cNvSpPr/>
+          <p:nvPr/>
+        </p:nvSpPr>
+        <p:spPr>
+          <a:xfrm>
+            <a:off x="822960" y="5989320"/>
+            <a:ext cx="4800600" cy="512064"/>
           </a:xfrm>
           <a:prstGeom prst="rect">
             <a:avLst/>
@@ -3991,18 +4545,21 @@
           <a:lstStyle/>
           <a:p>
             <a:pPr indent="0" marL="0">
+              <a:lnSpc>
+                <a:spcPts val="1300"/>
+              </a:lnSpc>
               <a:buNone/>
             </a:pPr>
             <a:r>
               <a:rPr lang="en-US" sz="950" dirty="0">
                 <a:solidFill>
-                  <a:srgbClr val="B3A9A5"/>
-                </a:solidFill>
-                <a:latin typeface="맑은 고딕" pitchFamily="34" charset="0"/>
-                <a:ea typeface="맑은 고딕" pitchFamily="34" charset="-122"/>
-                <a:cs typeface="맑은 고딕" pitchFamily="34" charset="-120"/>
-              </a:rPr>
-              <a:t>항목</a:t>
+                  <a:srgbClr val="9A908C"/>
+                </a:solidFill>
+                <a:latin typeface="맑은 고딕" pitchFamily="34" charset="0"/>
+                <a:ea typeface="맑은 고딕" pitchFamily="34" charset="-122"/>
+                <a:cs typeface="맑은 고딕" pitchFamily="34" charset="-120"/>
+              </a:rPr>
+              <a:t>※ 정량 수치가 없으면 정성 효과로 대체 — 예) 수작업 제거, 이력 관리 체계화, 판단 근거 확보</a:t>
             </a:r>
             <a:endParaRPr lang="en-US" sz="950" dirty="0"/>
           </a:p>
@@ -4010,52 +4567,13 @@
       </p:sp>
       <p:sp>
         <p:nvSpPr>
-          <p:cNvPr id="34" name="Text 32"/>
-          <p:cNvSpPr/>
-          <p:nvPr/>
-        </p:nvSpPr>
-        <p:spPr>
-          <a:xfrm>
-            <a:off x="4078224" y="6035040"/>
-            <a:ext cx="1463040" cy="384048"/>
-          </a:xfrm>
-          <a:prstGeom prst="rect">
-            <a:avLst/>
-          </a:prstGeom>
-          <a:noFill/>
-          <a:ln/>
-        </p:spPr>
-        <p:txBody>
-          <a:bodyPr wrap="square" lIns="0" tIns="0" rIns="0" bIns="0" rtlCol="0" anchor="ctr"/>
-          <a:lstStyle/>
-          <a:p>
-            <a:pPr indent="0" marL="0">
-              <a:buNone/>
-            </a:pPr>
-            <a:r>
-              <a:rPr lang="en-US" sz="2000" b="1" dirty="0">
-                <a:solidFill>
-                  <a:srgbClr val="1F1A18"/>
-                </a:solidFill>
-                <a:latin typeface="맑은 고딕" pitchFamily="34" charset="0"/>
-                <a:ea typeface="맑은 고딕" pitchFamily="34" charset="-122"/>
-                <a:cs typeface="맑은 고딕" pitchFamily="34" charset="-120"/>
-              </a:rPr>
-              <a:t>00</a:t>
-            </a:r>
-            <a:endParaRPr lang="en-US" sz="2000" dirty="0"/>
-          </a:p>
-        </p:txBody>
-      </p:sp>
-      <p:sp>
-        <p:nvSpPr>
-          <p:cNvPr id="35" name="Shape 33"/>
-          <p:cNvSpPr/>
-          <p:nvPr/>
-        </p:nvSpPr>
-        <p:spPr>
-          <a:xfrm>
-            <a:off x="6291072" y="1161288"/>
+          <p:cNvPr id="39" name="Shape 37"/>
+          <p:cNvSpPr/>
+          <p:nvPr/>
+        </p:nvSpPr>
+        <p:spPr>
+          <a:xfrm>
+            <a:off x="6291072" y="1124712"/>
             <a:ext cx="237744" cy="237744"/>
           </a:xfrm>
           <a:prstGeom prst="ellipse">
@@ -4069,14 +4587,14 @@
       </p:sp>
       <p:sp>
         <p:nvSpPr>
-          <p:cNvPr id="36" name="Text 34"/>
-          <p:cNvSpPr/>
-          <p:nvPr/>
-        </p:nvSpPr>
-        <p:spPr>
-          <a:xfrm>
-            <a:off x="6656832" y="1115568"/>
-            <a:ext cx="4023360" cy="329184"/>
+          <p:cNvPr id="40" name="Text 38"/>
+          <p:cNvSpPr/>
+          <p:nvPr/>
+        </p:nvSpPr>
+        <p:spPr>
+          <a:xfrm>
+            <a:off x="6656832" y="1078992"/>
+            <a:ext cx="2377440" cy="310896"/>
           </a:xfrm>
           <a:prstGeom prst="rect">
             <a:avLst/>
@@ -4108,18 +4626,57 @@
       </p:sp>
       <p:sp>
         <p:nvSpPr>
-          <p:cNvPr id="37" name="Shape 35"/>
-          <p:cNvSpPr/>
-          <p:nvPr/>
-        </p:nvSpPr>
-        <p:spPr>
-          <a:xfrm>
-            <a:off x="6291072" y="1536192"/>
-            <a:ext cx="5394960" cy="2121408"/>
+          <p:cNvPr id="41" name="Text 39"/>
+          <p:cNvSpPr/>
+          <p:nvPr/>
+        </p:nvSpPr>
+        <p:spPr>
+          <a:xfrm>
+            <a:off x="9079992" y="1078992"/>
+            <a:ext cx="2606040" cy="310896"/>
+          </a:xfrm>
+          <a:prstGeom prst="rect">
+            <a:avLst/>
+          </a:prstGeom>
+          <a:noFill/>
+          <a:ln/>
+        </p:spPr>
+        <p:txBody>
+          <a:bodyPr wrap="square" lIns="0" tIns="0" rIns="0" bIns="0" rtlCol="0" anchor="ctr"/>
+          <a:lstStyle/>
+          <a:p>
+            <a:pPr algn="r" indent="0" marL="0">
+              <a:buNone/>
+            </a:pPr>
+            <a:r>
+              <a:rPr lang="en-US" sz="950" dirty="0">
+                <a:solidFill>
+                  <a:srgbClr val="B3A9A5"/>
+                </a:solidFill>
+                <a:latin typeface="맑은 고딕" pitchFamily="34" charset="0"/>
+                <a:ea typeface="맑은 고딕" pitchFamily="34" charset="-122"/>
+                <a:cs typeface="맑은 고딕" pitchFamily="34" charset="-120"/>
+              </a:rPr>
+              <a:t>정사각형 영역</a:t>
+            </a:r>
+            <a:endParaRPr lang="en-US" sz="950" dirty="0"/>
+          </a:p>
+        </p:txBody>
+      </p:sp>
+      <p:sp>
+        <p:nvSpPr>
+          <p:cNvPr id="42" name="Shape 40"/>
+          <p:cNvSpPr/>
+          <p:nvPr/>
+        </p:nvSpPr>
+        <p:spPr>
+          <a:xfrm>
+            <a:off x="6291072" y="1463040"/>
+            <a:ext cx="2633472" cy="2889504"/>
           </a:xfrm>
           <a:prstGeom prst="roundRect">
             <a:avLst>
-              <a:gd name="adj" fmla="val 2586"/>
+              <a:gd name="adj" fmla="val 2083"/>
             </a:avLst>
           </a:prstGeom>
           <a:solidFill>
@@ -4142,18 +4699,18 @@
       </p:sp>
       <p:sp>
         <p:nvSpPr>
-          <p:cNvPr id="38" name="Shape 36"/>
-          <p:cNvSpPr/>
-          <p:nvPr/>
-        </p:nvSpPr>
-        <p:spPr>
-          <a:xfrm>
-            <a:off x="6519672" y="1691640"/>
-            <a:ext cx="4937760" cy="1572768"/>
+          <p:cNvPr id="43" name="Shape 41"/>
+          <p:cNvSpPr/>
+          <p:nvPr/>
+        </p:nvSpPr>
+        <p:spPr>
+          <a:xfrm>
+            <a:off x="6446520" y="1618488"/>
+            <a:ext cx="2322576" cy="2322576"/>
           </a:xfrm>
           <a:prstGeom prst="roundRect">
             <a:avLst>
-              <a:gd name="adj" fmla="val 2326"/>
+              <a:gd name="adj" fmla="val 1575"/>
             </a:avLst>
           </a:prstGeom>
           <a:solidFill>
@@ -4169,14 +4726,14 @@
       </p:sp>
       <p:sp>
         <p:nvSpPr>
-          <p:cNvPr id="39" name="Text 37"/>
-          <p:cNvSpPr/>
-          <p:nvPr/>
-        </p:nvSpPr>
-        <p:spPr>
-          <a:xfrm>
-            <a:off x="6519672" y="1691640"/>
-            <a:ext cx="4937760" cy="1572768"/>
+          <p:cNvPr id="44" name="Text 42"/>
+          <p:cNvSpPr/>
+          <p:nvPr/>
+        </p:nvSpPr>
+        <p:spPr>
+          <a:xfrm>
+            <a:off x="6446520" y="1618488"/>
+            <a:ext cx="2322576" cy="2322576"/>
           </a:xfrm>
           <a:prstGeom prst="rect">
             <a:avLst/>
@@ -4189,10 +4746,13 @@
           <a:lstStyle/>
           <a:p>
             <a:pPr algn="ctr" indent="0" marL="0">
-              <a:buNone/>
-            </a:pPr>
-            <a:r>
-              <a:rPr lang="en-US" sz="1200" dirty="0">
+              <a:lnSpc>
+                <a:spcPts val="1600"/>
+              </a:lnSpc>
+              <a:buNone/>
+            </a:pPr>
+            <a:r>
+              <a:rPr lang="en-US" sz="1100" dirty="0">
                 <a:solidFill>
                   <a:srgbClr val="B3A9A5"/>
                 </a:solidFill>
@@ -4200,38 +4760,19 @@
                 <a:ea typeface="맑은 고딕" pitchFamily="34" charset="-122"/>
                 <a:cs typeface="맑은 고딕" pitchFamily="34" charset="-120"/>
               </a:rPr>
-              <a:t>이곳에 사진 또는 화면 캡처를 넣으세요</a:t>
-            </a:r>
-            <a:endParaRPr lang="en-US" sz="1200" dirty="0"/>
-          </a:p>
-        </p:txBody>
-      </p:sp>
-      <p:sp>
-        <p:nvSpPr>
-          <p:cNvPr id="40" name="Text 38"/>
-          <p:cNvSpPr/>
-          <p:nvPr/>
-        </p:nvSpPr>
-        <p:spPr>
-          <a:xfrm>
-            <a:off x="6519672" y="3319272"/>
-            <a:ext cx="4937760" cy="237744"/>
-          </a:xfrm>
-          <a:prstGeom prst="rect">
-            <a:avLst/>
-          </a:prstGeom>
-          <a:noFill/>
-          <a:ln/>
-        </p:spPr>
-        <p:txBody>
-          <a:bodyPr wrap="square" lIns="0" tIns="0" rIns="0" bIns="0" rtlCol="0" anchor="ctr"/>
-          <a:lstStyle/>
+              <a:t>사진 / 화면</a:t>
+            </a:r>
+            <a:endParaRPr lang="en-US" sz="1100" dirty="0"/>
+          </a:p>
           <a:p>
             <a:pPr algn="ctr" indent="0" marL="0">
-              <a:buNone/>
-            </a:pPr>
-            <a:r>
-              <a:rPr lang="en-US" sz="1050" dirty="0">
+              <a:lnSpc>
+                <a:spcPts val="1600"/>
+              </a:lnSpc>
+              <a:buNone/>
+            </a:pPr>
+            <a:r>
+              <a:rPr lang="en-US" sz="1100" dirty="0">
                 <a:solidFill>
                   <a:srgbClr val="B3A9A5"/>
                 </a:solidFill>
@@ -4239,26 +4780,65 @@
                 <a:ea typeface="맑은 고딕" pitchFamily="34" charset="-122"/>
                 <a:cs typeface="맑은 고딕" pitchFamily="34" charset="-120"/>
               </a:rPr>
-              <a:t>캡션 — 무엇을 보여주는 화면인지 한 줄</a:t>
-            </a:r>
-            <a:endParaRPr lang="en-US" sz="1050" dirty="0"/>
-          </a:p>
-        </p:txBody>
-      </p:sp>
-      <p:sp>
-        <p:nvSpPr>
-          <p:cNvPr id="41" name="Shape 39"/>
-          <p:cNvSpPr/>
-          <p:nvPr/>
-        </p:nvSpPr>
-        <p:spPr>
-          <a:xfrm>
-            <a:off x="6291072" y="3794760"/>
-            <a:ext cx="5394960" cy="2121408"/>
+              <a:t>(정사각형)</a:t>
+            </a:r>
+            <a:endParaRPr lang="en-US" sz="1100" dirty="0"/>
+          </a:p>
+        </p:txBody>
+      </p:sp>
+      <p:sp>
+        <p:nvSpPr>
+          <p:cNvPr id="45" name="Text 43"/>
+          <p:cNvSpPr/>
+          <p:nvPr/>
+        </p:nvSpPr>
+        <p:spPr>
+          <a:xfrm>
+            <a:off x="6400800" y="4005072"/>
+            <a:ext cx="2414016" cy="274320"/>
+          </a:xfrm>
+          <a:prstGeom prst="rect">
+            <a:avLst/>
+          </a:prstGeom>
+          <a:noFill/>
+          <a:ln/>
+        </p:spPr>
+        <p:txBody>
+          <a:bodyPr wrap="square" lIns="0" tIns="0" rIns="0" bIns="0" rtlCol="0" anchor="ctr"/>
+          <a:lstStyle/>
+          <a:p>
+            <a:pPr algn="ctr" indent="0" marL="0">
+              <a:buNone/>
+            </a:pPr>
+            <a:r>
+              <a:rPr lang="en-US" sz="950" dirty="0">
+                <a:solidFill>
+                  <a:srgbClr val="B3A9A5"/>
+                </a:solidFill>
+                <a:latin typeface="맑은 고딕" pitchFamily="34" charset="0"/>
+                <a:ea typeface="맑은 고딕" pitchFamily="34" charset="-122"/>
+                <a:cs typeface="맑은 고딕" pitchFamily="34" charset="-120"/>
+              </a:rPr>
+              <a:t>캡션 — 무엇을 보여주는지 한 줄</a:t>
+            </a:r>
+            <a:endParaRPr lang="en-US" sz="950" dirty="0"/>
+          </a:p>
+        </p:txBody>
+      </p:sp>
+      <p:sp>
+        <p:nvSpPr>
+          <p:cNvPr id="46" name="Shape 44"/>
+          <p:cNvSpPr/>
+          <p:nvPr/>
+        </p:nvSpPr>
+        <p:spPr>
+          <a:xfrm>
+            <a:off x="9052560" y="1463040"/>
+            <a:ext cx="2633472" cy="2889504"/>
           </a:xfrm>
           <a:prstGeom prst="roundRect">
             <a:avLst>
-              <a:gd name="adj" fmla="val 2586"/>
+              <a:gd name="adj" fmla="val 2083"/>
             </a:avLst>
           </a:prstGeom>
           <a:solidFill>
@@ -4281,18 +4861,18 @@
       </p:sp>
       <p:sp>
         <p:nvSpPr>
-          <p:cNvPr id="42" name="Shape 40"/>
-          <p:cNvSpPr/>
-          <p:nvPr/>
-        </p:nvSpPr>
-        <p:spPr>
-          <a:xfrm>
-            <a:off x="6519672" y="3950208"/>
-            <a:ext cx="4937760" cy="1572768"/>
+          <p:cNvPr id="47" name="Shape 45"/>
+          <p:cNvSpPr/>
+          <p:nvPr/>
+        </p:nvSpPr>
+        <p:spPr>
+          <a:xfrm>
+            <a:off x="9208008" y="1618488"/>
+            <a:ext cx="2322576" cy="2322576"/>
           </a:xfrm>
           <a:prstGeom prst="roundRect">
             <a:avLst>
-              <a:gd name="adj" fmla="val 2326"/>
+              <a:gd name="adj" fmla="val 1575"/>
             </a:avLst>
           </a:prstGeom>
           <a:solidFill>
@@ -4308,14 +4888,14 @@
       </p:sp>
       <p:sp>
         <p:nvSpPr>
-          <p:cNvPr id="43" name="Text 41"/>
-          <p:cNvSpPr/>
-          <p:nvPr/>
-        </p:nvSpPr>
-        <p:spPr>
-          <a:xfrm>
-            <a:off x="6519672" y="3950208"/>
-            <a:ext cx="4937760" cy="1572768"/>
+          <p:cNvPr id="48" name="Text 46"/>
+          <p:cNvSpPr/>
+          <p:nvPr/>
+        </p:nvSpPr>
+        <p:spPr>
+          <a:xfrm>
+            <a:off x="9208008" y="1618488"/>
+            <a:ext cx="2322576" cy="2322576"/>
           </a:xfrm>
           <a:prstGeom prst="rect">
             <a:avLst/>
@@ -4328,10 +4908,13 @@
           <a:lstStyle/>
           <a:p>
             <a:pPr algn="ctr" indent="0" marL="0">
-              <a:buNone/>
-            </a:pPr>
-            <a:r>
-              <a:rPr lang="en-US" sz="1200" dirty="0">
+              <a:lnSpc>
+                <a:spcPts val="1600"/>
+              </a:lnSpc>
+              <a:buNone/>
+            </a:pPr>
+            <a:r>
+              <a:rPr lang="en-US" sz="1100" dirty="0">
                 <a:solidFill>
                   <a:srgbClr val="B3A9A5"/>
                 </a:solidFill>
@@ -4339,38 +4922,19 @@
                 <a:ea typeface="맑은 고딕" pitchFamily="34" charset="-122"/>
                 <a:cs typeface="맑은 고딕" pitchFamily="34" charset="-120"/>
               </a:rPr>
-              <a:t>이곳에 사진 또는 화면 캡처를 넣으세요</a:t>
-            </a:r>
-            <a:endParaRPr lang="en-US" sz="1200" dirty="0"/>
-          </a:p>
-        </p:txBody>
-      </p:sp>
-      <p:sp>
-        <p:nvSpPr>
-          <p:cNvPr id="44" name="Text 42"/>
-          <p:cNvSpPr/>
-          <p:nvPr/>
-        </p:nvSpPr>
-        <p:spPr>
-          <a:xfrm>
-            <a:off x="6519672" y="5577840"/>
-            <a:ext cx="4937760" cy="237744"/>
-          </a:xfrm>
-          <a:prstGeom prst="rect">
-            <a:avLst/>
-          </a:prstGeom>
-          <a:noFill/>
-          <a:ln/>
-        </p:spPr>
-        <p:txBody>
-          <a:bodyPr wrap="square" lIns="0" tIns="0" rIns="0" bIns="0" rtlCol="0" anchor="ctr"/>
-          <a:lstStyle/>
+              <a:t>사진 / 화면</a:t>
+            </a:r>
+            <a:endParaRPr lang="en-US" sz="1100" dirty="0"/>
+          </a:p>
           <a:p>
             <a:pPr algn="ctr" indent="0" marL="0">
-              <a:buNone/>
-            </a:pPr>
-            <a:r>
-              <a:rPr lang="en-US" sz="1050" dirty="0">
+              <a:lnSpc>
+                <a:spcPts val="1600"/>
+              </a:lnSpc>
+              <a:buNone/>
+            </a:pPr>
+            <a:r>
+              <a:rPr lang="en-US" sz="1100" dirty="0">
                 <a:solidFill>
                   <a:srgbClr val="B3A9A5"/>
                 </a:solidFill>
@@ -4378,30 +4942,167 @@
                 <a:ea typeface="맑은 고딕" pitchFamily="34" charset="-122"/>
                 <a:cs typeface="맑은 고딕" pitchFamily="34" charset="-120"/>
               </a:rPr>
-              <a:t>캡션 — 무엇을 보여주는 화면인지 한 줄</a:t>
-            </a:r>
-            <a:endParaRPr lang="en-US" sz="1050" dirty="0"/>
-          </a:p>
-        </p:txBody>
-      </p:sp>
-      <p:sp>
-        <p:nvSpPr>
-          <p:cNvPr id="45" name="Shape 43"/>
-          <p:cNvSpPr/>
-          <p:nvPr/>
-        </p:nvSpPr>
-        <p:spPr>
-          <a:xfrm>
-            <a:off x="6291072" y="6053328"/>
-            <a:ext cx="5394960" cy="566928"/>
+              <a:t>(정사각형)</a:t>
+            </a:r>
+            <a:endParaRPr lang="en-US" sz="1100" dirty="0"/>
+          </a:p>
+        </p:txBody>
+      </p:sp>
+      <p:sp>
+        <p:nvSpPr>
+          <p:cNvPr id="49" name="Text 47"/>
+          <p:cNvSpPr/>
+          <p:nvPr/>
+        </p:nvSpPr>
+        <p:spPr>
+          <a:xfrm>
+            <a:off x="9162288" y="4005072"/>
+            <a:ext cx="2414016" cy="274320"/>
+          </a:xfrm>
+          <a:prstGeom prst="rect">
+            <a:avLst/>
+          </a:prstGeom>
+          <a:noFill/>
+          <a:ln/>
+        </p:spPr>
+        <p:txBody>
+          <a:bodyPr wrap="square" lIns="0" tIns="0" rIns="0" bIns="0" rtlCol="0" anchor="ctr"/>
+          <a:lstStyle/>
+          <a:p>
+            <a:pPr algn="ctr" indent="0" marL="0">
+              <a:buNone/>
+            </a:pPr>
+            <a:r>
+              <a:rPr lang="en-US" sz="950" dirty="0">
+                <a:solidFill>
+                  <a:srgbClr val="B3A9A5"/>
+                </a:solidFill>
+                <a:latin typeface="맑은 고딕" pitchFamily="34" charset="0"/>
+                <a:ea typeface="맑은 고딕" pitchFamily="34" charset="-122"/>
+                <a:cs typeface="맑은 고딕" pitchFamily="34" charset="-120"/>
+              </a:rPr>
+              <a:t>캡션 — 무엇을 보여주는지 한 줄</a:t>
+            </a:r>
+            <a:endParaRPr lang="en-US" sz="950" dirty="0"/>
+          </a:p>
+        </p:txBody>
+      </p:sp>
+      <p:sp>
+        <p:nvSpPr>
+          <p:cNvPr id="50" name="Shape 48"/>
+          <p:cNvSpPr/>
+          <p:nvPr/>
+        </p:nvSpPr>
+        <p:spPr>
+          <a:xfrm>
+            <a:off x="6291072" y="4581144"/>
+            <a:ext cx="237744" cy="237744"/>
+          </a:xfrm>
+          <a:prstGeom prst="ellipse">
+            <a:avLst/>
+          </a:prstGeom>
+          <a:solidFill>
+            <a:srgbClr val="EA002C"/>
+          </a:solidFill>
+          <a:ln/>
+        </p:spPr>
+      </p:sp>
+      <p:sp>
+        <p:nvSpPr>
+          <p:cNvPr id="51" name="Text 49"/>
+          <p:cNvSpPr/>
+          <p:nvPr/>
+        </p:nvSpPr>
+        <p:spPr>
+          <a:xfrm>
+            <a:off x="6656832" y="4535424"/>
+            <a:ext cx="2377440" cy="310896"/>
+          </a:xfrm>
+          <a:prstGeom prst="rect">
+            <a:avLst/>
+          </a:prstGeom>
+          <a:noFill/>
+          <a:ln/>
+        </p:spPr>
+        <p:txBody>
+          <a:bodyPr wrap="square" lIns="0" tIns="0" rIns="0" bIns="0" rtlCol="0" anchor="ctr"/>
+          <a:lstStyle/>
+          <a:p>
+            <a:pPr indent="0" marL="0">
+              <a:buNone/>
+            </a:pPr>
+            <a:r>
+              <a:rPr lang="en-US" sz="1350" b="1" dirty="0">
+                <a:solidFill>
+                  <a:srgbClr val="1F1A18"/>
+                </a:solidFill>
+                <a:latin typeface="맑은 고딕" pitchFamily="34" charset="0"/>
+                <a:ea typeface="맑은 고딕" pitchFamily="34" charset="-122"/>
+                <a:cs typeface="맑은 고딕" pitchFamily="34" charset="-120"/>
+              </a:rPr>
+              <a:t>향후 계획</a:t>
+            </a:r>
+            <a:endParaRPr lang="en-US" sz="1350" dirty="0"/>
+          </a:p>
+        </p:txBody>
+      </p:sp>
+      <p:sp>
+        <p:nvSpPr>
+          <p:cNvPr id="52" name="Text 50"/>
+          <p:cNvSpPr/>
+          <p:nvPr/>
+        </p:nvSpPr>
+        <p:spPr>
+          <a:xfrm>
+            <a:off x="9079992" y="4535424"/>
+            <a:ext cx="2606040" cy="310896"/>
+          </a:xfrm>
+          <a:prstGeom prst="rect">
+            <a:avLst/>
+          </a:prstGeom>
+          <a:noFill/>
+          <a:ln/>
+        </p:spPr>
+        <p:txBody>
+          <a:bodyPr wrap="square" lIns="0" tIns="0" rIns="0" bIns="0" rtlCol="0" anchor="ctr"/>
+          <a:lstStyle/>
+          <a:p>
+            <a:pPr algn="r" indent="0" marL="0">
+              <a:buNone/>
+            </a:pPr>
+            <a:r>
+              <a:rPr lang="en-US" sz="950" dirty="0">
+                <a:solidFill>
+                  <a:srgbClr val="B3A9A5"/>
+                </a:solidFill>
+                <a:latin typeface="맑은 고딕" pitchFamily="34" charset="0"/>
+                <a:ea typeface="맑은 고딕" pitchFamily="34" charset="-122"/>
+                <a:cs typeface="맑은 고딕" pitchFamily="34" charset="-120"/>
+              </a:rPr>
+              <a:t>다음 단계 · 일정</a:t>
+            </a:r>
+            <a:endParaRPr lang="en-US" sz="950" dirty="0"/>
+          </a:p>
+        </p:txBody>
+      </p:sp>
+      <p:sp>
+        <p:nvSpPr>
+          <p:cNvPr id="53" name="Shape 51"/>
+          <p:cNvSpPr/>
+          <p:nvPr/>
+        </p:nvSpPr>
+        <p:spPr>
+          <a:xfrm>
+            <a:off x="6291072" y="4919472"/>
+            <a:ext cx="5394960" cy="1700784"/>
           </a:xfrm>
           <a:prstGeom prst="roundRect">
             <a:avLst>
-              <a:gd name="adj" fmla="val 9677"/>
+              <a:gd name="adj" fmla="val 3226"/>
             </a:avLst>
           </a:prstGeom>
           <a:solidFill>
-            <a:srgbClr val="1F1A18"/>
+            <a:srgbClr val="FFFFFF"/>
           </a:solidFill>
           <a:ln w="12700">
             <a:solidFill>
@@ -4420,40 +5121,95 @@
       </p:sp>
       <p:sp>
         <p:nvSpPr>
-          <p:cNvPr id="46" name="Text 44"/>
-          <p:cNvSpPr/>
-          <p:nvPr/>
-        </p:nvSpPr>
-        <p:spPr>
-          <a:xfrm>
-            <a:off x="6565392" y="6144768"/>
-            <a:ext cx="4846320" cy="384048"/>
-          </a:xfrm>
-          <a:prstGeom prst="rect">
-            <a:avLst/>
-          </a:prstGeom>
-          <a:noFill/>
-          <a:ln/>
-        </p:spPr>
-        <p:txBody>
-          <a:bodyPr wrap="square" lIns="0" tIns="0" rIns="0" bIns="0" rtlCol="0" anchor="ctr"/>
-          <a:lstStyle/>
-          <a:p>
-            <a:pPr indent="0" marL="0">
-              <a:buNone/>
-            </a:pPr>
-            <a:r>
-              <a:rPr lang="en-US" sz="1150" b="1" dirty="0">
-                <a:solidFill>
-                  <a:srgbClr val="E8DFDB"/>
-                </a:solidFill>
-                <a:latin typeface="맑은 고딕" pitchFamily="34" charset="0"/>
-                <a:ea typeface="맑은 고딕" pitchFamily="34" charset="-122"/>
-                <a:cs typeface="맑은 고딕" pitchFamily="34" charset="-120"/>
-              </a:rPr>
-              <a:t>향후 계획 :  다음 단계에서 할 일을 한 줄로</a:t>
-            </a:r>
-            <a:endParaRPr lang="en-US" sz="1150" dirty="0"/>
+          <p:cNvPr id="54" name="Text 52"/>
+          <p:cNvSpPr/>
+          <p:nvPr/>
+        </p:nvSpPr>
+        <p:spPr>
+          <a:xfrm>
+            <a:off x="6611112" y="5138928"/>
+            <a:ext cx="4800600" cy="1280160"/>
+          </a:xfrm>
+          <a:prstGeom prst="rect">
+            <a:avLst/>
+          </a:prstGeom>
+          <a:noFill/>
+          <a:ln/>
+        </p:spPr>
+        <p:txBody>
+          <a:bodyPr wrap="square" lIns="0" tIns="0" rIns="0" bIns="0" rtlCol="0" anchor="ctr"/>
+          <a:lstStyle/>
+          <a:p>
+            <a:pPr marL="342900" indent="-342900">
+              <a:lnSpc>
+                <a:spcPts val="1500"/>
+              </a:lnSpc>
+              <a:spcAft>
+                <a:spcPts val="700"/>
+              </a:spcAft>
+              <a:buSzPct val="100000"/>
+              <a:buChar char="•"/>
+            </a:pPr>
+            <a:r>
+              <a:rPr lang="en-US" sz="1200" dirty="0">
+                <a:solidFill>
+                  <a:srgbClr val="B3A9A5"/>
+                </a:solidFill>
+                <a:latin typeface="맑은 고딕" pitchFamily="34" charset="0"/>
+                <a:ea typeface="맑은 고딕" pitchFamily="34" charset="-122"/>
+                <a:cs typeface="맑은 고딕" pitchFamily="34" charset="-120"/>
+              </a:rPr>
+              <a:t>다음 단계에서 할 일</a:t>
+            </a:r>
+            <a:endParaRPr lang="en-US" sz="1200" dirty="0"/>
+          </a:p>
+          <a:p>
+            <a:pPr marL="342900" indent="-342900">
+              <a:lnSpc>
+                <a:spcPts val="1500"/>
+              </a:lnSpc>
+              <a:spcAft>
+                <a:spcPts val="700"/>
+              </a:spcAft>
+              <a:buSzPct val="100000"/>
+              <a:buChar char="•"/>
+            </a:pPr>
+            <a:r>
+              <a:rPr lang="en-US" sz="1200" dirty="0">
+                <a:solidFill>
+                  <a:srgbClr val="B3A9A5"/>
+                </a:solidFill>
+                <a:latin typeface="맑은 고딕" pitchFamily="34" charset="0"/>
+                <a:ea typeface="맑은 고딕" pitchFamily="34" charset="-122"/>
+                <a:cs typeface="맑은 고딕" pitchFamily="34" charset="-120"/>
+              </a:rPr>
+              <a:t>목표 시점 (예: 26년 4분기)</a:t>
+            </a:r>
+            <a:endParaRPr lang="en-US" sz="1200" dirty="0"/>
+          </a:p>
+          <a:p>
+            <a:pPr marL="342900" indent="-342900">
+              <a:lnSpc>
+                <a:spcPts val="1500"/>
+              </a:lnSpc>
+              <a:spcAft>
+                <a:spcPts val="700"/>
+              </a:spcAft>
+              <a:buSzPct val="100000"/>
+              <a:buChar char="•"/>
+            </a:pPr>
+            <a:r>
+              <a:rPr lang="en-US" sz="1200" dirty="0">
+                <a:solidFill>
+                  <a:srgbClr val="B3A9A5"/>
+                </a:solidFill>
+                <a:latin typeface="맑은 고딕" pitchFamily="34" charset="0"/>
+                <a:ea typeface="맑은 고딕" pitchFamily="34" charset="-122"/>
+                <a:cs typeface="맑은 고딕" pitchFamily="34" charset="-120"/>
+              </a:rPr>
+              <a:t>필요한 지원 · 협조 사항</a:t>
+            </a:r>
+            <a:endParaRPr lang="en-US" sz="1200" dirty="0"/>
           </a:p>
         </p:txBody>
       </p:sp>
@@ -4517,8 +5273,8 @@
         </p:nvSpPr>
         <p:spPr>
           <a:xfrm>
-            <a:off x="411480" y="164592"/>
-            <a:ext cx="640080" cy="566928"/>
+            <a:off x="411480" y="182880"/>
+            <a:ext cx="640080" cy="548640"/>
           </a:xfrm>
           <a:prstGeom prst="rect">
             <a:avLst/>
@@ -4556,8 +5312,8 @@
         </p:nvSpPr>
         <p:spPr>
           <a:xfrm>
-            <a:off x="1051560" y="164592"/>
-            <a:ext cx="5120640" cy="566928"/>
+            <a:off x="1051560" y="182880"/>
+            <a:ext cx="6766560" cy="548640"/>
           </a:xfrm>
           <a:prstGeom prst="rect">
             <a:avLst/>
@@ -4575,66 +5331,105 @@
             <a:r>
               <a:rPr lang="en-US" sz="2300" b="1" dirty="0">
                 <a:solidFill>
+                  <a:srgbClr val="8E8480"/>
+                </a:solidFill>
+                <a:latin typeface="맑은 고딕" pitchFamily="34" charset="0"/>
+                <a:ea typeface="맑은 고딕" pitchFamily="34" charset="-122"/>
+                <a:cs typeface="맑은 고딕" pitchFamily="34" charset="-120"/>
+              </a:rPr>
+              <a:t>프로젝트명을 입력하세요</a:t>
+            </a:r>
+            <a:endParaRPr lang="en-US" sz="2300" dirty="0"/>
+          </a:p>
+        </p:txBody>
+      </p:sp>
+      <p:sp>
+        <p:nvSpPr>
+          <p:cNvPr id="5" name="Text 3"/>
+          <p:cNvSpPr/>
+          <p:nvPr/>
+        </p:nvSpPr>
+        <p:spPr>
+          <a:xfrm>
+            <a:off x="7955280" y="155448"/>
+            <a:ext cx="3840480" cy="292608"/>
+          </a:xfrm>
+          <a:prstGeom prst="rect">
+            <a:avLst/>
+          </a:prstGeom>
+          <a:noFill/>
+          <a:ln/>
+        </p:spPr>
+        <p:txBody>
+          <a:bodyPr wrap="square" lIns="0" tIns="0" rIns="0" bIns="0" rtlCol="0" anchor="ctr"/>
+          <a:lstStyle/>
+          <a:p>
+            <a:pPr algn="r" indent="0" marL="0">
+              <a:buNone/>
+            </a:pPr>
+            <a:r>
+              <a:rPr lang="en-US" sz="1200" dirty="0">
+                <a:solidFill>
+                  <a:srgbClr val="C9BFBB"/>
+                </a:solidFill>
+                <a:latin typeface="맑은 고딕" pitchFamily="34" charset="0"/>
+                <a:ea typeface="맑은 고딕" pitchFamily="34" charset="-122"/>
+                <a:cs typeface="맑은 고딕" pitchFamily="34" charset="-120"/>
+              </a:rPr>
+              <a:t>소속 : ○○팀</a:t>
+            </a:r>
+            <a:endParaRPr lang="en-US" sz="1200" dirty="0"/>
+          </a:p>
+        </p:txBody>
+      </p:sp>
+      <p:sp>
+        <p:nvSpPr>
+          <p:cNvPr id="6" name="Text 4"/>
+          <p:cNvSpPr/>
+          <p:nvPr/>
+        </p:nvSpPr>
+        <p:spPr>
+          <a:xfrm>
+            <a:off x="7955280" y="457200"/>
+            <a:ext cx="3840480" cy="292608"/>
+          </a:xfrm>
+          <a:prstGeom prst="rect">
+            <a:avLst/>
+          </a:prstGeom>
+          <a:noFill/>
+          <a:ln/>
+        </p:spPr>
+        <p:txBody>
+          <a:bodyPr wrap="square" lIns="0" tIns="0" rIns="0" bIns="0" rtlCol="0" anchor="ctr"/>
+          <a:lstStyle/>
+          <a:p>
+            <a:pPr algn="r" indent="0" marL="0">
+              <a:buNone/>
+            </a:pPr>
+            <a:r>
+              <a:rPr lang="en-US" sz="1200" b="1" dirty="0">
+                <a:solidFill>
                   <a:srgbClr val="FFFFFF"/>
                 </a:solidFill>
                 <a:latin typeface="맑은 고딕" pitchFamily="34" charset="0"/>
                 <a:ea typeface="맑은 고딕" pitchFamily="34" charset="-122"/>
                 <a:cs typeface="맑은 고딕" pitchFamily="34" charset="-120"/>
               </a:rPr>
-              <a:t>프로젝트 ③</a:t>
-            </a:r>
-            <a:endParaRPr lang="en-US" sz="2300" dirty="0"/>
-          </a:p>
-        </p:txBody>
-      </p:sp>
-      <p:sp>
-        <p:nvSpPr>
-          <p:cNvPr id="5" name="Text 3"/>
-          <p:cNvSpPr/>
-          <p:nvPr/>
-        </p:nvSpPr>
-        <p:spPr>
-          <a:xfrm>
-            <a:off x="6263640" y="164592"/>
-            <a:ext cx="5532120" cy="566928"/>
-          </a:xfrm>
-          <a:prstGeom prst="rect">
-            <a:avLst/>
-          </a:prstGeom>
-          <a:noFill/>
-          <a:ln/>
-        </p:spPr>
-        <p:txBody>
-          <a:bodyPr wrap="square" lIns="0" tIns="0" rIns="0" bIns="0" rtlCol="0" anchor="ctr"/>
-          <a:lstStyle/>
-          <a:p>
-            <a:pPr algn="r" indent="0" marL="0">
-              <a:buNone/>
-            </a:pPr>
-            <a:r>
-              <a:rPr lang="en-US" sz="1250" dirty="0">
-                <a:solidFill>
-                  <a:srgbClr val="C9BFBB"/>
-                </a:solidFill>
-                <a:latin typeface="맑은 고딕" pitchFamily="34" charset="0"/>
-                <a:ea typeface="맑은 고딕" pitchFamily="34" charset="-122"/>
-                <a:cs typeface="맑은 고딕" pitchFamily="34" charset="-120"/>
-              </a:rPr>
-              <a:t>프로젝트명을 입력하세요</a:t>
-            </a:r>
-            <a:endParaRPr lang="en-US" sz="1250" dirty="0"/>
-          </a:p>
-        </p:txBody>
-      </p:sp>
-      <p:sp>
-        <p:nvSpPr>
-          <p:cNvPr id="6" name="Shape 4"/>
-          <p:cNvSpPr/>
-          <p:nvPr/>
-        </p:nvSpPr>
-        <p:spPr>
-          <a:xfrm>
-            <a:off x="502920" y="1161288"/>
+              <a:t>담당자 : 홍길동</a:t>
+            </a:r>
+            <a:endParaRPr lang="en-US" sz="1200" dirty="0"/>
+          </a:p>
+        </p:txBody>
+      </p:sp>
+      <p:sp>
+        <p:nvSpPr>
+          <p:cNvPr id="7" name="Shape 5"/>
+          <p:cNvSpPr/>
+          <p:nvPr/>
+        </p:nvSpPr>
+        <p:spPr>
+          <a:xfrm>
+            <a:off x="502920" y="1124712"/>
             <a:ext cx="237744" cy="237744"/>
           </a:xfrm>
           <a:prstGeom prst="ellipse">
@@ -4648,14 +5443,14 @@
       </p:sp>
       <p:sp>
         <p:nvSpPr>
-          <p:cNvPr id="7" name="Text 5"/>
-          <p:cNvSpPr/>
-          <p:nvPr/>
-        </p:nvSpPr>
-        <p:spPr>
-          <a:xfrm>
-            <a:off x="868680" y="1115568"/>
-            <a:ext cx="4023360" cy="329184"/>
+          <p:cNvPr id="8" name="Text 6"/>
+          <p:cNvSpPr/>
+          <p:nvPr/>
+        </p:nvSpPr>
+        <p:spPr>
+          <a:xfrm>
+            <a:off x="868680" y="1078992"/>
+            <a:ext cx="2377440" cy="310896"/>
           </a:xfrm>
           <a:prstGeom prst="rect">
             <a:avLst/>
@@ -4687,18 +5482,18 @@
       </p:sp>
       <p:sp>
         <p:nvSpPr>
-          <p:cNvPr id="8" name="Shape 6"/>
-          <p:cNvSpPr/>
-          <p:nvPr/>
-        </p:nvSpPr>
-        <p:spPr>
-          <a:xfrm>
-            <a:off x="502920" y="1536192"/>
-            <a:ext cx="5394960" cy="1783080"/>
+          <p:cNvPr id="9" name="Shape 7"/>
+          <p:cNvSpPr/>
+          <p:nvPr/>
+        </p:nvSpPr>
+        <p:spPr>
+          <a:xfrm>
+            <a:off x="502920" y="1463040"/>
+            <a:ext cx="5394960" cy="1481328"/>
           </a:xfrm>
           <a:prstGeom prst="roundRect">
             <a:avLst>
-              <a:gd name="adj" fmla="val 3077"/>
+              <a:gd name="adj" fmla="val 3704"/>
             </a:avLst>
           </a:prstGeom>
           <a:solidFill>
@@ -4721,14 +5516,14 @@
       </p:sp>
       <p:sp>
         <p:nvSpPr>
-          <p:cNvPr id="9" name="Text 7"/>
-          <p:cNvSpPr/>
-          <p:nvPr/>
-        </p:nvSpPr>
-        <p:spPr>
-          <a:xfrm>
-            <a:off x="822960" y="1783080"/>
-            <a:ext cx="4754880" cy="1325880"/>
+          <p:cNvPr id="10" name="Text 8"/>
+          <p:cNvSpPr/>
+          <p:nvPr/>
+        </p:nvSpPr>
+        <p:spPr>
+          <a:xfrm>
+            <a:off x="822960" y="1682496"/>
+            <a:ext cx="4800600" cy="1097280"/>
           </a:xfrm>
           <a:prstGeom prst="rect">
             <a:avLst/>
@@ -4742,16 +5537,16 @@
           <a:p>
             <a:pPr marL="342900" indent="-342900">
               <a:lnSpc>
-                <a:spcPts val="1600"/>
+                <a:spcPts val="1500"/>
               </a:lnSpc>
               <a:spcAft>
-                <a:spcPts val="800"/>
+                <a:spcPts val="700"/>
               </a:spcAft>
               <a:buSzPct val="100000"/>
               <a:buChar char="•"/>
             </a:pPr>
             <a:r>
-              <a:rPr lang="en-US" sz="1250" dirty="0">
+              <a:rPr lang="en-US" sz="1200" dirty="0">
                 <a:solidFill>
                   <a:srgbClr val="B3A9A5"/>
                 </a:solidFill>
@@ -4759,23 +5554,23 @@
                 <a:ea typeface="맑은 고딕" pitchFamily="34" charset="-122"/>
                 <a:cs typeface="맑은 고딕" pitchFamily="34" charset="-120"/>
               </a:rPr>
-              <a:t>해결하려는 문제를 한 줄로 적으세요</a:t>
-            </a:r>
-            <a:endParaRPr lang="en-US" sz="1250" dirty="0"/>
+              <a:t>해결하려는 문제를 한 줄로</a:t>
+            </a:r>
+            <a:endParaRPr lang="en-US" sz="1200" dirty="0"/>
           </a:p>
           <a:p>
             <a:pPr marL="342900" indent="-342900">
               <a:lnSpc>
-                <a:spcPts val="1600"/>
+                <a:spcPts val="1500"/>
               </a:lnSpc>
               <a:spcAft>
-                <a:spcPts val="800"/>
+                <a:spcPts val="700"/>
               </a:spcAft>
               <a:buSzPct val="100000"/>
               <a:buChar char="•"/>
             </a:pPr>
             <a:r>
-              <a:rPr lang="en-US" sz="1250" dirty="0">
+              <a:rPr lang="en-US" sz="1200" dirty="0">
                 <a:solidFill>
                   <a:srgbClr val="B3A9A5"/>
                 </a:solidFill>
@@ -4783,23 +5578,23 @@
                 <a:ea typeface="맑은 고딕" pitchFamily="34" charset="-122"/>
                 <a:cs typeface="맑은 고딕" pitchFamily="34" charset="-120"/>
               </a:rPr>
-              <a:t>기대 효과(시간 절감·정확도·비용 등)</a:t>
-            </a:r>
-            <a:endParaRPr lang="en-US" sz="1250" dirty="0"/>
+              <a:t>기대 효과 (시간 절감 · 정확도 · 비용 등)</a:t>
+            </a:r>
+            <a:endParaRPr lang="en-US" sz="1200" dirty="0"/>
           </a:p>
           <a:p>
             <a:pPr marL="342900" indent="-342900">
               <a:lnSpc>
-                <a:spcPts val="1600"/>
+                <a:spcPts val="1500"/>
               </a:lnSpc>
               <a:spcAft>
-                <a:spcPts val="800"/>
+                <a:spcPts val="700"/>
               </a:spcAft>
               <a:buSzPct val="100000"/>
               <a:buChar char="•"/>
             </a:pPr>
             <a:r>
-              <a:rPr lang="en-US" sz="1250" dirty="0">
+              <a:rPr lang="en-US" sz="1200" dirty="0">
                 <a:solidFill>
                   <a:srgbClr val="B3A9A5"/>
                 </a:solidFill>
@@ -4809,19 +5604,19 @@
               </a:rPr>
               <a:t>적용 대상 설비 또는 업무 범위</a:t>
             </a:r>
-            <a:endParaRPr lang="en-US" sz="1250" dirty="0"/>
-          </a:p>
-        </p:txBody>
-      </p:sp>
-      <p:sp>
-        <p:nvSpPr>
-          <p:cNvPr id="10" name="Shape 8"/>
-          <p:cNvSpPr/>
-          <p:nvPr/>
-        </p:nvSpPr>
-        <p:spPr>
-          <a:xfrm>
-            <a:off x="502920" y="3538728"/>
+            <a:endParaRPr lang="en-US" sz="1200" dirty="0"/>
+          </a:p>
+        </p:txBody>
+      </p:sp>
+      <p:sp>
+        <p:nvSpPr>
+          <p:cNvPr id="11" name="Shape 9"/>
+          <p:cNvSpPr/>
+          <p:nvPr/>
+        </p:nvSpPr>
+        <p:spPr>
+          <a:xfrm>
+            <a:off x="502920" y="3154680"/>
             <a:ext cx="237744" cy="237744"/>
           </a:xfrm>
           <a:prstGeom prst="ellipse">
@@ -4835,14 +5630,14 @@
       </p:sp>
       <p:sp>
         <p:nvSpPr>
-          <p:cNvPr id="11" name="Text 9"/>
-          <p:cNvSpPr/>
-          <p:nvPr/>
-        </p:nvSpPr>
-        <p:spPr>
-          <a:xfrm>
-            <a:off x="868680" y="3493008"/>
-            <a:ext cx="4023360" cy="329184"/>
+          <p:cNvPr id="12" name="Text 10"/>
+          <p:cNvSpPr/>
+          <p:nvPr/>
+        </p:nvSpPr>
+        <p:spPr>
+          <a:xfrm>
+            <a:off x="868680" y="3108960"/>
+            <a:ext cx="2377440" cy="310896"/>
           </a:xfrm>
           <a:prstGeom prst="rect">
             <a:avLst/>
@@ -4874,13 +5669,52 @@
       </p:sp>
       <p:sp>
         <p:nvSpPr>
-          <p:cNvPr id="12" name="Shape 10"/>
-          <p:cNvSpPr/>
-          <p:nvPr/>
-        </p:nvSpPr>
-        <p:spPr>
-          <a:xfrm>
-            <a:off x="960120" y="4572000"/>
+          <p:cNvPr id="13" name="Text 11"/>
+          <p:cNvSpPr/>
+          <p:nvPr/>
+        </p:nvSpPr>
+        <p:spPr>
+          <a:xfrm>
+            <a:off x="3291840" y="3108960"/>
+            <a:ext cx="2606040" cy="310896"/>
+          </a:xfrm>
+          <a:prstGeom prst="rect">
+            <a:avLst/>
+          </a:prstGeom>
+          <a:noFill/>
+          <a:ln/>
+        </p:spPr>
+        <p:txBody>
+          <a:bodyPr wrap="square" lIns="0" tIns="0" rIns="0" bIns="0" rtlCol="0" anchor="ctr"/>
+          <a:lstStyle/>
+          <a:p>
+            <a:pPr algn="r" indent="0" marL="0">
+              <a:buNone/>
+            </a:pPr>
+            <a:r>
+              <a:rPr lang="en-US" sz="950" dirty="0">
+                <a:solidFill>
+                  <a:srgbClr val="B3A9A5"/>
+                </a:solidFill>
+                <a:latin typeface="맑은 고딕" pitchFamily="34" charset="0"/>
+                <a:ea typeface="맑은 고딕" pitchFamily="34" charset="-122"/>
+                <a:cs typeface="맑은 고딕" pitchFamily="34" charset="-120"/>
+              </a:rPr>
+              <a:t>단계명·색은 수정 가능</a:t>
+            </a:r>
+            <a:endParaRPr lang="en-US" sz="950" dirty="0"/>
+          </a:p>
+        </p:txBody>
+      </p:sp>
+      <p:sp>
+        <p:nvSpPr>
+          <p:cNvPr id="14" name="Shape 12"/>
+          <p:cNvSpPr/>
+          <p:nvPr/>
+        </p:nvSpPr>
+        <p:spPr>
+          <a:xfrm>
+            <a:off x="960120" y="3950208"/>
             <a:ext cx="4443984" cy="0"/>
           </a:xfrm>
           <a:prstGeom prst="line">
@@ -4897,13 +5731,13 @@
       </p:sp>
       <p:sp>
         <p:nvSpPr>
-          <p:cNvPr id="13" name="Shape 11"/>
-          <p:cNvSpPr/>
-          <p:nvPr/>
-        </p:nvSpPr>
-        <p:spPr>
-          <a:xfrm>
-            <a:off x="960120" y="4572000"/>
+          <p:cNvPr id="15" name="Shape 13"/>
+          <p:cNvSpPr/>
+          <p:nvPr/>
+        </p:nvSpPr>
+        <p:spPr>
+          <a:xfrm>
+            <a:off x="960120" y="3950208"/>
             <a:ext cx="1481328" cy="0"/>
           </a:xfrm>
           <a:prstGeom prst="line">
@@ -4920,13 +5754,13 @@
       </p:sp>
       <p:sp>
         <p:nvSpPr>
-          <p:cNvPr id="14" name="Shape 12"/>
-          <p:cNvSpPr/>
-          <p:nvPr/>
-        </p:nvSpPr>
-        <p:spPr>
-          <a:xfrm>
-            <a:off x="822960" y="4434840"/>
+          <p:cNvPr id="16" name="Shape 14"/>
+          <p:cNvSpPr/>
+          <p:nvPr/>
+        </p:nvSpPr>
+        <p:spPr>
+          <a:xfrm>
+            <a:off x="822960" y="3813048"/>
             <a:ext cx="274320" cy="274320"/>
           </a:xfrm>
           <a:prstGeom prst="ellipse">
@@ -4945,13 +5779,13 @@
       </p:sp>
       <p:sp>
         <p:nvSpPr>
-          <p:cNvPr id="15" name="Text 13"/>
-          <p:cNvSpPr/>
-          <p:nvPr/>
-        </p:nvSpPr>
-        <p:spPr>
-          <a:xfrm>
-            <a:off x="411480" y="4041648"/>
+          <p:cNvPr id="17" name="Text 15"/>
+          <p:cNvSpPr/>
+          <p:nvPr/>
+        </p:nvSpPr>
+        <p:spPr>
+          <a:xfrm>
+            <a:off x="411480" y="3438144"/>
             <a:ext cx="1097280" cy="219456"/>
           </a:xfrm>
           <a:prstGeom prst="rect">
@@ -4984,13 +5818,13 @@
       </p:sp>
       <p:sp>
         <p:nvSpPr>
-          <p:cNvPr id="16" name="Text 14"/>
-          <p:cNvSpPr/>
-          <p:nvPr/>
-        </p:nvSpPr>
-        <p:spPr>
-          <a:xfrm>
-            <a:off x="320040" y="4773168"/>
+          <p:cNvPr id="18" name="Text 16"/>
+          <p:cNvSpPr/>
+          <p:nvPr/>
+        </p:nvSpPr>
+        <p:spPr>
+          <a:xfrm>
+            <a:off x="320040" y="4151376"/>
             <a:ext cx="1280160" cy="256032"/>
           </a:xfrm>
           <a:prstGeom prst="rect">
@@ -5023,13 +5857,13 @@
       </p:sp>
       <p:sp>
         <p:nvSpPr>
-          <p:cNvPr id="17" name="Shape 15"/>
-          <p:cNvSpPr/>
-          <p:nvPr/>
-        </p:nvSpPr>
-        <p:spPr>
-          <a:xfrm>
-            <a:off x="2304288" y="4434840"/>
+          <p:cNvPr id="19" name="Shape 17"/>
+          <p:cNvSpPr/>
+          <p:nvPr/>
+        </p:nvSpPr>
+        <p:spPr>
+          <a:xfrm>
+            <a:off x="2304288" y="3813048"/>
             <a:ext cx="274320" cy="274320"/>
           </a:xfrm>
           <a:prstGeom prst="ellipse">
@@ -5048,13 +5882,13 @@
       </p:sp>
       <p:sp>
         <p:nvSpPr>
-          <p:cNvPr id="18" name="Text 16"/>
-          <p:cNvSpPr/>
-          <p:nvPr/>
-        </p:nvSpPr>
-        <p:spPr>
-          <a:xfrm>
-            <a:off x="1892808" y="4041648"/>
+          <p:cNvPr id="20" name="Text 18"/>
+          <p:cNvSpPr/>
+          <p:nvPr/>
+        </p:nvSpPr>
+        <p:spPr>
+          <a:xfrm>
+            <a:off x="1892808" y="3438144"/>
             <a:ext cx="1097280" cy="219456"/>
           </a:xfrm>
           <a:prstGeom prst="rect">
@@ -5087,13 +5921,13 @@
       </p:sp>
       <p:sp>
         <p:nvSpPr>
-          <p:cNvPr id="19" name="Text 17"/>
-          <p:cNvSpPr/>
-          <p:nvPr/>
-        </p:nvSpPr>
-        <p:spPr>
-          <a:xfrm>
-            <a:off x="1801368" y="4773168"/>
+          <p:cNvPr id="21" name="Text 19"/>
+          <p:cNvSpPr/>
+          <p:nvPr/>
+        </p:nvSpPr>
+        <p:spPr>
+          <a:xfrm>
+            <a:off x="1801368" y="4151376"/>
             <a:ext cx="1280160" cy="256032"/>
           </a:xfrm>
           <a:prstGeom prst="rect">
@@ -5126,13 +5960,13 @@
       </p:sp>
       <p:sp>
         <p:nvSpPr>
-          <p:cNvPr id="20" name="Shape 18"/>
-          <p:cNvSpPr/>
-          <p:nvPr/>
-        </p:nvSpPr>
-        <p:spPr>
-          <a:xfrm>
-            <a:off x="3785616" y="4434840"/>
+          <p:cNvPr id="22" name="Shape 20"/>
+          <p:cNvSpPr/>
+          <p:nvPr/>
+        </p:nvSpPr>
+        <p:spPr>
+          <a:xfrm>
+            <a:off x="3785616" y="3813048"/>
             <a:ext cx="274320" cy="274320"/>
           </a:xfrm>
           <a:prstGeom prst="ellipse">
@@ -5151,13 +5985,13 @@
       </p:sp>
       <p:sp>
         <p:nvSpPr>
-          <p:cNvPr id="21" name="Text 19"/>
-          <p:cNvSpPr/>
-          <p:nvPr/>
-        </p:nvSpPr>
-        <p:spPr>
-          <a:xfrm>
-            <a:off x="3374136" y="4041648"/>
+          <p:cNvPr id="23" name="Text 21"/>
+          <p:cNvSpPr/>
+          <p:nvPr/>
+        </p:nvSpPr>
+        <p:spPr>
+          <a:xfrm>
+            <a:off x="3374136" y="3438144"/>
             <a:ext cx="1097280" cy="219456"/>
           </a:xfrm>
           <a:prstGeom prst="rect">
@@ -5190,13 +6024,13 @@
       </p:sp>
       <p:sp>
         <p:nvSpPr>
-          <p:cNvPr id="22" name="Text 20"/>
-          <p:cNvSpPr/>
-          <p:nvPr/>
-        </p:nvSpPr>
-        <p:spPr>
-          <a:xfrm>
-            <a:off x="3282696" y="4773168"/>
+          <p:cNvPr id="24" name="Text 22"/>
+          <p:cNvSpPr/>
+          <p:nvPr/>
+        </p:nvSpPr>
+        <p:spPr>
+          <a:xfrm>
+            <a:off x="3282696" y="4151376"/>
             <a:ext cx="1280160" cy="256032"/>
           </a:xfrm>
           <a:prstGeom prst="rect">
@@ -5229,13 +6063,13 @@
       </p:sp>
       <p:sp>
         <p:nvSpPr>
-          <p:cNvPr id="23" name="Shape 21"/>
-          <p:cNvSpPr/>
-          <p:nvPr/>
-        </p:nvSpPr>
-        <p:spPr>
-          <a:xfrm>
-            <a:off x="5266944" y="4434840"/>
+          <p:cNvPr id="25" name="Shape 23"/>
+          <p:cNvSpPr/>
+          <p:nvPr/>
+        </p:nvSpPr>
+        <p:spPr>
+          <a:xfrm>
+            <a:off x="5266944" y="3813048"/>
             <a:ext cx="274320" cy="274320"/>
           </a:xfrm>
           <a:prstGeom prst="ellipse">
@@ -5254,13 +6088,13 @@
       </p:sp>
       <p:sp>
         <p:nvSpPr>
-          <p:cNvPr id="24" name="Text 22"/>
-          <p:cNvSpPr/>
-          <p:nvPr/>
-        </p:nvSpPr>
-        <p:spPr>
-          <a:xfrm>
-            <a:off x="4855464" y="4041648"/>
+          <p:cNvPr id="26" name="Text 24"/>
+          <p:cNvSpPr/>
+          <p:nvPr/>
+        </p:nvSpPr>
+        <p:spPr>
+          <a:xfrm>
+            <a:off x="4855464" y="3438144"/>
             <a:ext cx="1097280" cy="219456"/>
           </a:xfrm>
           <a:prstGeom prst="rect">
@@ -5293,13 +6127,13 @@
       </p:sp>
       <p:sp>
         <p:nvSpPr>
-          <p:cNvPr id="25" name="Text 23"/>
-          <p:cNvSpPr/>
-          <p:nvPr/>
-        </p:nvSpPr>
-        <p:spPr>
-          <a:xfrm>
-            <a:off x="4764024" y="4773168"/>
+          <p:cNvPr id="27" name="Text 25"/>
+          <p:cNvSpPr/>
+          <p:nvPr/>
+        </p:nvSpPr>
+        <p:spPr>
+          <a:xfrm>
+            <a:off x="4764024" y="4151376"/>
             <a:ext cx="1280160" cy="256032"/>
           </a:xfrm>
           <a:prstGeom prst="rect">
@@ -5332,14 +6166,34 @@
       </p:sp>
       <p:sp>
         <p:nvSpPr>
-          <p:cNvPr id="26" name="Text 24"/>
-          <p:cNvSpPr/>
-          <p:nvPr/>
-        </p:nvSpPr>
-        <p:spPr>
-          <a:xfrm>
-            <a:off x="502920" y="5084064"/>
-            <a:ext cx="5394960" cy="237744"/>
+          <p:cNvPr id="28" name="Shape 26"/>
+          <p:cNvSpPr/>
+          <p:nvPr/>
+        </p:nvSpPr>
+        <p:spPr>
+          <a:xfrm>
+            <a:off x="502920" y="4800600"/>
+            <a:ext cx="237744" cy="237744"/>
+          </a:xfrm>
+          <a:prstGeom prst="ellipse">
+            <a:avLst/>
+          </a:prstGeom>
+          <a:solidFill>
+            <a:srgbClr val="8A7F7A"/>
+          </a:solidFill>
+          <a:ln/>
+        </p:spPr>
+      </p:sp>
+      <p:sp>
+        <p:nvSpPr>
+          <p:cNvPr id="29" name="Text 27"/>
+          <p:cNvSpPr/>
+          <p:nvPr/>
+        </p:nvSpPr>
+        <p:spPr>
+          <a:xfrm>
+            <a:off x="868680" y="4754880"/>
+            <a:ext cx="2377440" cy="310896"/>
           </a:xfrm>
           <a:prstGeom prst="rect">
             <a:avLst/>
@@ -5355,6 +6209,45 @@
               <a:buNone/>
             </a:pPr>
             <a:r>
+              <a:rPr lang="en-US" sz="1350" b="1" dirty="0">
+                <a:solidFill>
+                  <a:srgbClr val="1F1A18"/>
+                </a:solidFill>
+                <a:latin typeface="맑은 고딕" pitchFamily="34" charset="0"/>
+                <a:ea typeface="맑은 고딕" pitchFamily="34" charset="-122"/>
+                <a:cs typeface="맑은 고딕" pitchFamily="34" charset="-120"/>
+              </a:rPr>
+              <a:t>핵심 지표</a:t>
+            </a:r>
+            <a:endParaRPr lang="en-US" sz="1350" dirty="0"/>
+          </a:p>
+        </p:txBody>
+      </p:sp>
+      <p:sp>
+        <p:nvSpPr>
+          <p:cNvPr id="30" name="Text 28"/>
+          <p:cNvSpPr/>
+          <p:nvPr/>
+        </p:nvSpPr>
+        <p:spPr>
+          <a:xfrm>
+            <a:off x="3291840" y="4754880"/>
+            <a:ext cx="2606040" cy="310896"/>
+          </a:xfrm>
+          <a:prstGeom prst="rect">
+            <a:avLst/>
+          </a:prstGeom>
+          <a:noFill/>
+          <a:ln/>
+        </p:spPr>
+        <p:txBody>
+          <a:bodyPr wrap="square" lIns="0" tIns="0" rIns="0" bIns="0" rtlCol="0" anchor="ctr"/>
+          <a:lstStyle/>
+          <a:p>
+            <a:pPr algn="r" indent="0" marL="0">
+              <a:buNone/>
+            </a:pPr>
+            <a:r>
               <a:rPr lang="en-US" sz="950" dirty="0">
                 <a:solidFill>
                   <a:srgbClr val="B3A9A5"/>
@@ -5363,7 +6256,7 @@
                 <a:ea typeface="맑은 고딕" pitchFamily="34" charset="-122"/>
                 <a:cs typeface="맑은 고딕" pitchFamily="34" charset="-120"/>
               </a:rPr>
-              <a:t>※ 단계명·완료 표시는 프로젝트에 맞게 수정</a:t>
+              <a:t>정량 수치가 있으면 기입</a:t>
             </a:r>
             <a:endParaRPr lang="en-US" sz="950" dirty="0"/>
           </a:p>
@@ -5371,18 +6264,18 @@
       </p:sp>
       <p:sp>
         <p:nvSpPr>
-          <p:cNvPr id="27" name="Shape 25"/>
-          <p:cNvSpPr/>
-          <p:nvPr/>
-        </p:nvSpPr>
-        <p:spPr>
-          <a:xfrm>
-            <a:off x="502920" y="5358384"/>
-            <a:ext cx="5394960" cy="1261872"/>
+          <p:cNvPr id="31" name="Shape 29"/>
+          <p:cNvSpPr/>
+          <p:nvPr/>
+        </p:nvSpPr>
+        <p:spPr>
+          <a:xfrm>
+            <a:off x="502920" y="5138928"/>
+            <a:ext cx="5394960" cy="1481328"/>
           </a:xfrm>
           <a:prstGeom prst="roundRect">
             <a:avLst>
-              <a:gd name="adj" fmla="val 4348"/>
+              <a:gd name="adj" fmla="val 3704"/>
             </a:avLst>
           </a:prstGeom>
           <a:solidFill>
@@ -5405,14 +6298,14 @@
       </p:sp>
       <p:sp>
         <p:nvSpPr>
-          <p:cNvPr id="28" name="Text 26"/>
-          <p:cNvSpPr/>
-          <p:nvPr/>
-        </p:nvSpPr>
-        <p:spPr>
-          <a:xfrm>
-            <a:off x="822960" y="5504688"/>
-            <a:ext cx="4754880" cy="237744"/>
+          <p:cNvPr id="32" name="Text 30"/>
+          <p:cNvSpPr/>
+          <p:nvPr/>
+        </p:nvSpPr>
+        <p:spPr>
+          <a:xfrm>
+            <a:off x="822960" y="5321808"/>
+            <a:ext cx="1572768" cy="219456"/>
           </a:xfrm>
           <a:prstGeom prst="rect">
             <a:avLst/>
@@ -5428,30 +6321,30 @@
               <a:buNone/>
             </a:pPr>
             <a:r>
-              <a:rPr lang="en-US" sz="1150" b="1" dirty="0">
-                <a:solidFill>
-                  <a:srgbClr val="EA002C"/>
-                </a:solidFill>
-                <a:latin typeface="맑은 고딕" pitchFamily="34" charset="0"/>
-                <a:ea typeface="맑은 고딕" pitchFamily="34" charset="-122"/>
-                <a:cs typeface="맑은 고딕" pitchFamily="34" charset="-120"/>
-              </a:rPr>
-              <a:t>주요 성과 · 수치</a:t>
-            </a:r>
-            <a:endParaRPr lang="en-US" sz="1150" dirty="0"/>
-          </a:p>
-        </p:txBody>
-      </p:sp>
-      <p:sp>
-        <p:nvSpPr>
-          <p:cNvPr id="29" name="Text 27"/>
-          <p:cNvSpPr/>
-          <p:nvPr/>
-        </p:nvSpPr>
-        <p:spPr>
-          <a:xfrm>
-            <a:off x="822960" y="5833872"/>
-            <a:ext cx="1463040" cy="201168"/>
+              <a:rPr lang="en-US" sz="950" dirty="0">
+                <a:solidFill>
+                  <a:srgbClr val="B3A9A5"/>
+                </a:solidFill>
+                <a:latin typeface="맑은 고딕" pitchFamily="34" charset="0"/>
+                <a:ea typeface="맑은 고딕" pitchFamily="34" charset="-122"/>
+                <a:cs typeface="맑은 고딕" pitchFamily="34" charset="-120"/>
+              </a:rPr>
+              <a:t>예) 작업시간</a:t>
+            </a:r>
+            <a:endParaRPr lang="en-US" sz="950" dirty="0"/>
+          </a:p>
+        </p:txBody>
+      </p:sp>
+      <p:sp>
+        <p:nvSpPr>
+          <p:cNvPr id="33" name="Text 31"/>
+          <p:cNvSpPr/>
+          <p:nvPr/>
+        </p:nvSpPr>
+        <p:spPr>
+          <a:xfrm>
+            <a:off x="822960" y="5541264"/>
+            <a:ext cx="1572768" cy="329184"/>
           </a:xfrm>
           <a:prstGeom prst="rect">
             <a:avLst/>
@@ -5467,6 +6360,45 @@
               <a:buNone/>
             </a:pPr>
             <a:r>
+              <a:rPr lang="en-US" sz="1500" b="1" dirty="0">
+                <a:solidFill>
+                  <a:srgbClr val="1F1A18"/>
+                </a:solidFill>
+                <a:latin typeface="맑은 고딕" pitchFamily="34" charset="0"/>
+                <a:ea typeface="맑은 고딕" pitchFamily="34" charset="-122"/>
+                <a:cs typeface="맑은 고딕" pitchFamily="34" charset="-120"/>
+              </a:rPr>
+              <a:t>3h → 10분</a:t>
+            </a:r>
+            <a:endParaRPr lang="en-US" sz="1500" dirty="0"/>
+          </a:p>
+        </p:txBody>
+      </p:sp>
+      <p:sp>
+        <p:nvSpPr>
+          <p:cNvPr id="34" name="Text 32"/>
+          <p:cNvSpPr/>
+          <p:nvPr/>
+        </p:nvSpPr>
+        <p:spPr>
+          <a:xfrm>
+            <a:off x="2496312" y="5321808"/>
+            <a:ext cx="1572768" cy="219456"/>
+          </a:xfrm>
+          <a:prstGeom prst="rect">
+            <a:avLst/>
+          </a:prstGeom>
+          <a:noFill/>
+          <a:ln/>
+        </p:spPr>
+        <p:txBody>
+          <a:bodyPr wrap="square" lIns="0" tIns="0" rIns="0" bIns="0" rtlCol="0" anchor="ctr"/>
+          <a:lstStyle/>
+          <a:p>
+            <a:pPr indent="0" marL="0">
+              <a:buNone/>
+            </a:pPr>
+            <a:r>
               <a:rPr lang="en-US" sz="950" dirty="0">
                 <a:solidFill>
                   <a:srgbClr val="B3A9A5"/>
@@ -5475,7 +6407,7 @@
                 <a:ea typeface="맑은 고딕" pitchFamily="34" charset="-122"/>
                 <a:cs typeface="맑은 고딕" pitchFamily="34" charset="-120"/>
               </a:rPr>
-              <a:t>항목</a:t>
+              <a:t>예) 오류 건수</a:t>
             </a:r>
             <a:endParaRPr lang="en-US" sz="950" dirty="0"/>
           </a:p>
@@ -5483,14 +6415,14 @@
       </p:sp>
       <p:sp>
         <p:nvSpPr>
-          <p:cNvPr id="30" name="Text 28"/>
-          <p:cNvSpPr/>
-          <p:nvPr/>
-        </p:nvSpPr>
-        <p:spPr>
-          <a:xfrm>
-            <a:off x="822960" y="6035040"/>
-            <a:ext cx="1463040" cy="384048"/>
+          <p:cNvPr id="35" name="Text 33"/>
+          <p:cNvSpPr/>
+          <p:nvPr/>
+        </p:nvSpPr>
+        <p:spPr>
+          <a:xfrm>
+            <a:off x="2496312" y="5541264"/>
+            <a:ext cx="1572768" cy="329184"/>
           </a:xfrm>
           <a:prstGeom prst="rect">
             <a:avLst/>
@@ -5506,7 +6438,7 @@
               <a:buNone/>
             </a:pPr>
             <a:r>
-              <a:rPr lang="en-US" sz="2000" b="1" dirty="0">
+              <a:rPr lang="en-US" sz="1500" b="1" dirty="0">
                 <a:solidFill>
                   <a:srgbClr val="1F1A18"/>
                 </a:solidFill>
@@ -5514,22 +6446,22 @@
                 <a:ea typeface="맑은 고딕" pitchFamily="34" charset="-122"/>
                 <a:cs typeface="맑은 고딕" pitchFamily="34" charset="-120"/>
               </a:rPr>
-              <a:t>00</a:t>
-            </a:r>
-            <a:endParaRPr lang="en-US" sz="2000" dirty="0"/>
-          </a:p>
-        </p:txBody>
-      </p:sp>
-      <p:sp>
-        <p:nvSpPr>
-          <p:cNvPr id="31" name="Text 29"/>
-          <p:cNvSpPr/>
-          <p:nvPr/>
-        </p:nvSpPr>
-        <p:spPr>
-          <a:xfrm>
-            <a:off x="2450592" y="5833872"/>
-            <a:ext cx="1463040" cy="201168"/>
+              <a:t>월 5건 → 0</a:t>
+            </a:r>
+            <a:endParaRPr lang="en-US" sz="1500" dirty="0"/>
+          </a:p>
+        </p:txBody>
+      </p:sp>
+      <p:sp>
+        <p:nvSpPr>
+          <p:cNvPr id="36" name="Text 34"/>
+          <p:cNvSpPr/>
+          <p:nvPr/>
+        </p:nvSpPr>
+        <p:spPr>
+          <a:xfrm>
+            <a:off x="4169664" y="5321808"/>
+            <a:ext cx="1572768" cy="219456"/>
           </a:xfrm>
           <a:prstGeom prst="rect">
             <a:avLst/>
@@ -5553,7 +6485,7 @@
                 <a:ea typeface="맑은 고딕" pitchFamily="34" charset="-122"/>
                 <a:cs typeface="맑은 고딕" pitchFamily="34" charset="-120"/>
               </a:rPr>
-              <a:t>항목</a:t>
+              <a:t>예) 적용 설비</a:t>
             </a:r>
             <a:endParaRPr lang="en-US" sz="950" dirty="0"/>
           </a:p>
@@ -5561,14 +6493,14 @@
       </p:sp>
       <p:sp>
         <p:nvSpPr>
-          <p:cNvPr id="32" name="Text 30"/>
-          <p:cNvSpPr/>
-          <p:nvPr/>
-        </p:nvSpPr>
-        <p:spPr>
-          <a:xfrm>
-            <a:off x="2450592" y="6035040"/>
-            <a:ext cx="1463040" cy="384048"/>
+          <p:cNvPr id="37" name="Text 35"/>
+          <p:cNvSpPr/>
+          <p:nvPr/>
+        </p:nvSpPr>
+        <p:spPr>
+          <a:xfrm>
+            <a:off x="4169664" y="5541264"/>
+            <a:ext cx="1572768" cy="329184"/>
           </a:xfrm>
           <a:prstGeom prst="rect">
             <a:avLst/>
@@ -5584,7 +6516,7 @@
               <a:buNone/>
             </a:pPr>
             <a:r>
-              <a:rPr lang="en-US" sz="2000" b="1" dirty="0">
+              <a:rPr lang="en-US" sz="1500" b="1" dirty="0">
                 <a:solidFill>
                   <a:srgbClr val="1F1A18"/>
                 </a:solidFill>
@@ -5592,22 +6524,22 @@
                 <a:ea typeface="맑은 고딕" pitchFamily="34" charset="-122"/>
                 <a:cs typeface="맑은 고딕" pitchFamily="34" charset="-120"/>
               </a:rPr>
-              <a:t>00</a:t>
-            </a:r>
-            <a:endParaRPr lang="en-US" sz="2000" dirty="0"/>
-          </a:p>
-        </p:txBody>
-      </p:sp>
-      <p:sp>
-        <p:nvSpPr>
-          <p:cNvPr id="33" name="Text 31"/>
-          <p:cNvSpPr/>
-          <p:nvPr/>
-        </p:nvSpPr>
-        <p:spPr>
-          <a:xfrm>
-            <a:off x="4078224" y="5833872"/>
-            <a:ext cx="1463040" cy="201168"/>
+              <a:t>3 호기</a:t>
+            </a:r>
+            <a:endParaRPr lang="en-US" sz="1500" dirty="0"/>
+          </a:p>
+        </p:txBody>
+      </p:sp>
+      <p:sp>
+        <p:nvSpPr>
+          <p:cNvPr id="38" name="Text 36"/>
+          <p:cNvSpPr/>
+          <p:nvPr/>
+        </p:nvSpPr>
+        <p:spPr>
+          <a:xfrm>
+            <a:off x="822960" y="5989320"/>
+            <a:ext cx="4800600" cy="512064"/>
           </a:xfrm>
           <a:prstGeom prst="rect">
             <a:avLst/>
@@ -5620,18 +6552,21 @@
           <a:lstStyle/>
           <a:p>
             <a:pPr indent="0" marL="0">
+              <a:lnSpc>
+                <a:spcPts val="1300"/>
+              </a:lnSpc>
               <a:buNone/>
             </a:pPr>
             <a:r>
               <a:rPr lang="en-US" sz="950" dirty="0">
                 <a:solidFill>
-                  <a:srgbClr val="B3A9A5"/>
-                </a:solidFill>
-                <a:latin typeface="맑은 고딕" pitchFamily="34" charset="0"/>
-                <a:ea typeface="맑은 고딕" pitchFamily="34" charset="-122"/>
-                <a:cs typeface="맑은 고딕" pitchFamily="34" charset="-120"/>
-              </a:rPr>
-              <a:t>항목</a:t>
+                  <a:srgbClr val="9A908C"/>
+                </a:solidFill>
+                <a:latin typeface="맑은 고딕" pitchFamily="34" charset="0"/>
+                <a:ea typeface="맑은 고딕" pitchFamily="34" charset="-122"/>
+                <a:cs typeface="맑은 고딕" pitchFamily="34" charset="-120"/>
+              </a:rPr>
+              <a:t>※ 정량 수치가 없으면 정성 효과로 대체 — 예) 수작업 제거, 이력 관리 체계화, 판단 근거 확보</a:t>
             </a:r>
             <a:endParaRPr lang="en-US" sz="950" dirty="0"/>
           </a:p>
@@ -5639,52 +6574,13 @@
       </p:sp>
       <p:sp>
         <p:nvSpPr>
-          <p:cNvPr id="34" name="Text 32"/>
-          <p:cNvSpPr/>
-          <p:nvPr/>
-        </p:nvSpPr>
-        <p:spPr>
-          <a:xfrm>
-            <a:off x="4078224" y="6035040"/>
-            <a:ext cx="1463040" cy="384048"/>
-          </a:xfrm>
-          <a:prstGeom prst="rect">
-            <a:avLst/>
-          </a:prstGeom>
-          <a:noFill/>
-          <a:ln/>
-        </p:spPr>
-        <p:txBody>
-          <a:bodyPr wrap="square" lIns="0" tIns="0" rIns="0" bIns="0" rtlCol="0" anchor="ctr"/>
-          <a:lstStyle/>
-          <a:p>
-            <a:pPr indent="0" marL="0">
-              <a:buNone/>
-            </a:pPr>
-            <a:r>
-              <a:rPr lang="en-US" sz="2000" b="1" dirty="0">
-                <a:solidFill>
-                  <a:srgbClr val="1F1A18"/>
-                </a:solidFill>
-                <a:latin typeface="맑은 고딕" pitchFamily="34" charset="0"/>
-                <a:ea typeface="맑은 고딕" pitchFamily="34" charset="-122"/>
-                <a:cs typeface="맑은 고딕" pitchFamily="34" charset="-120"/>
-              </a:rPr>
-              <a:t>00</a:t>
-            </a:r>
-            <a:endParaRPr lang="en-US" sz="2000" dirty="0"/>
-          </a:p>
-        </p:txBody>
-      </p:sp>
-      <p:sp>
-        <p:nvSpPr>
-          <p:cNvPr id="35" name="Shape 33"/>
-          <p:cNvSpPr/>
-          <p:nvPr/>
-        </p:nvSpPr>
-        <p:spPr>
-          <a:xfrm>
-            <a:off x="6291072" y="1161288"/>
+          <p:cNvPr id="39" name="Shape 37"/>
+          <p:cNvSpPr/>
+          <p:nvPr/>
+        </p:nvSpPr>
+        <p:spPr>
+          <a:xfrm>
+            <a:off x="6291072" y="1124712"/>
             <a:ext cx="237744" cy="237744"/>
           </a:xfrm>
           <a:prstGeom prst="ellipse">
@@ -5698,14 +6594,14 @@
       </p:sp>
       <p:sp>
         <p:nvSpPr>
-          <p:cNvPr id="36" name="Text 34"/>
-          <p:cNvSpPr/>
-          <p:nvPr/>
-        </p:nvSpPr>
-        <p:spPr>
-          <a:xfrm>
-            <a:off x="6656832" y="1115568"/>
-            <a:ext cx="4023360" cy="329184"/>
+          <p:cNvPr id="40" name="Text 38"/>
+          <p:cNvSpPr/>
+          <p:nvPr/>
+        </p:nvSpPr>
+        <p:spPr>
+          <a:xfrm>
+            <a:off x="6656832" y="1078992"/>
+            <a:ext cx="2377440" cy="310896"/>
           </a:xfrm>
           <a:prstGeom prst="rect">
             <a:avLst/>
@@ -5737,18 +6633,57 @@
       </p:sp>
       <p:sp>
         <p:nvSpPr>
-          <p:cNvPr id="37" name="Shape 35"/>
-          <p:cNvSpPr/>
-          <p:nvPr/>
-        </p:nvSpPr>
-        <p:spPr>
-          <a:xfrm>
-            <a:off x="6291072" y="1536192"/>
-            <a:ext cx="5394960" cy="2121408"/>
+          <p:cNvPr id="41" name="Text 39"/>
+          <p:cNvSpPr/>
+          <p:nvPr/>
+        </p:nvSpPr>
+        <p:spPr>
+          <a:xfrm>
+            <a:off x="9079992" y="1078992"/>
+            <a:ext cx="2606040" cy="310896"/>
+          </a:xfrm>
+          <a:prstGeom prst="rect">
+            <a:avLst/>
+          </a:prstGeom>
+          <a:noFill/>
+          <a:ln/>
+        </p:spPr>
+        <p:txBody>
+          <a:bodyPr wrap="square" lIns="0" tIns="0" rIns="0" bIns="0" rtlCol="0" anchor="ctr"/>
+          <a:lstStyle/>
+          <a:p>
+            <a:pPr algn="r" indent="0" marL="0">
+              <a:buNone/>
+            </a:pPr>
+            <a:r>
+              <a:rPr lang="en-US" sz="950" dirty="0">
+                <a:solidFill>
+                  <a:srgbClr val="B3A9A5"/>
+                </a:solidFill>
+                <a:latin typeface="맑은 고딕" pitchFamily="34" charset="0"/>
+                <a:ea typeface="맑은 고딕" pitchFamily="34" charset="-122"/>
+                <a:cs typeface="맑은 고딕" pitchFamily="34" charset="-120"/>
+              </a:rPr>
+              <a:t>정사각형 영역</a:t>
+            </a:r>
+            <a:endParaRPr lang="en-US" sz="950" dirty="0"/>
+          </a:p>
+        </p:txBody>
+      </p:sp>
+      <p:sp>
+        <p:nvSpPr>
+          <p:cNvPr id="42" name="Shape 40"/>
+          <p:cNvSpPr/>
+          <p:nvPr/>
+        </p:nvSpPr>
+        <p:spPr>
+          <a:xfrm>
+            <a:off x="6291072" y="1463040"/>
+            <a:ext cx="2633472" cy="2889504"/>
           </a:xfrm>
           <a:prstGeom prst="roundRect">
             <a:avLst>
-              <a:gd name="adj" fmla="val 2586"/>
+              <a:gd name="adj" fmla="val 2083"/>
             </a:avLst>
           </a:prstGeom>
           <a:solidFill>
@@ -5771,18 +6706,18 @@
       </p:sp>
       <p:sp>
         <p:nvSpPr>
-          <p:cNvPr id="38" name="Shape 36"/>
-          <p:cNvSpPr/>
-          <p:nvPr/>
-        </p:nvSpPr>
-        <p:spPr>
-          <a:xfrm>
-            <a:off x="6519672" y="1691640"/>
-            <a:ext cx="4937760" cy="1572768"/>
+          <p:cNvPr id="43" name="Shape 41"/>
+          <p:cNvSpPr/>
+          <p:nvPr/>
+        </p:nvSpPr>
+        <p:spPr>
+          <a:xfrm>
+            <a:off x="6446520" y="1618488"/>
+            <a:ext cx="2322576" cy="2322576"/>
           </a:xfrm>
           <a:prstGeom prst="roundRect">
             <a:avLst>
-              <a:gd name="adj" fmla="val 2326"/>
+              <a:gd name="adj" fmla="val 1575"/>
             </a:avLst>
           </a:prstGeom>
           <a:solidFill>
@@ -5798,14 +6733,14 @@
       </p:sp>
       <p:sp>
         <p:nvSpPr>
-          <p:cNvPr id="39" name="Text 37"/>
-          <p:cNvSpPr/>
-          <p:nvPr/>
-        </p:nvSpPr>
-        <p:spPr>
-          <a:xfrm>
-            <a:off x="6519672" y="1691640"/>
-            <a:ext cx="4937760" cy="1572768"/>
+          <p:cNvPr id="44" name="Text 42"/>
+          <p:cNvSpPr/>
+          <p:nvPr/>
+        </p:nvSpPr>
+        <p:spPr>
+          <a:xfrm>
+            <a:off x="6446520" y="1618488"/>
+            <a:ext cx="2322576" cy="2322576"/>
           </a:xfrm>
           <a:prstGeom prst="rect">
             <a:avLst/>
@@ -5818,10 +6753,13 @@
           <a:lstStyle/>
           <a:p>
             <a:pPr algn="ctr" indent="0" marL="0">
-              <a:buNone/>
-            </a:pPr>
-            <a:r>
-              <a:rPr lang="en-US" sz="1200" dirty="0">
+              <a:lnSpc>
+                <a:spcPts val="1600"/>
+              </a:lnSpc>
+              <a:buNone/>
+            </a:pPr>
+            <a:r>
+              <a:rPr lang="en-US" sz="1100" dirty="0">
                 <a:solidFill>
                   <a:srgbClr val="B3A9A5"/>
                 </a:solidFill>
@@ -5829,38 +6767,19 @@
                 <a:ea typeface="맑은 고딕" pitchFamily="34" charset="-122"/>
                 <a:cs typeface="맑은 고딕" pitchFamily="34" charset="-120"/>
               </a:rPr>
-              <a:t>이곳에 사진 또는 화면 캡처를 넣으세요</a:t>
-            </a:r>
-            <a:endParaRPr lang="en-US" sz="1200" dirty="0"/>
-          </a:p>
-        </p:txBody>
-      </p:sp>
-      <p:sp>
-        <p:nvSpPr>
-          <p:cNvPr id="40" name="Text 38"/>
-          <p:cNvSpPr/>
-          <p:nvPr/>
-        </p:nvSpPr>
-        <p:spPr>
-          <a:xfrm>
-            <a:off x="6519672" y="3319272"/>
-            <a:ext cx="4937760" cy="237744"/>
-          </a:xfrm>
-          <a:prstGeom prst="rect">
-            <a:avLst/>
-          </a:prstGeom>
-          <a:noFill/>
-          <a:ln/>
-        </p:spPr>
-        <p:txBody>
-          <a:bodyPr wrap="square" lIns="0" tIns="0" rIns="0" bIns="0" rtlCol="0" anchor="ctr"/>
-          <a:lstStyle/>
+              <a:t>사진 / 화면</a:t>
+            </a:r>
+            <a:endParaRPr lang="en-US" sz="1100" dirty="0"/>
+          </a:p>
           <a:p>
             <a:pPr algn="ctr" indent="0" marL="0">
-              <a:buNone/>
-            </a:pPr>
-            <a:r>
-              <a:rPr lang="en-US" sz="1050" dirty="0">
+              <a:lnSpc>
+                <a:spcPts val="1600"/>
+              </a:lnSpc>
+              <a:buNone/>
+            </a:pPr>
+            <a:r>
+              <a:rPr lang="en-US" sz="1100" dirty="0">
                 <a:solidFill>
                   <a:srgbClr val="B3A9A5"/>
                 </a:solidFill>
@@ -5868,26 +6787,65 @@
                 <a:ea typeface="맑은 고딕" pitchFamily="34" charset="-122"/>
                 <a:cs typeface="맑은 고딕" pitchFamily="34" charset="-120"/>
               </a:rPr>
-              <a:t>캡션 — 무엇을 보여주는 화면인지 한 줄</a:t>
-            </a:r>
-            <a:endParaRPr lang="en-US" sz="1050" dirty="0"/>
-          </a:p>
-        </p:txBody>
-      </p:sp>
-      <p:sp>
-        <p:nvSpPr>
-          <p:cNvPr id="41" name="Shape 39"/>
-          <p:cNvSpPr/>
-          <p:nvPr/>
-        </p:nvSpPr>
-        <p:spPr>
-          <a:xfrm>
-            <a:off x="6291072" y="3794760"/>
-            <a:ext cx="5394960" cy="2121408"/>
+              <a:t>(정사각형)</a:t>
+            </a:r>
+            <a:endParaRPr lang="en-US" sz="1100" dirty="0"/>
+          </a:p>
+        </p:txBody>
+      </p:sp>
+      <p:sp>
+        <p:nvSpPr>
+          <p:cNvPr id="45" name="Text 43"/>
+          <p:cNvSpPr/>
+          <p:nvPr/>
+        </p:nvSpPr>
+        <p:spPr>
+          <a:xfrm>
+            <a:off x="6400800" y="4005072"/>
+            <a:ext cx="2414016" cy="274320"/>
+          </a:xfrm>
+          <a:prstGeom prst="rect">
+            <a:avLst/>
+          </a:prstGeom>
+          <a:noFill/>
+          <a:ln/>
+        </p:spPr>
+        <p:txBody>
+          <a:bodyPr wrap="square" lIns="0" tIns="0" rIns="0" bIns="0" rtlCol="0" anchor="ctr"/>
+          <a:lstStyle/>
+          <a:p>
+            <a:pPr algn="ctr" indent="0" marL="0">
+              <a:buNone/>
+            </a:pPr>
+            <a:r>
+              <a:rPr lang="en-US" sz="950" dirty="0">
+                <a:solidFill>
+                  <a:srgbClr val="B3A9A5"/>
+                </a:solidFill>
+                <a:latin typeface="맑은 고딕" pitchFamily="34" charset="0"/>
+                <a:ea typeface="맑은 고딕" pitchFamily="34" charset="-122"/>
+                <a:cs typeface="맑은 고딕" pitchFamily="34" charset="-120"/>
+              </a:rPr>
+              <a:t>캡션 — 무엇을 보여주는지 한 줄</a:t>
+            </a:r>
+            <a:endParaRPr lang="en-US" sz="950" dirty="0"/>
+          </a:p>
+        </p:txBody>
+      </p:sp>
+      <p:sp>
+        <p:nvSpPr>
+          <p:cNvPr id="46" name="Shape 44"/>
+          <p:cNvSpPr/>
+          <p:nvPr/>
+        </p:nvSpPr>
+        <p:spPr>
+          <a:xfrm>
+            <a:off x="9052560" y="1463040"/>
+            <a:ext cx="2633472" cy="2889504"/>
           </a:xfrm>
           <a:prstGeom prst="roundRect">
             <a:avLst>
-              <a:gd name="adj" fmla="val 2586"/>
+              <a:gd name="adj" fmla="val 2083"/>
             </a:avLst>
           </a:prstGeom>
           <a:solidFill>
@@ -5910,18 +6868,18 @@
       </p:sp>
       <p:sp>
         <p:nvSpPr>
-          <p:cNvPr id="42" name="Shape 40"/>
-          <p:cNvSpPr/>
-          <p:nvPr/>
-        </p:nvSpPr>
-        <p:spPr>
-          <a:xfrm>
-            <a:off x="6519672" y="3950208"/>
-            <a:ext cx="4937760" cy="1572768"/>
+          <p:cNvPr id="47" name="Shape 45"/>
+          <p:cNvSpPr/>
+          <p:nvPr/>
+        </p:nvSpPr>
+        <p:spPr>
+          <a:xfrm>
+            <a:off x="9208008" y="1618488"/>
+            <a:ext cx="2322576" cy="2322576"/>
           </a:xfrm>
           <a:prstGeom prst="roundRect">
             <a:avLst>
-              <a:gd name="adj" fmla="val 2326"/>
+              <a:gd name="adj" fmla="val 1575"/>
             </a:avLst>
           </a:prstGeom>
           <a:solidFill>
@@ -5937,14 +6895,14 @@
       </p:sp>
       <p:sp>
         <p:nvSpPr>
-          <p:cNvPr id="43" name="Text 41"/>
-          <p:cNvSpPr/>
-          <p:nvPr/>
-        </p:nvSpPr>
-        <p:spPr>
-          <a:xfrm>
-            <a:off x="6519672" y="3950208"/>
-            <a:ext cx="4937760" cy="1572768"/>
+          <p:cNvPr id="48" name="Text 46"/>
+          <p:cNvSpPr/>
+          <p:nvPr/>
+        </p:nvSpPr>
+        <p:spPr>
+          <a:xfrm>
+            <a:off x="9208008" y="1618488"/>
+            <a:ext cx="2322576" cy="2322576"/>
           </a:xfrm>
           <a:prstGeom prst="rect">
             <a:avLst/>
@@ -5957,10 +6915,13 @@
           <a:lstStyle/>
           <a:p>
             <a:pPr algn="ctr" indent="0" marL="0">
-              <a:buNone/>
-            </a:pPr>
-            <a:r>
-              <a:rPr lang="en-US" sz="1200" dirty="0">
+              <a:lnSpc>
+                <a:spcPts val="1600"/>
+              </a:lnSpc>
+              <a:buNone/>
+            </a:pPr>
+            <a:r>
+              <a:rPr lang="en-US" sz="1100" dirty="0">
                 <a:solidFill>
                   <a:srgbClr val="B3A9A5"/>
                 </a:solidFill>
@@ -5968,38 +6929,19 @@
                 <a:ea typeface="맑은 고딕" pitchFamily="34" charset="-122"/>
                 <a:cs typeface="맑은 고딕" pitchFamily="34" charset="-120"/>
               </a:rPr>
-              <a:t>이곳에 사진 또는 화면 캡처를 넣으세요</a:t>
-            </a:r>
-            <a:endParaRPr lang="en-US" sz="1200" dirty="0"/>
-          </a:p>
-        </p:txBody>
-      </p:sp>
-      <p:sp>
-        <p:nvSpPr>
-          <p:cNvPr id="44" name="Text 42"/>
-          <p:cNvSpPr/>
-          <p:nvPr/>
-        </p:nvSpPr>
-        <p:spPr>
-          <a:xfrm>
-            <a:off x="6519672" y="5577840"/>
-            <a:ext cx="4937760" cy="237744"/>
-          </a:xfrm>
-          <a:prstGeom prst="rect">
-            <a:avLst/>
-          </a:prstGeom>
-          <a:noFill/>
-          <a:ln/>
-        </p:spPr>
-        <p:txBody>
-          <a:bodyPr wrap="square" lIns="0" tIns="0" rIns="0" bIns="0" rtlCol="0" anchor="ctr"/>
-          <a:lstStyle/>
+              <a:t>사진 / 화면</a:t>
+            </a:r>
+            <a:endParaRPr lang="en-US" sz="1100" dirty="0"/>
+          </a:p>
           <a:p>
             <a:pPr algn="ctr" indent="0" marL="0">
-              <a:buNone/>
-            </a:pPr>
-            <a:r>
-              <a:rPr lang="en-US" sz="1050" dirty="0">
+              <a:lnSpc>
+                <a:spcPts val="1600"/>
+              </a:lnSpc>
+              <a:buNone/>
+            </a:pPr>
+            <a:r>
+              <a:rPr lang="en-US" sz="1100" dirty="0">
                 <a:solidFill>
                   <a:srgbClr val="B3A9A5"/>
                 </a:solidFill>
@@ -6007,30 +6949,167 @@
                 <a:ea typeface="맑은 고딕" pitchFamily="34" charset="-122"/>
                 <a:cs typeface="맑은 고딕" pitchFamily="34" charset="-120"/>
               </a:rPr>
-              <a:t>캡션 — 무엇을 보여주는 화면인지 한 줄</a:t>
-            </a:r>
-            <a:endParaRPr lang="en-US" sz="1050" dirty="0"/>
-          </a:p>
-        </p:txBody>
-      </p:sp>
-      <p:sp>
-        <p:nvSpPr>
-          <p:cNvPr id="45" name="Shape 43"/>
-          <p:cNvSpPr/>
-          <p:nvPr/>
-        </p:nvSpPr>
-        <p:spPr>
-          <a:xfrm>
-            <a:off x="6291072" y="6053328"/>
-            <a:ext cx="5394960" cy="566928"/>
+              <a:t>(정사각형)</a:t>
+            </a:r>
+            <a:endParaRPr lang="en-US" sz="1100" dirty="0"/>
+          </a:p>
+        </p:txBody>
+      </p:sp>
+      <p:sp>
+        <p:nvSpPr>
+          <p:cNvPr id="49" name="Text 47"/>
+          <p:cNvSpPr/>
+          <p:nvPr/>
+        </p:nvSpPr>
+        <p:spPr>
+          <a:xfrm>
+            <a:off x="9162288" y="4005072"/>
+            <a:ext cx="2414016" cy="274320"/>
+          </a:xfrm>
+          <a:prstGeom prst="rect">
+            <a:avLst/>
+          </a:prstGeom>
+          <a:noFill/>
+          <a:ln/>
+        </p:spPr>
+        <p:txBody>
+          <a:bodyPr wrap="square" lIns="0" tIns="0" rIns="0" bIns="0" rtlCol="0" anchor="ctr"/>
+          <a:lstStyle/>
+          <a:p>
+            <a:pPr algn="ctr" indent="0" marL="0">
+              <a:buNone/>
+            </a:pPr>
+            <a:r>
+              <a:rPr lang="en-US" sz="950" dirty="0">
+                <a:solidFill>
+                  <a:srgbClr val="B3A9A5"/>
+                </a:solidFill>
+                <a:latin typeface="맑은 고딕" pitchFamily="34" charset="0"/>
+                <a:ea typeface="맑은 고딕" pitchFamily="34" charset="-122"/>
+                <a:cs typeface="맑은 고딕" pitchFamily="34" charset="-120"/>
+              </a:rPr>
+              <a:t>캡션 — 무엇을 보여주는지 한 줄</a:t>
+            </a:r>
+            <a:endParaRPr lang="en-US" sz="950" dirty="0"/>
+          </a:p>
+        </p:txBody>
+      </p:sp>
+      <p:sp>
+        <p:nvSpPr>
+          <p:cNvPr id="50" name="Shape 48"/>
+          <p:cNvSpPr/>
+          <p:nvPr/>
+        </p:nvSpPr>
+        <p:spPr>
+          <a:xfrm>
+            <a:off x="6291072" y="4581144"/>
+            <a:ext cx="237744" cy="237744"/>
+          </a:xfrm>
+          <a:prstGeom prst="ellipse">
+            <a:avLst/>
+          </a:prstGeom>
+          <a:solidFill>
+            <a:srgbClr val="EA002C"/>
+          </a:solidFill>
+          <a:ln/>
+        </p:spPr>
+      </p:sp>
+      <p:sp>
+        <p:nvSpPr>
+          <p:cNvPr id="51" name="Text 49"/>
+          <p:cNvSpPr/>
+          <p:nvPr/>
+        </p:nvSpPr>
+        <p:spPr>
+          <a:xfrm>
+            <a:off x="6656832" y="4535424"/>
+            <a:ext cx="2377440" cy="310896"/>
+          </a:xfrm>
+          <a:prstGeom prst="rect">
+            <a:avLst/>
+          </a:prstGeom>
+          <a:noFill/>
+          <a:ln/>
+        </p:spPr>
+        <p:txBody>
+          <a:bodyPr wrap="square" lIns="0" tIns="0" rIns="0" bIns="0" rtlCol="0" anchor="ctr"/>
+          <a:lstStyle/>
+          <a:p>
+            <a:pPr indent="0" marL="0">
+              <a:buNone/>
+            </a:pPr>
+            <a:r>
+              <a:rPr lang="en-US" sz="1350" b="1" dirty="0">
+                <a:solidFill>
+                  <a:srgbClr val="1F1A18"/>
+                </a:solidFill>
+                <a:latin typeface="맑은 고딕" pitchFamily="34" charset="0"/>
+                <a:ea typeface="맑은 고딕" pitchFamily="34" charset="-122"/>
+                <a:cs typeface="맑은 고딕" pitchFamily="34" charset="-120"/>
+              </a:rPr>
+              <a:t>향후 계획</a:t>
+            </a:r>
+            <a:endParaRPr lang="en-US" sz="1350" dirty="0"/>
+          </a:p>
+        </p:txBody>
+      </p:sp>
+      <p:sp>
+        <p:nvSpPr>
+          <p:cNvPr id="52" name="Text 50"/>
+          <p:cNvSpPr/>
+          <p:nvPr/>
+        </p:nvSpPr>
+        <p:spPr>
+          <a:xfrm>
+            <a:off x="9079992" y="4535424"/>
+            <a:ext cx="2606040" cy="310896"/>
+          </a:xfrm>
+          <a:prstGeom prst="rect">
+            <a:avLst/>
+          </a:prstGeom>
+          <a:noFill/>
+          <a:ln/>
+        </p:spPr>
+        <p:txBody>
+          <a:bodyPr wrap="square" lIns="0" tIns="0" rIns="0" bIns="0" rtlCol="0" anchor="ctr"/>
+          <a:lstStyle/>
+          <a:p>
+            <a:pPr algn="r" indent="0" marL="0">
+              <a:buNone/>
+            </a:pPr>
+            <a:r>
+              <a:rPr lang="en-US" sz="950" dirty="0">
+                <a:solidFill>
+                  <a:srgbClr val="B3A9A5"/>
+                </a:solidFill>
+                <a:latin typeface="맑은 고딕" pitchFamily="34" charset="0"/>
+                <a:ea typeface="맑은 고딕" pitchFamily="34" charset="-122"/>
+                <a:cs typeface="맑은 고딕" pitchFamily="34" charset="-120"/>
+              </a:rPr>
+              <a:t>다음 단계 · 일정</a:t>
+            </a:r>
+            <a:endParaRPr lang="en-US" sz="950" dirty="0"/>
+          </a:p>
+        </p:txBody>
+      </p:sp>
+      <p:sp>
+        <p:nvSpPr>
+          <p:cNvPr id="53" name="Shape 51"/>
+          <p:cNvSpPr/>
+          <p:nvPr/>
+        </p:nvSpPr>
+        <p:spPr>
+          <a:xfrm>
+            <a:off x="6291072" y="4919472"/>
+            <a:ext cx="5394960" cy="1700784"/>
           </a:xfrm>
           <a:prstGeom prst="roundRect">
             <a:avLst>
-              <a:gd name="adj" fmla="val 9677"/>
+              <a:gd name="adj" fmla="val 3226"/>
             </a:avLst>
           </a:prstGeom>
           <a:solidFill>
-            <a:srgbClr val="1F1A18"/>
+            <a:srgbClr val="FFFFFF"/>
           </a:solidFill>
           <a:ln w="12700">
             <a:solidFill>
@@ -6049,40 +7128,95 @@
       </p:sp>
       <p:sp>
         <p:nvSpPr>
-          <p:cNvPr id="46" name="Text 44"/>
-          <p:cNvSpPr/>
-          <p:nvPr/>
-        </p:nvSpPr>
-        <p:spPr>
-          <a:xfrm>
-            <a:off x="6565392" y="6144768"/>
-            <a:ext cx="4846320" cy="384048"/>
-          </a:xfrm>
-          <a:prstGeom prst="rect">
-            <a:avLst/>
-          </a:prstGeom>
-          <a:noFill/>
-          <a:ln/>
-        </p:spPr>
-        <p:txBody>
-          <a:bodyPr wrap="square" lIns="0" tIns="0" rIns="0" bIns="0" rtlCol="0" anchor="ctr"/>
-          <a:lstStyle/>
-          <a:p>
-            <a:pPr indent="0" marL="0">
-              <a:buNone/>
-            </a:pPr>
-            <a:r>
-              <a:rPr lang="en-US" sz="1150" b="1" dirty="0">
-                <a:solidFill>
-                  <a:srgbClr val="E8DFDB"/>
-                </a:solidFill>
-                <a:latin typeface="맑은 고딕" pitchFamily="34" charset="0"/>
-                <a:ea typeface="맑은 고딕" pitchFamily="34" charset="-122"/>
-                <a:cs typeface="맑은 고딕" pitchFamily="34" charset="-120"/>
-              </a:rPr>
-              <a:t>향후 계획 :  다음 단계에서 할 일을 한 줄로</a:t>
-            </a:r>
-            <a:endParaRPr lang="en-US" sz="1150" dirty="0"/>
+          <p:cNvPr id="54" name="Text 52"/>
+          <p:cNvSpPr/>
+          <p:nvPr/>
+        </p:nvSpPr>
+        <p:spPr>
+          <a:xfrm>
+            <a:off x="6611112" y="5138928"/>
+            <a:ext cx="4800600" cy="1280160"/>
+          </a:xfrm>
+          <a:prstGeom prst="rect">
+            <a:avLst/>
+          </a:prstGeom>
+          <a:noFill/>
+          <a:ln/>
+        </p:spPr>
+        <p:txBody>
+          <a:bodyPr wrap="square" lIns="0" tIns="0" rIns="0" bIns="0" rtlCol="0" anchor="ctr"/>
+          <a:lstStyle/>
+          <a:p>
+            <a:pPr marL="342900" indent="-342900">
+              <a:lnSpc>
+                <a:spcPts val="1500"/>
+              </a:lnSpc>
+              <a:spcAft>
+                <a:spcPts val="700"/>
+              </a:spcAft>
+              <a:buSzPct val="100000"/>
+              <a:buChar char="•"/>
+            </a:pPr>
+            <a:r>
+              <a:rPr lang="en-US" sz="1200" dirty="0">
+                <a:solidFill>
+                  <a:srgbClr val="B3A9A5"/>
+                </a:solidFill>
+                <a:latin typeface="맑은 고딕" pitchFamily="34" charset="0"/>
+                <a:ea typeface="맑은 고딕" pitchFamily="34" charset="-122"/>
+                <a:cs typeface="맑은 고딕" pitchFamily="34" charset="-120"/>
+              </a:rPr>
+              <a:t>다음 단계에서 할 일</a:t>
+            </a:r>
+            <a:endParaRPr lang="en-US" sz="1200" dirty="0"/>
+          </a:p>
+          <a:p>
+            <a:pPr marL="342900" indent="-342900">
+              <a:lnSpc>
+                <a:spcPts val="1500"/>
+              </a:lnSpc>
+              <a:spcAft>
+                <a:spcPts val="700"/>
+              </a:spcAft>
+              <a:buSzPct val="100000"/>
+              <a:buChar char="•"/>
+            </a:pPr>
+            <a:r>
+              <a:rPr lang="en-US" sz="1200" dirty="0">
+                <a:solidFill>
+                  <a:srgbClr val="B3A9A5"/>
+                </a:solidFill>
+                <a:latin typeface="맑은 고딕" pitchFamily="34" charset="0"/>
+                <a:ea typeface="맑은 고딕" pitchFamily="34" charset="-122"/>
+                <a:cs typeface="맑은 고딕" pitchFamily="34" charset="-120"/>
+              </a:rPr>
+              <a:t>목표 시점 (예: 26년 4분기)</a:t>
+            </a:r>
+            <a:endParaRPr lang="en-US" sz="1200" dirty="0"/>
+          </a:p>
+          <a:p>
+            <a:pPr marL="342900" indent="-342900">
+              <a:lnSpc>
+                <a:spcPts val="1500"/>
+              </a:lnSpc>
+              <a:spcAft>
+                <a:spcPts val="700"/>
+              </a:spcAft>
+              <a:buSzPct val="100000"/>
+              <a:buChar char="•"/>
+            </a:pPr>
+            <a:r>
+              <a:rPr lang="en-US" sz="1200" dirty="0">
+                <a:solidFill>
+                  <a:srgbClr val="B3A9A5"/>
+                </a:solidFill>
+                <a:latin typeface="맑은 고딕" pitchFamily="34" charset="0"/>
+                <a:ea typeface="맑은 고딕" pitchFamily="34" charset="-122"/>
+                <a:cs typeface="맑은 고딕" pitchFamily="34" charset="-120"/>
+              </a:rPr>
+              <a:t>필요한 지원 · 협조 사항</a:t>
+            </a:r>
+            <a:endParaRPr lang="en-US" sz="1200" dirty="0"/>
           </a:p>
         </p:txBody>
       </p:sp>
@@ -6146,8 +7280,8 @@
         </p:nvSpPr>
         <p:spPr>
           <a:xfrm>
-            <a:off x="411480" y="164592"/>
-            <a:ext cx="640080" cy="566928"/>
+            <a:off x="411480" y="182880"/>
+            <a:ext cx="640080" cy="548640"/>
           </a:xfrm>
           <a:prstGeom prst="rect">
             <a:avLst/>
@@ -6185,8 +7319,8 @@
         </p:nvSpPr>
         <p:spPr>
           <a:xfrm>
-            <a:off x="1051560" y="164592"/>
-            <a:ext cx="5120640" cy="566928"/>
+            <a:off x="1051560" y="182880"/>
+            <a:ext cx="6766560" cy="548640"/>
           </a:xfrm>
           <a:prstGeom prst="rect">
             <a:avLst/>
@@ -6204,66 +7338,105 @@
             <a:r>
               <a:rPr lang="en-US" sz="2300" b="1" dirty="0">
                 <a:solidFill>
+                  <a:srgbClr val="8E8480"/>
+                </a:solidFill>
+                <a:latin typeface="맑은 고딕" pitchFamily="34" charset="0"/>
+                <a:ea typeface="맑은 고딕" pitchFamily="34" charset="-122"/>
+                <a:cs typeface="맑은 고딕" pitchFamily="34" charset="-120"/>
+              </a:rPr>
+              <a:t>프로젝트명을 입력하세요</a:t>
+            </a:r>
+            <a:endParaRPr lang="en-US" sz="2300" dirty="0"/>
+          </a:p>
+        </p:txBody>
+      </p:sp>
+      <p:sp>
+        <p:nvSpPr>
+          <p:cNvPr id="5" name="Text 3"/>
+          <p:cNvSpPr/>
+          <p:nvPr/>
+        </p:nvSpPr>
+        <p:spPr>
+          <a:xfrm>
+            <a:off x="7955280" y="155448"/>
+            <a:ext cx="3840480" cy="292608"/>
+          </a:xfrm>
+          <a:prstGeom prst="rect">
+            <a:avLst/>
+          </a:prstGeom>
+          <a:noFill/>
+          <a:ln/>
+        </p:spPr>
+        <p:txBody>
+          <a:bodyPr wrap="square" lIns="0" tIns="0" rIns="0" bIns="0" rtlCol="0" anchor="ctr"/>
+          <a:lstStyle/>
+          <a:p>
+            <a:pPr algn="r" indent="0" marL="0">
+              <a:buNone/>
+            </a:pPr>
+            <a:r>
+              <a:rPr lang="en-US" sz="1200" dirty="0">
+                <a:solidFill>
+                  <a:srgbClr val="C9BFBB"/>
+                </a:solidFill>
+                <a:latin typeface="맑은 고딕" pitchFamily="34" charset="0"/>
+                <a:ea typeface="맑은 고딕" pitchFamily="34" charset="-122"/>
+                <a:cs typeface="맑은 고딕" pitchFamily="34" charset="-120"/>
+              </a:rPr>
+              <a:t>소속 : ○○팀</a:t>
+            </a:r>
+            <a:endParaRPr lang="en-US" sz="1200" dirty="0"/>
+          </a:p>
+        </p:txBody>
+      </p:sp>
+      <p:sp>
+        <p:nvSpPr>
+          <p:cNvPr id="6" name="Text 4"/>
+          <p:cNvSpPr/>
+          <p:nvPr/>
+        </p:nvSpPr>
+        <p:spPr>
+          <a:xfrm>
+            <a:off x="7955280" y="457200"/>
+            <a:ext cx="3840480" cy="292608"/>
+          </a:xfrm>
+          <a:prstGeom prst="rect">
+            <a:avLst/>
+          </a:prstGeom>
+          <a:noFill/>
+          <a:ln/>
+        </p:spPr>
+        <p:txBody>
+          <a:bodyPr wrap="square" lIns="0" tIns="0" rIns="0" bIns="0" rtlCol="0" anchor="ctr"/>
+          <a:lstStyle/>
+          <a:p>
+            <a:pPr algn="r" indent="0" marL="0">
+              <a:buNone/>
+            </a:pPr>
+            <a:r>
+              <a:rPr lang="en-US" sz="1200" b="1" dirty="0">
+                <a:solidFill>
                   <a:srgbClr val="FFFFFF"/>
                 </a:solidFill>
                 <a:latin typeface="맑은 고딕" pitchFamily="34" charset="0"/>
                 <a:ea typeface="맑은 고딕" pitchFamily="34" charset="-122"/>
                 <a:cs typeface="맑은 고딕" pitchFamily="34" charset="-120"/>
               </a:rPr>
-              <a:t>프로젝트 ④</a:t>
-            </a:r>
-            <a:endParaRPr lang="en-US" sz="2300" dirty="0"/>
-          </a:p>
-        </p:txBody>
-      </p:sp>
-      <p:sp>
-        <p:nvSpPr>
-          <p:cNvPr id="5" name="Text 3"/>
-          <p:cNvSpPr/>
-          <p:nvPr/>
-        </p:nvSpPr>
-        <p:spPr>
-          <a:xfrm>
-            <a:off x="6263640" y="164592"/>
-            <a:ext cx="5532120" cy="566928"/>
-          </a:xfrm>
-          <a:prstGeom prst="rect">
-            <a:avLst/>
-          </a:prstGeom>
-          <a:noFill/>
-          <a:ln/>
-        </p:spPr>
-        <p:txBody>
-          <a:bodyPr wrap="square" lIns="0" tIns="0" rIns="0" bIns="0" rtlCol="0" anchor="ctr"/>
-          <a:lstStyle/>
-          <a:p>
-            <a:pPr algn="r" indent="0" marL="0">
-              <a:buNone/>
-            </a:pPr>
-            <a:r>
-              <a:rPr lang="en-US" sz="1250" dirty="0">
-                <a:solidFill>
-                  <a:srgbClr val="C9BFBB"/>
-                </a:solidFill>
-                <a:latin typeface="맑은 고딕" pitchFamily="34" charset="0"/>
-                <a:ea typeface="맑은 고딕" pitchFamily="34" charset="-122"/>
-                <a:cs typeface="맑은 고딕" pitchFamily="34" charset="-120"/>
-              </a:rPr>
-              <a:t>프로젝트명을 입력하세요</a:t>
-            </a:r>
-            <a:endParaRPr lang="en-US" sz="1250" dirty="0"/>
-          </a:p>
-        </p:txBody>
-      </p:sp>
-      <p:sp>
-        <p:nvSpPr>
-          <p:cNvPr id="6" name="Shape 4"/>
-          <p:cNvSpPr/>
-          <p:nvPr/>
-        </p:nvSpPr>
-        <p:spPr>
-          <a:xfrm>
-            <a:off x="502920" y="1161288"/>
+              <a:t>담당자 : 홍길동</a:t>
+            </a:r>
+            <a:endParaRPr lang="en-US" sz="1200" dirty="0"/>
+          </a:p>
+        </p:txBody>
+      </p:sp>
+      <p:sp>
+        <p:nvSpPr>
+          <p:cNvPr id="7" name="Shape 5"/>
+          <p:cNvSpPr/>
+          <p:nvPr/>
+        </p:nvSpPr>
+        <p:spPr>
+          <a:xfrm>
+            <a:off x="502920" y="1124712"/>
             <a:ext cx="237744" cy="237744"/>
           </a:xfrm>
           <a:prstGeom prst="ellipse">
@@ -6277,14 +7450,14 @@
       </p:sp>
       <p:sp>
         <p:nvSpPr>
-          <p:cNvPr id="7" name="Text 5"/>
-          <p:cNvSpPr/>
-          <p:nvPr/>
-        </p:nvSpPr>
-        <p:spPr>
-          <a:xfrm>
-            <a:off x="868680" y="1115568"/>
-            <a:ext cx="4023360" cy="329184"/>
+          <p:cNvPr id="8" name="Text 6"/>
+          <p:cNvSpPr/>
+          <p:nvPr/>
+        </p:nvSpPr>
+        <p:spPr>
+          <a:xfrm>
+            <a:off x="868680" y="1078992"/>
+            <a:ext cx="2377440" cy="310896"/>
           </a:xfrm>
           <a:prstGeom prst="rect">
             <a:avLst/>
@@ -6316,18 +7489,18 @@
       </p:sp>
       <p:sp>
         <p:nvSpPr>
-          <p:cNvPr id="8" name="Shape 6"/>
-          <p:cNvSpPr/>
-          <p:nvPr/>
-        </p:nvSpPr>
-        <p:spPr>
-          <a:xfrm>
-            <a:off x="502920" y="1536192"/>
-            <a:ext cx="5394960" cy="1783080"/>
+          <p:cNvPr id="9" name="Shape 7"/>
+          <p:cNvSpPr/>
+          <p:nvPr/>
+        </p:nvSpPr>
+        <p:spPr>
+          <a:xfrm>
+            <a:off x="502920" y="1463040"/>
+            <a:ext cx="5394960" cy="1481328"/>
           </a:xfrm>
           <a:prstGeom prst="roundRect">
             <a:avLst>
-              <a:gd name="adj" fmla="val 3077"/>
+              <a:gd name="adj" fmla="val 3704"/>
             </a:avLst>
           </a:prstGeom>
           <a:solidFill>
@@ -6350,14 +7523,14 @@
       </p:sp>
       <p:sp>
         <p:nvSpPr>
-          <p:cNvPr id="9" name="Text 7"/>
-          <p:cNvSpPr/>
-          <p:nvPr/>
-        </p:nvSpPr>
-        <p:spPr>
-          <a:xfrm>
-            <a:off x="822960" y="1783080"/>
-            <a:ext cx="4754880" cy="1325880"/>
+          <p:cNvPr id="10" name="Text 8"/>
+          <p:cNvSpPr/>
+          <p:nvPr/>
+        </p:nvSpPr>
+        <p:spPr>
+          <a:xfrm>
+            <a:off x="822960" y="1682496"/>
+            <a:ext cx="4800600" cy="1097280"/>
           </a:xfrm>
           <a:prstGeom prst="rect">
             <a:avLst/>
@@ -6371,16 +7544,16 @@
           <a:p>
             <a:pPr marL="342900" indent="-342900">
               <a:lnSpc>
-                <a:spcPts val="1600"/>
+                <a:spcPts val="1500"/>
               </a:lnSpc>
               <a:spcAft>
-                <a:spcPts val="800"/>
+                <a:spcPts val="700"/>
               </a:spcAft>
               <a:buSzPct val="100000"/>
               <a:buChar char="•"/>
             </a:pPr>
             <a:r>
-              <a:rPr lang="en-US" sz="1250" dirty="0">
+              <a:rPr lang="en-US" sz="1200" dirty="0">
                 <a:solidFill>
                   <a:srgbClr val="B3A9A5"/>
                 </a:solidFill>
@@ -6388,23 +7561,23 @@
                 <a:ea typeface="맑은 고딕" pitchFamily="34" charset="-122"/>
                 <a:cs typeface="맑은 고딕" pitchFamily="34" charset="-120"/>
               </a:rPr>
-              <a:t>해결하려는 문제를 한 줄로 적으세요</a:t>
-            </a:r>
-            <a:endParaRPr lang="en-US" sz="1250" dirty="0"/>
+              <a:t>해결하려는 문제를 한 줄로</a:t>
+            </a:r>
+            <a:endParaRPr lang="en-US" sz="1200" dirty="0"/>
           </a:p>
           <a:p>
             <a:pPr marL="342900" indent="-342900">
               <a:lnSpc>
-                <a:spcPts val="1600"/>
+                <a:spcPts val="1500"/>
               </a:lnSpc>
               <a:spcAft>
-                <a:spcPts val="800"/>
+                <a:spcPts val="700"/>
               </a:spcAft>
               <a:buSzPct val="100000"/>
               <a:buChar char="•"/>
             </a:pPr>
             <a:r>
-              <a:rPr lang="en-US" sz="1250" dirty="0">
+              <a:rPr lang="en-US" sz="1200" dirty="0">
                 <a:solidFill>
                   <a:srgbClr val="B3A9A5"/>
                 </a:solidFill>
@@ -6412,23 +7585,23 @@
                 <a:ea typeface="맑은 고딕" pitchFamily="34" charset="-122"/>
                 <a:cs typeface="맑은 고딕" pitchFamily="34" charset="-120"/>
               </a:rPr>
-              <a:t>기대 효과(시간 절감·정확도·비용 등)</a:t>
-            </a:r>
-            <a:endParaRPr lang="en-US" sz="1250" dirty="0"/>
+              <a:t>기대 효과 (시간 절감 · 정확도 · 비용 등)</a:t>
+            </a:r>
+            <a:endParaRPr lang="en-US" sz="1200" dirty="0"/>
           </a:p>
           <a:p>
             <a:pPr marL="342900" indent="-342900">
               <a:lnSpc>
-                <a:spcPts val="1600"/>
+                <a:spcPts val="1500"/>
               </a:lnSpc>
               <a:spcAft>
-                <a:spcPts val="800"/>
+                <a:spcPts val="700"/>
               </a:spcAft>
               <a:buSzPct val="100000"/>
               <a:buChar char="•"/>
             </a:pPr>
             <a:r>
-              <a:rPr lang="en-US" sz="1250" dirty="0">
+              <a:rPr lang="en-US" sz="1200" dirty="0">
                 <a:solidFill>
                   <a:srgbClr val="B3A9A5"/>
                 </a:solidFill>
@@ -6438,19 +7611,19 @@
               </a:rPr>
               <a:t>적용 대상 설비 또는 업무 범위</a:t>
             </a:r>
-            <a:endParaRPr lang="en-US" sz="1250" dirty="0"/>
-          </a:p>
-        </p:txBody>
-      </p:sp>
-      <p:sp>
-        <p:nvSpPr>
-          <p:cNvPr id="10" name="Shape 8"/>
-          <p:cNvSpPr/>
-          <p:nvPr/>
-        </p:nvSpPr>
-        <p:spPr>
-          <a:xfrm>
-            <a:off x="502920" y="3538728"/>
+            <a:endParaRPr lang="en-US" sz="1200" dirty="0"/>
+          </a:p>
+        </p:txBody>
+      </p:sp>
+      <p:sp>
+        <p:nvSpPr>
+          <p:cNvPr id="11" name="Shape 9"/>
+          <p:cNvSpPr/>
+          <p:nvPr/>
+        </p:nvSpPr>
+        <p:spPr>
+          <a:xfrm>
+            <a:off x="502920" y="3154680"/>
             <a:ext cx="237744" cy="237744"/>
           </a:xfrm>
           <a:prstGeom prst="ellipse">
@@ -6464,14 +7637,14 @@
       </p:sp>
       <p:sp>
         <p:nvSpPr>
-          <p:cNvPr id="11" name="Text 9"/>
-          <p:cNvSpPr/>
-          <p:nvPr/>
-        </p:nvSpPr>
-        <p:spPr>
-          <a:xfrm>
-            <a:off x="868680" y="3493008"/>
-            <a:ext cx="4023360" cy="329184"/>
+          <p:cNvPr id="12" name="Text 10"/>
+          <p:cNvSpPr/>
+          <p:nvPr/>
+        </p:nvSpPr>
+        <p:spPr>
+          <a:xfrm>
+            <a:off x="868680" y="3108960"/>
+            <a:ext cx="2377440" cy="310896"/>
           </a:xfrm>
           <a:prstGeom prst="rect">
             <a:avLst/>
@@ -6503,13 +7676,52 @@
       </p:sp>
       <p:sp>
         <p:nvSpPr>
-          <p:cNvPr id="12" name="Shape 10"/>
-          <p:cNvSpPr/>
-          <p:nvPr/>
-        </p:nvSpPr>
-        <p:spPr>
-          <a:xfrm>
-            <a:off x="960120" y="4572000"/>
+          <p:cNvPr id="13" name="Text 11"/>
+          <p:cNvSpPr/>
+          <p:nvPr/>
+        </p:nvSpPr>
+        <p:spPr>
+          <a:xfrm>
+            <a:off x="3291840" y="3108960"/>
+            <a:ext cx="2606040" cy="310896"/>
+          </a:xfrm>
+          <a:prstGeom prst="rect">
+            <a:avLst/>
+          </a:prstGeom>
+          <a:noFill/>
+          <a:ln/>
+        </p:spPr>
+        <p:txBody>
+          <a:bodyPr wrap="square" lIns="0" tIns="0" rIns="0" bIns="0" rtlCol="0" anchor="ctr"/>
+          <a:lstStyle/>
+          <a:p>
+            <a:pPr algn="r" indent="0" marL="0">
+              <a:buNone/>
+            </a:pPr>
+            <a:r>
+              <a:rPr lang="en-US" sz="950" dirty="0">
+                <a:solidFill>
+                  <a:srgbClr val="B3A9A5"/>
+                </a:solidFill>
+                <a:latin typeface="맑은 고딕" pitchFamily="34" charset="0"/>
+                <a:ea typeface="맑은 고딕" pitchFamily="34" charset="-122"/>
+                <a:cs typeface="맑은 고딕" pitchFamily="34" charset="-120"/>
+              </a:rPr>
+              <a:t>단계명·색은 수정 가능</a:t>
+            </a:r>
+            <a:endParaRPr lang="en-US" sz="950" dirty="0"/>
+          </a:p>
+        </p:txBody>
+      </p:sp>
+      <p:sp>
+        <p:nvSpPr>
+          <p:cNvPr id="14" name="Shape 12"/>
+          <p:cNvSpPr/>
+          <p:nvPr/>
+        </p:nvSpPr>
+        <p:spPr>
+          <a:xfrm>
+            <a:off x="960120" y="3950208"/>
             <a:ext cx="4443984" cy="0"/>
           </a:xfrm>
           <a:prstGeom prst="line">
@@ -6526,13 +7738,13 @@
       </p:sp>
       <p:sp>
         <p:nvSpPr>
-          <p:cNvPr id="13" name="Shape 11"/>
-          <p:cNvSpPr/>
-          <p:nvPr/>
-        </p:nvSpPr>
-        <p:spPr>
-          <a:xfrm>
-            <a:off x="960120" y="4572000"/>
+          <p:cNvPr id="15" name="Shape 13"/>
+          <p:cNvSpPr/>
+          <p:nvPr/>
+        </p:nvSpPr>
+        <p:spPr>
+          <a:xfrm>
+            <a:off x="960120" y="3950208"/>
             <a:ext cx="1481328" cy="0"/>
           </a:xfrm>
           <a:prstGeom prst="line">
@@ -6549,13 +7761,13 @@
       </p:sp>
       <p:sp>
         <p:nvSpPr>
-          <p:cNvPr id="14" name="Shape 12"/>
-          <p:cNvSpPr/>
-          <p:nvPr/>
-        </p:nvSpPr>
-        <p:spPr>
-          <a:xfrm>
-            <a:off x="822960" y="4434840"/>
+          <p:cNvPr id="16" name="Shape 14"/>
+          <p:cNvSpPr/>
+          <p:nvPr/>
+        </p:nvSpPr>
+        <p:spPr>
+          <a:xfrm>
+            <a:off x="822960" y="3813048"/>
             <a:ext cx="274320" cy="274320"/>
           </a:xfrm>
           <a:prstGeom prst="ellipse">
@@ -6574,13 +7786,13 @@
       </p:sp>
       <p:sp>
         <p:nvSpPr>
-          <p:cNvPr id="15" name="Text 13"/>
-          <p:cNvSpPr/>
-          <p:nvPr/>
-        </p:nvSpPr>
-        <p:spPr>
-          <a:xfrm>
-            <a:off x="411480" y="4041648"/>
+          <p:cNvPr id="17" name="Text 15"/>
+          <p:cNvSpPr/>
+          <p:nvPr/>
+        </p:nvSpPr>
+        <p:spPr>
+          <a:xfrm>
+            <a:off x="411480" y="3438144"/>
             <a:ext cx="1097280" cy="219456"/>
           </a:xfrm>
           <a:prstGeom prst="rect">
@@ -6613,13 +7825,13 @@
       </p:sp>
       <p:sp>
         <p:nvSpPr>
-          <p:cNvPr id="16" name="Text 14"/>
-          <p:cNvSpPr/>
-          <p:nvPr/>
-        </p:nvSpPr>
-        <p:spPr>
-          <a:xfrm>
-            <a:off x="320040" y="4773168"/>
+          <p:cNvPr id="18" name="Text 16"/>
+          <p:cNvSpPr/>
+          <p:nvPr/>
+        </p:nvSpPr>
+        <p:spPr>
+          <a:xfrm>
+            <a:off x="320040" y="4151376"/>
             <a:ext cx="1280160" cy="256032"/>
           </a:xfrm>
           <a:prstGeom prst="rect">
@@ -6652,13 +7864,13 @@
       </p:sp>
       <p:sp>
         <p:nvSpPr>
-          <p:cNvPr id="17" name="Shape 15"/>
-          <p:cNvSpPr/>
-          <p:nvPr/>
-        </p:nvSpPr>
-        <p:spPr>
-          <a:xfrm>
-            <a:off x="2304288" y="4434840"/>
+          <p:cNvPr id="19" name="Shape 17"/>
+          <p:cNvSpPr/>
+          <p:nvPr/>
+        </p:nvSpPr>
+        <p:spPr>
+          <a:xfrm>
+            <a:off x="2304288" y="3813048"/>
             <a:ext cx="274320" cy="274320"/>
           </a:xfrm>
           <a:prstGeom prst="ellipse">
@@ -6677,13 +7889,13 @@
       </p:sp>
       <p:sp>
         <p:nvSpPr>
-          <p:cNvPr id="18" name="Text 16"/>
-          <p:cNvSpPr/>
-          <p:nvPr/>
-        </p:nvSpPr>
-        <p:spPr>
-          <a:xfrm>
-            <a:off x="1892808" y="4041648"/>
+          <p:cNvPr id="20" name="Text 18"/>
+          <p:cNvSpPr/>
+          <p:nvPr/>
+        </p:nvSpPr>
+        <p:spPr>
+          <a:xfrm>
+            <a:off x="1892808" y="3438144"/>
             <a:ext cx="1097280" cy="219456"/>
           </a:xfrm>
           <a:prstGeom prst="rect">
@@ -6716,13 +7928,13 @@
       </p:sp>
       <p:sp>
         <p:nvSpPr>
-          <p:cNvPr id="19" name="Text 17"/>
-          <p:cNvSpPr/>
-          <p:nvPr/>
-        </p:nvSpPr>
-        <p:spPr>
-          <a:xfrm>
-            <a:off x="1801368" y="4773168"/>
+          <p:cNvPr id="21" name="Text 19"/>
+          <p:cNvSpPr/>
+          <p:nvPr/>
+        </p:nvSpPr>
+        <p:spPr>
+          <a:xfrm>
+            <a:off x="1801368" y="4151376"/>
             <a:ext cx="1280160" cy="256032"/>
           </a:xfrm>
           <a:prstGeom prst="rect">
@@ -6755,13 +7967,13 @@
       </p:sp>
       <p:sp>
         <p:nvSpPr>
-          <p:cNvPr id="20" name="Shape 18"/>
-          <p:cNvSpPr/>
-          <p:nvPr/>
-        </p:nvSpPr>
-        <p:spPr>
-          <a:xfrm>
-            <a:off x="3785616" y="4434840"/>
+          <p:cNvPr id="22" name="Shape 20"/>
+          <p:cNvSpPr/>
+          <p:nvPr/>
+        </p:nvSpPr>
+        <p:spPr>
+          <a:xfrm>
+            <a:off x="3785616" y="3813048"/>
             <a:ext cx="274320" cy="274320"/>
           </a:xfrm>
           <a:prstGeom prst="ellipse">
@@ -6780,13 +7992,13 @@
       </p:sp>
       <p:sp>
         <p:nvSpPr>
-          <p:cNvPr id="21" name="Text 19"/>
-          <p:cNvSpPr/>
-          <p:nvPr/>
-        </p:nvSpPr>
-        <p:spPr>
-          <a:xfrm>
-            <a:off x="3374136" y="4041648"/>
+          <p:cNvPr id="23" name="Text 21"/>
+          <p:cNvSpPr/>
+          <p:nvPr/>
+        </p:nvSpPr>
+        <p:spPr>
+          <a:xfrm>
+            <a:off x="3374136" y="3438144"/>
             <a:ext cx="1097280" cy="219456"/>
           </a:xfrm>
           <a:prstGeom prst="rect">
@@ -6819,13 +8031,13 @@
       </p:sp>
       <p:sp>
         <p:nvSpPr>
-          <p:cNvPr id="22" name="Text 20"/>
-          <p:cNvSpPr/>
-          <p:nvPr/>
-        </p:nvSpPr>
-        <p:spPr>
-          <a:xfrm>
-            <a:off x="3282696" y="4773168"/>
+          <p:cNvPr id="24" name="Text 22"/>
+          <p:cNvSpPr/>
+          <p:nvPr/>
+        </p:nvSpPr>
+        <p:spPr>
+          <a:xfrm>
+            <a:off x="3282696" y="4151376"/>
             <a:ext cx="1280160" cy="256032"/>
           </a:xfrm>
           <a:prstGeom prst="rect">
@@ -6858,13 +8070,13 @@
       </p:sp>
       <p:sp>
         <p:nvSpPr>
-          <p:cNvPr id="23" name="Shape 21"/>
-          <p:cNvSpPr/>
-          <p:nvPr/>
-        </p:nvSpPr>
-        <p:spPr>
-          <a:xfrm>
-            <a:off x="5266944" y="4434840"/>
+          <p:cNvPr id="25" name="Shape 23"/>
+          <p:cNvSpPr/>
+          <p:nvPr/>
+        </p:nvSpPr>
+        <p:spPr>
+          <a:xfrm>
+            <a:off x="5266944" y="3813048"/>
             <a:ext cx="274320" cy="274320"/>
           </a:xfrm>
           <a:prstGeom prst="ellipse">
@@ -6883,13 +8095,13 @@
       </p:sp>
       <p:sp>
         <p:nvSpPr>
-          <p:cNvPr id="24" name="Text 22"/>
-          <p:cNvSpPr/>
-          <p:nvPr/>
-        </p:nvSpPr>
-        <p:spPr>
-          <a:xfrm>
-            <a:off x="4855464" y="4041648"/>
+          <p:cNvPr id="26" name="Text 24"/>
+          <p:cNvSpPr/>
+          <p:nvPr/>
+        </p:nvSpPr>
+        <p:spPr>
+          <a:xfrm>
+            <a:off x="4855464" y="3438144"/>
             <a:ext cx="1097280" cy="219456"/>
           </a:xfrm>
           <a:prstGeom prst="rect">
@@ -6922,13 +8134,13 @@
       </p:sp>
       <p:sp>
         <p:nvSpPr>
-          <p:cNvPr id="25" name="Text 23"/>
-          <p:cNvSpPr/>
-          <p:nvPr/>
-        </p:nvSpPr>
-        <p:spPr>
-          <a:xfrm>
-            <a:off x="4764024" y="4773168"/>
+          <p:cNvPr id="27" name="Text 25"/>
+          <p:cNvSpPr/>
+          <p:nvPr/>
+        </p:nvSpPr>
+        <p:spPr>
+          <a:xfrm>
+            <a:off x="4764024" y="4151376"/>
             <a:ext cx="1280160" cy="256032"/>
           </a:xfrm>
           <a:prstGeom prst="rect">
@@ -6961,14 +8173,34 @@
       </p:sp>
       <p:sp>
         <p:nvSpPr>
-          <p:cNvPr id="26" name="Text 24"/>
-          <p:cNvSpPr/>
-          <p:nvPr/>
-        </p:nvSpPr>
-        <p:spPr>
-          <a:xfrm>
-            <a:off x="502920" y="5084064"/>
-            <a:ext cx="5394960" cy="237744"/>
+          <p:cNvPr id="28" name="Shape 26"/>
+          <p:cNvSpPr/>
+          <p:nvPr/>
+        </p:nvSpPr>
+        <p:spPr>
+          <a:xfrm>
+            <a:off x="502920" y="4800600"/>
+            <a:ext cx="237744" cy="237744"/>
+          </a:xfrm>
+          <a:prstGeom prst="ellipse">
+            <a:avLst/>
+          </a:prstGeom>
+          <a:solidFill>
+            <a:srgbClr val="8A7F7A"/>
+          </a:solidFill>
+          <a:ln/>
+        </p:spPr>
+      </p:sp>
+      <p:sp>
+        <p:nvSpPr>
+          <p:cNvPr id="29" name="Text 27"/>
+          <p:cNvSpPr/>
+          <p:nvPr/>
+        </p:nvSpPr>
+        <p:spPr>
+          <a:xfrm>
+            <a:off x="868680" y="4754880"/>
+            <a:ext cx="2377440" cy="310896"/>
           </a:xfrm>
           <a:prstGeom prst="rect">
             <a:avLst/>
@@ -6984,6 +8216,45 @@
               <a:buNone/>
             </a:pPr>
             <a:r>
+              <a:rPr lang="en-US" sz="1350" b="1" dirty="0">
+                <a:solidFill>
+                  <a:srgbClr val="1F1A18"/>
+                </a:solidFill>
+                <a:latin typeface="맑은 고딕" pitchFamily="34" charset="0"/>
+                <a:ea typeface="맑은 고딕" pitchFamily="34" charset="-122"/>
+                <a:cs typeface="맑은 고딕" pitchFamily="34" charset="-120"/>
+              </a:rPr>
+              <a:t>핵심 지표</a:t>
+            </a:r>
+            <a:endParaRPr lang="en-US" sz="1350" dirty="0"/>
+          </a:p>
+        </p:txBody>
+      </p:sp>
+      <p:sp>
+        <p:nvSpPr>
+          <p:cNvPr id="30" name="Text 28"/>
+          <p:cNvSpPr/>
+          <p:nvPr/>
+        </p:nvSpPr>
+        <p:spPr>
+          <a:xfrm>
+            <a:off x="3291840" y="4754880"/>
+            <a:ext cx="2606040" cy="310896"/>
+          </a:xfrm>
+          <a:prstGeom prst="rect">
+            <a:avLst/>
+          </a:prstGeom>
+          <a:noFill/>
+          <a:ln/>
+        </p:spPr>
+        <p:txBody>
+          <a:bodyPr wrap="square" lIns="0" tIns="0" rIns="0" bIns="0" rtlCol="0" anchor="ctr"/>
+          <a:lstStyle/>
+          <a:p>
+            <a:pPr algn="r" indent="0" marL="0">
+              <a:buNone/>
+            </a:pPr>
+            <a:r>
               <a:rPr lang="en-US" sz="950" dirty="0">
                 <a:solidFill>
                   <a:srgbClr val="B3A9A5"/>
@@ -6992,7 +8263,7 @@
                 <a:ea typeface="맑은 고딕" pitchFamily="34" charset="-122"/>
                 <a:cs typeface="맑은 고딕" pitchFamily="34" charset="-120"/>
               </a:rPr>
-              <a:t>※ 단계명·완료 표시는 프로젝트에 맞게 수정</a:t>
+              <a:t>정량 수치가 있으면 기입</a:t>
             </a:r>
             <a:endParaRPr lang="en-US" sz="950" dirty="0"/>
           </a:p>
@@ -7000,18 +8271,18 @@
       </p:sp>
       <p:sp>
         <p:nvSpPr>
-          <p:cNvPr id="27" name="Shape 25"/>
-          <p:cNvSpPr/>
-          <p:nvPr/>
-        </p:nvSpPr>
-        <p:spPr>
-          <a:xfrm>
-            <a:off x="502920" y="5358384"/>
-            <a:ext cx="5394960" cy="1261872"/>
+          <p:cNvPr id="31" name="Shape 29"/>
+          <p:cNvSpPr/>
+          <p:nvPr/>
+        </p:nvSpPr>
+        <p:spPr>
+          <a:xfrm>
+            <a:off x="502920" y="5138928"/>
+            <a:ext cx="5394960" cy="1481328"/>
           </a:xfrm>
           <a:prstGeom prst="roundRect">
             <a:avLst>
-              <a:gd name="adj" fmla="val 4348"/>
+              <a:gd name="adj" fmla="val 3704"/>
             </a:avLst>
           </a:prstGeom>
           <a:solidFill>
@@ -7034,14 +8305,14 @@
       </p:sp>
       <p:sp>
         <p:nvSpPr>
-          <p:cNvPr id="28" name="Text 26"/>
-          <p:cNvSpPr/>
-          <p:nvPr/>
-        </p:nvSpPr>
-        <p:spPr>
-          <a:xfrm>
-            <a:off x="822960" y="5504688"/>
-            <a:ext cx="4754880" cy="237744"/>
+          <p:cNvPr id="32" name="Text 30"/>
+          <p:cNvSpPr/>
+          <p:nvPr/>
+        </p:nvSpPr>
+        <p:spPr>
+          <a:xfrm>
+            <a:off x="822960" y="5321808"/>
+            <a:ext cx="1572768" cy="219456"/>
           </a:xfrm>
           <a:prstGeom prst="rect">
             <a:avLst/>
@@ -7057,30 +8328,30 @@
               <a:buNone/>
             </a:pPr>
             <a:r>
-              <a:rPr lang="en-US" sz="1150" b="1" dirty="0">
-                <a:solidFill>
-                  <a:srgbClr val="EA002C"/>
-                </a:solidFill>
-                <a:latin typeface="맑은 고딕" pitchFamily="34" charset="0"/>
-                <a:ea typeface="맑은 고딕" pitchFamily="34" charset="-122"/>
-                <a:cs typeface="맑은 고딕" pitchFamily="34" charset="-120"/>
-              </a:rPr>
-              <a:t>주요 성과 · 수치</a:t>
-            </a:r>
-            <a:endParaRPr lang="en-US" sz="1150" dirty="0"/>
-          </a:p>
-        </p:txBody>
-      </p:sp>
-      <p:sp>
-        <p:nvSpPr>
-          <p:cNvPr id="29" name="Text 27"/>
-          <p:cNvSpPr/>
-          <p:nvPr/>
-        </p:nvSpPr>
-        <p:spPr>
-          <a:xfrm>
-            <a:off x="822960" y="5833872"/>
-            <a:ext cx="1463040" cy="201168"/>
+              <a:rPr lang="en-US" sz="950" dirty="0">
+                <a:solidFill>
+                  <a:srgbClr val="B3A9A5"/>
+                </a:solidFill>
+                <a:latin typeface="맑은 고딕" pitchFamily="34" charset="0"/>
+                <a:ea typeface="맑은 고딕" pitchFamily="34" charset="-122"/>
+                <a:cs typeface="맑은 고딕" pitchFamily="34" charset="-120"/>
+              </a:rPr>
+              <a:t>예) 작업시간</a:t>
+            </a:r>
+            <a:endParaRPr lang="en-US" sz="950" dirty="0"/>
+          </a:p>
+        </p:txBody>
+      </p:sp>
+      <p:sp>
+        <p:nvSpPr>
+          <p:cNvPr id="33" name="Text 31"/>
+          <p:cNvSpPr/>
+          <p:nvPr/>
+        </p:nvSpPr>
+        <p:spPr>
+          <a:xfrm>
+            <a:off x="822960" y="5541264"/>
+            <a:ext cx="1572768" cy="329184"/>
           </a:xfrm>
           <a:prstGeom prst="rect">
             <a:avLst/>
@@ -7096,6 +8367,45 @@
               <a:buNone/>
             </a:pPr>
             <a:r>
+              <a:rPr lang="en-US" sz="1500" b="1" dirty="0">
+                <a:solidFill>
+                  <a:srgbClr val="1F1A18"/>
+                </a:solidFill>
+                <a:latin typeface="맑은 고딕" pitchFamily="34" charset="0"/>
+                <a:ea typeface="맑은 고딕" pitchFamily="34" charset="-122"/>
+                <a:cs typeface="맑은 고딕" pitchFamily="34" charset="-120"/>
+              </a:rPr>
+              <a:t>3h → 10분</a:t>
+            </a:r>
+            <a:endParaRPr lang="en-US" sz="1500" dirty="0"/>
+          </a:p>
+        </p:txBody>
+      </p:sp>
+      <p:sp>
+        <p:nvSpPr>
+          <p:cNvPr id="34" name="Text 32"/>
+          <p:cNvSpPr/>
+          <p:nvPr/>
+        </p:nvSpPr>
+        <p:spPr>
+          <a:xfrm>
+            <a:off x="2496312" y="5321808"/>
+            <a:ext cx="1572768" cy="219456"/>
+          </a:xfrm>
+          <a:prstGeom prst="rect">
+            <a:avLst/>
+          </a:prstGeom>
+          <a:noFill/>
+          <a:ln/>
+        </p:spPr>
+        <p:txBody>
+          <a:bodyPr wrap="square" lIns="0" tIns="0" rIns="0" bIns="0" rtlCol="0" anchor="ctr"/>
+          <a:lstStyle/>
+          <a:p>
+            <a:pPr indent="0" marL="0">
+              <a:buNone/>
+            </a:pPr>
+            <a:r>
               <a:rPr lang="en-US" sz="950" dirty="0">
                 <a:solidFill>
                   <a:srgbClr val="B3A9A5"/>
@@ -7104,7 +8414,7 @@
                 <a:ea typeface="맑은 고딕" pitchFamily="34" charset="-122"/>
                 <a:cs typeface="맑은 고딕" pitchFamily="34" charset="-120"/>
               </a:rPr>
-              <a:t>항목</a:t>
+              <a:t>예) 오류 건수</a:t>
             </a:r>
             <a:endParaRPr lang="en-US" sz="950" dirty="0"/>
           </a:p>
@@ -7112,14 +8422,14 @@
       </p:sp>
       <p:sp>
         <p:nvSpPr>
-          <p:cNvPr id="30" name="Text 28"/>
-          <p:cNvSpPr/>
-          <p:nvPr/>
-        </p:nvSpPr>
-        <p:spPr>
-          <a:xfrm>
-            <a:off x="822960" y="6035040"/>
-            <a:ext cx="1463040" cy="384048"/>
+          <p:cNvPr id="35" name="Text 33"/>
+          <p:cNvSpPr/>
+          <p:nvPr/>
+        </p:nvSpPr>
+        <p:spPr>
+          <a:xfrm>
+            <a:off x="2496312" y="5541264"/>
+            <a:ext cx="1572768" cy="329184"/>
           </a:xfrm>
           <a:prstGeom prst="rect">
             <a:avLst/>
@@ -7135,7 +8445,7 @@
               <a:buNone/>
             </a:pPr>
             <a:r>
-              <a:rPr lang="en-US" sz="2000" b="1" dirty="0">
+              <a:rPr lang="en-US" sz="1500" b="1" dirty="0">
                 <a:solidFill>
                   <a:srgbClr val="1F1A18"/>
                 </a:solidFill>
@@ -7143,22 +8453,22 @@
                 <a:ea typeface="맑은 고딕" pitchFamily="34" charset="-122"/>
                 <a:cs typeface="맑은 고딕" pitchFamily="34" charset="-120"/>
               </a:rPr>
-              <a:t>00</a:t>
-            </a:r>
-            <a:endParaRPr lang="en-US" sz="2000" dirty="0"/>
-          </a:p>
-        </p:txBody>
-      </p:sp>
-      <p:sp>
-        <p:nvSpPr>
-          <p:cNvPr id="31" name="Text 29"/>
-          <p:cNvSpPr/>
-          <p:nvPr/>
-        </p:nvSpPr>
-        <p:spPr>
-          <a:xfrm>
-            <a:off x="2450592" y="5833872"/>
-            <a:ext cx="1463040" cy="201168"/>
+              <a:t>월 5건 → 0</a:t>
+            </a:r>
+            <a:endParaRPr lang="en-US" sz="1500" dirty="0"/>
+          </a:p>
+        </p:txBody>
+      </p:sp>
+      <p:sp>
+        <p:nvSpPr>
+          <p:cNvPr id="36" name="Text 34"/>
+          <p:cNvSpPr/>
+          <p:nvPr/>
+        </p:nvSpPr>
+        <p:spPr>
+          <a:xfrm>
+            <a:off x="4169664" y="5321808"/>
+            <a:ext cx="1572768" cy="219456"/>
           </a:xfrm>
           <a:prstGeom prst="rect">
             <a:avLst/>
@@ -7182,7 +8492,7 @@
                 <a:ea typeface="맑은 고딕" pitchFamily="34" charset="-122"/>
                 <a:cs typeface="맑은 고딕" pitchFamily="34" charset="-120"/>
               </a:rPr>
-              <a:t>항목</a:t>
+              <a:t>예) 적용 설비</a:t>
             </a:r>
             <a:endParaRPr lang="en-US" sz="950" dirty="0"/>
           </a:p>
@@ -7190,14 +8500,14 @@
       </p:sp>
       <p:sp>
         <p:nvSpPr>
-          <p:cNvPr id="32" name="Text 30"/>
-          <p:cNvSpPr/>
-          <p:nvPr/>
-        </p:nvSpPr>
-        <p:spPr>
-          <a:xfrm>
-            <a:off x="2450592" y="6035040"/>
-            <a:ext cx="1463040" cy="384048"/>
+          <p:cNvPr id="37" name="Text 35"/>
+          <p:cNvSpPr/>
+          <p:nvPr/>
+        </p:nvSpPr>
+        <p:spPr>
+          <a:xfrm>
+            <a:off x="4169664" y="5541264"/>
+            <a:ext cx="1572768" cy="329184"/>
           </a:xfrm>
           <a:prstGeom prst="rect">
             <a:avLst/>
@@ -7213,7 +8523,7 @@
               <a:buNone/>
             </a:pPr>
             <a:r>
-              <a:rPr lang="en-US" sz="2000" b="1" dirty="0">
+              <a:rPr lang="en-US" sz="1500" b="1" dirty="0">
                 <a:solidFill>
                   <a:srgbClr val="1F1A18"/>
                 </a:solidFill>
@@ -7221,22 +8531,22 @@
                 <a:ea typeface="맑은 고딕" pitchFamily="34" charset="-122"/>
                 <a:cs typeface="맑은 고딕" pitchFamily="34" charset="-120"/>
               </a:rPr>
-              <a:t>00</a:t>
-            </a:r>
-            <a:endParaRPr lang="en-US" sz="2000" dirty="0"/>
-          </a:p>
-        </p:txBody>
-      </p:sp>
-      <p:sp>
-        <p:nvSpPr>
-          <p:cNvPr id="33" name="Text 31"/>
-          <p:cNvSpPr/>
-          <p:nvPr/>
-        </p:nvSpPr>
-        <p:spPr>
-          <a:xfrm>
-            <a:off x="4078224" y="5833872"/>
-            <a:ext cx="1463040" cy="201168"/>
+              <a:t>3 호기</a:t>
+            </a:r>
+            <a:endParaRPr lang="en-US" sz="1500" dirty="0"/>
+          </a:p>
+        </p:txBody>
+      </p:sp>
+      <p:sp>
+        <p:nvSpPr>
+          <p:cNvPr id="38" name="Text 36"/>
+          <p:cNvSpPr/>
+          <p:nvPr/>
+        </p:nvSpPr>
+        <p:spPr>
+          <a:xfrm>
+            <a:off x="822960" y="5989320"/>
+            <a:ext cx="4800600" cy="512064"/>
           </a:xfrm>
           <a:prstGeom prst="rect">
             <a:avLst/>
@@ -7249,18 +8559,21 @@
           <a:lstStyle/>
           <a:p>
             <a:pPr indent="0" marL="0">
+              <a:lnSpc>
+                <a:spcPts val="1300"/>
+              </a:lnSpc>
               <a:buNone/>
             </a:pPr>
             <a:r>
               <a:rPr lang="en-US" sz="950" dirty="0">
                 <a:solidFill>
-                  <a:srgbClr val="B3A9A5"/>
-                </a:solidFill>
-                <a:latin typeface="맑은 고딕" pitchFamily="34" charset="0"/>
-                <a:ea typeface="맑은 고딕" pitchFamily="34" charset="-122"/>
-                <a:cs typeface="맑은 고딕" pitchFamily="34" charset="-120"/>
-              </a:rPr>
-              <a:t>항목</a:t>
+                  <a:srgbClr val="9A908C"/>
+                </a:solidFill>
+                <a:latin typeface="맑은 고딕" pitchFamily="34" charset="0"/>
+                <a:ea typeface="맑은 고딕" pitchFamily="34" charset="-122"/>
+                <a:cs typeface="맑은 고딕" pitchFamily="34" charset="-120"/>
+              </a:rPr>
+              <a:t>※ 정량 수치가 없으면 정성 효과로 대체 — 예) 수작업 제거, 이력 관리 체계화, 판단 근거 확보</a:t>
             </a:r>
             <a:endParaRPr lang="en-US" sz="950" dirty="0"/>
           </a:p>
@@ -7268,52 +8581,13 @@
       </p:sp>
       <p:sp>
         <p:nvSpPr>
-          <p:cNvPr id="34" name="Text 32"/>
-          <p:cNvSpPr/>
-          <p:nvPr/>
-        </p:nvSpPr>
-        <p:spPr>
-          <a:xfrm>
-            <a:off x="4078224" y="6035040"/>
-            <a:ext cx="1463040" cy="384048"/>
-          </a:xfrm>
-          <a:prstGeom prst="rect">
-            <a:avLst/>
-          </a:prstGeom>
-          <a:noFill/>
-          <a:ln/>
-        </p:spPr>
-        <p:txBody>
-          <a:bodyPr wrap="square" lIns="0" tIns="0" rIns="0" bIns="0" rtlCol="0" anchor="ctr"/>
-          <a:lstStyle/>
-          <a:p>
-            <a:pPr indent="0" marL="0">
-              <a:buNone/>
-            </a:pPr>
-            <a:r>
-              <a:rPr lang="en-US" sz="2000" b="1" dirty="0">
-                <a:solidFill>
-                  <a:srgbClr val="1F1A18"/>
-                </a:solidFill>
-                <a:latin typeface="맑은 고딕" pitchFamily="34" charset="0"/>
-                <a:ea typeface="맑은 고딕" pitchFamily="34" charset="-122"/>
-                <a:cs typeface="맑은 고딕" pitchFamily="34" charset="-120"/>
-              </a:rPr>
-              <a:t>00</a:t>
-            </a:r>
-            <a:endParaRPr lang="en-US" sz="2000" dirty="0"/>
-          </a:p>
-        </p:txBody>
-      </p:sp>
-      <p:sp>
-        <p:nvSpPr>
-          <p:cNvPr id="35" name="Shape 33"/>
-          <p:cNvSpPr/>
-          <p:nvPr/>
-        </p:nvSpPr>
-        <p:spPr>
-          <a:xfrm>
-            <a:off x="6291072" y="1161288"/>
+          <p:cNvPr id="39" name="Shape 37"/>
+          <p:cNvSpPr/>
+          <p:nvPr/>
+        </p:nvSpPr>
+        <p:spPr>
+          <a:xfrm>
+            <a:off x="6291072" y="1124712"/>
             <a:ext cx="237744" cy="237744"/>
           </a:xfrm>
           <a:prstGeom prst="ellipse">
@@ -7327,14 +8601,14 @@
       </p:sp>
       <p:sp>
         <p:nvSpPr>
-          <p:cNvPr id="36" name="Text 34"/>
-          <p:cNvSpPr/>
-          <p:nvPr/>
-        </p:nvSpPr>
-        <p:spPr>
-          <a:xfrm>
-            <a:off x="6656832" y="1115568"/>
-            <a:ext cx="4023360" cy="329184"/>
+          <p:cNvPr id="40" name="Text 38"/>
+          <p:cNvSpPr/>
+          <p:nvPr/>
+        </p:nvSpPr>
+        <p:spPr>
+          <a:xfrm>
+            <a:off x="6656832" y="1078992"/>
+            <a:ext cx="2377440" cy="310896"/>
           </a:xfrm>
           <a:prstGeom prst="rect">
             <a:avLst/>
@@ -7366,18 +8640,57 @@
       </p:sp>
       <p:sp>
         <p:nvSpPr>
-          <p:cNvPr id="37" name="Shape 35"/>
-          <p:cNvSpPr/>
-          <p:nvPr/>
-        </p:nvSpPr>
-        <p:spPr>
-          <a:xfrm>
-            <a:off x="6291072" y="1536192"/>
-            <a:ext cx="5394960" cy="2121408"/>
+          <p:cNvPr id="41" name="Text 39"/>
+          <p:cNvSpPr/>
+          <p:nvPr/>
+        </p:nvSpPr>
+        <p:spPr>
+          <a:xfrm>
+            <a:off x="9079992" y="1078992"/>
+            <a:ext cx="2606040" cy="310896"/>
+          </a:xfrm>
+          <a:prstGeom prst="rect">
+            <a:avLst/>
+          </a:prstGeom>
+          <a:noFill/>
+          <a:ln/>
+        </p:spPr>
+        <p:txBody>
+          <a:bodyPr wrap="square" lIns="0" tIns="0" rIns="0" bIns="0" rtlCol="0" anchor="ctr"/>
+          <a:lstStyle/>
+          <a:p>
+            <a:pPr algn="r" indent="0" marL="0">
+              <a:buNone/>
+            </a:pPr>
+            <a:r>
+              <a:rPr lang="en-US" sz="950" dirty="0">
+                <a:solidFill>
+                  <a:srgbClr val="B3A9A5"/>
+                </a:solidFill>
+                <a:latin typeface="맑은 고딕" pitchFamily="34" charset="0"/>
+                <a:ea typeface="맑은 고딕" pitchFamily="34" charset="-122"/>
+                <a:cs typeface="맑은 고딕" pitchFamily="34" charset="-120"/>
+              </a:rPr>
+              <a:t>정사각형 영역</a:t>
+            </a:r>
+            <a:endParaRPr lang="en-US" sz="950" dirty="0"/>
+          </a:p>
+        </p:txBody>
+      </p:sp>
+      <p:sp>
+        <p:nvSpPr>
+          <p:cNvPr id="42" name="Shape 40"/>
+          <p:cNvSpPr/>
+          <p:nvPr/>
+        </p:nvSpPr>
+        <p:spPr>
+          <a:xfrm>
+            <a:off x="6291072" y="1463040"/>
+            <a:ext cx="2633472" cy="2889504"/>
           </a:xfrm>
           <a:prstGeom prst="roundRect">
             <a:avLst>
-              <a:gd name="adj" fmla="val 2586"/>
+              <a:gd name="adj" fmla="val 2083"/>
             </a:avLst>
           </a:prstGeom>
           <a:solidFill>
@@ -7400,18 +8713,18 @@
       </p:sp>
       <p:sp>
         <p:nvSpPr>
-          <p:cNvPr id="38" name="Shape 36"/>
-          <p:cNvSpPr/>
-          <p:nvPr/>
-        </p:nvSpPr>
-        <p:spPr>
-          <a:xfrm>
-            <a:off x="6519672" y="1691640"/>
-            <a:ext cx="4937760" cy="1572768"/>
+          <p:cNvPr id="43" name="Shape 41"/>
+          <p:cNvSpPr/>
+          <p:nvPr/>
+        </p:nvSpPr>
+        <p:spPr>
+          <a:xfrm>
+            <a:off x="6446520" y="1618488"/>
+            <a:ext cx="2322576" cy="2322576"/>
           </a:xfrm>
           <a:prstGeom prst="roundRect">
             <a:avLst>
-              <a:gd name="adj" fmla="val 2326"/>
+              <a:gd name="adj" fmla="val 1575"/>
             </a:avLst>
           </a:prstGeom>
           <a:solidFill>
@@ -7427,14 +8740,14 @@
       </p:sp>
       <p:sp>
         <p:nvSpPr>
-          <p:cNvPr id="39" name="Text 37"/>
-          <p:cNvSpPr/>
-          <p:nvPr/>
-        </p:nvSpPr>
-        <p:spPr>
-          <a:xfrm>
-            <a:off x="6519672" y="1691640"/>
-            <a:ext cx="4937760" cy="1572768"/>
+          <p:cNvPr id="44" name="Text 42"/>
+          <p:cNvSpPr/>
+          <p:nvPr/>
+        </p:nvSpPr>
+        <p:spPr>
+          <a:xfrm>
+            <a:off x="6446520" y="1618488"/>
+            <a:ext cx="2322576" cy="2322576"/>
           </a:xfrm>
           <a:prstGeom prst="rect">
             <a:avLst/>
@@ -7447,10 +8760,13 @@
           <a:lstStyle/>
           <a:p>
             <a:pPr algn="ctr" indent="0" marL="0">
-              <a:buNone/>
-            </a:pPr>
-            <a:r>
-              <a:rPr lang="en-US" sz="1200" dirty="0">
+              <a:lnSpc>
+                <a:spcPts val="1600"/>
+              </a:lnSpc>
+              <a:buNone/>
+            </a:pPr>
+            <a:r>
+              <a:rPr lang="en-US" sz="1100" dirty="0">
                 <a:solidFill>
                   <a:srgbClr val="B3A9A5"/>
                 </a:solidFill>
@@ -7458,38 +8774,19 @@
                 <a:ea typeface="맑은 고딕" pitchFamily="34" charset="-122"/>
                 <a:cs typeface="맑은 고딕" pitchFamily="34" charset="-120"/>
               </a:rPr>
-              <a:t>이곳에 사진 또는 화면 캡처를 넣으세요</a:t>
-            </a:r>
-            <a:endParaRPr lang="en-US" sz="1200" dirty="0"/>
-          </a:p>
-        </p:txBody>
-      </p:sp>
-      <p:sp>
-        <p:nvSpPr>
-          <p:cNvPr id="40" name="Text 38"/>
-          <p:cNvSpPr/>
-          <p:nvPr/>
-        </p:nvSpPr>
-        <p:spPr>
-          <a:xfrm>
-            <a:off x="6519672" y="3319272"/>
-            <a:ext cx="4937760" cy="237744"/>
-          </a:xfrm>
-          <a:prstGeom prst="rect">
-            <a:avLst/>
-          </a:prstGeom>
-          <a:noFill/>
-          <a:ln/>
-        </p:spPr>
-        <p:txBody>
-          <a:bodyPr wrap="square" lIns="0" tIns="0" rIns="0" bIns="0" rtlCol="0" anchor="ctr"/>
-          <a:lstStyle/>
+              <a:t>사진 / 화면</a:t>
+            </a:r>
+            <a:endParaRPr lang="en-US" sz="1100" dirty="0"/>
+          </a:p>
           <a:p>
             <a:pPr algn="ctr" indent="0" marL="0">
-              <a:buNone/>
-            </a:pPr>
-            <a:r>
-              <a:rPr lang="en-US" sz="1050" dirty="0">
+              <a:lnSpc>
+                <a:spcPts val="1600"/>
+              </a:lnSpc>
+              <a:buNone/>
+            </a:pPr>
+            <a:r>
+              <a:rPr lang="en-US" sz="1100" dirty="0">
                 <a:solidFill>
                   <a:srgbClr val="B3A9A5"/>
                 </a:solidFill>
@@ -7497,26 +8794,65 @@
                 <a:ea typeface="맑은 고딕" pitchFamily="34" charset="-122"/>
                 <a:cs typeface="맑은 고딕" pitchFamily="34" charset="-120"/>
               </a:rPr>
-              <a:t>캡션 — 무엇을 보여주는 화면인지 한 줄</a:t>
-            </a:r>
-            <a:endParaRPr lang="en-US" sz="1050" dirty="0"/>
-          </a:p>
-        </p:txBody>
-      </p:sp>
-      <p:sp>
-        <p:nvSpPr>
-          <p:cNvPr id="41" name="Shape 39"/>
-          <p:cNvSpPr/>
-          <p:nvPr/>
-        </p:nvSpPr>
-        <p:spPr>
-          <a:xfrm>
-            <a:off x="6291072" y="3794760"/>
-            <a:ext cx="5394960" cy="2121408"/>
+              <a:t>(정사각형)</a:t>
+            </a:r>
+            <a:endParaRPr lang="en-US" sz="1100" dirty="0"/>
+          </a:p>
+        </p:txBody>
+      </p:sp>
+      <p:sp>
+        <p:nvSpPr>
+          <p:cNvPr id="45" name="Text 43"/>
+          <p:cNvSpPr/>
+          <p:nvPr/>
+        </p:nvSpPr>
+        <p:spPr>
+          <a:xfrm>
+            <a:off x="6400800" y="4005072"/>
+            <a:ext cx="2414016" cy="274320"/>
+          </a:xfrm>
+          <a:prstGeom prst="rect">
+            <a:avLst/>
+          </a:prstGeom>
+          <a:noFill/>
+          <a:ln/>
+        </p:spPr>
+        <p:txBody>
+          <a:bodyPr wrap="square" lIns="0" tIns="0" rIns="0" bIns="0" rtlCol="0" anchor="ctr"/>
+          <a:lstStyle/>
+          <a:p>
+            <a:pPr algn="ctr" indent="0" marL="0">
+              <a:buNone/>
+            </a:pPr>
+            <a:r>
+              <a:rPr lang="en-US" sz="950" dirty="0">
+                <a:solidFill>
+                  <a:srgbClr val="B3A9A5"/>
+                </a:solidFill>
+                <a:latin typeface="맑은 고딕" pitchFamily="34" charset="0"/>
+                <a:ea typeface="맑은 고딕" pitchFamily="34" charset="-122"/>
+                <a:cs typeface="맑은 고딕" pitchFamily="34" charset="-120"/>
+              </a:rPr>
+              <a:t>캡션 — 무엇을 보여주는지 한 줄</a:t>
+            </a:r>
+            <a:endParaRPr lang="en-US" sz="950" dirty="0"/>
+          </a:p>
+        </p:txBody>
+      </p:sp>
+      <p:sp>
+        <p:nvSpPr>
+          <p:cNvPr id="46" name="Shape 44"/>
+          <p:cNvSpPr/>
+          <p:nvPr/>
+        </p:nvSpPr>
+        <p:spPr>
+          <a:xfrm>
+            <a:off x="9052560" y="1463040"/>
+            <a:ext cx="2633472" cy="2889504"/>
           </a:xfrm>
           <a:prstGeom prst="roundRect">
             <a:avLst>
-              <a:gd name="adj" fmla="val 2586"/>
+              <a:gd name="adj" fmla="val 2083"/>
             </a:avLst>
           </a:prstGeom>
           <a:solidFill>
@@ -7539,18 +8875,18 @@
       </p:sp>
       <p:sp>
         <p:nvSpPr>
-          <p:cNvPr id="42" name="Shape 40"/>
-          <p:cNvSpPr/>
-          <p:nvPr/>
-        </p:nvSpPr>
-        <p:spPr>
-          <a:xfrm>
-            <a:off x="6519672" y="3950208"/>
-            <a:ext cx="4937760" cy="1572768"/>
+          <p:cNvPr id="47" name="Shape 45"/>
+          <p:cNvSpPr/>
+          <p:nvPr/>
+        </p:nvSpPr>
+        <p:spPr>
+          <a:xfrm>
+            <a:off x="9208008" y="1618488"/>
+            <a:ext cx="2322576" cy="2322576"/>
           </a:xfrm>
           <a:prstGeom prst="roundRect">
             <a:avLst>
-              <a:gd name="adj" fmla="val 2326"/>
+              <a:gd name="adj" fmla="val 1575"/>
             </a:avLst>
           </a:prstGeom>
           <a:solidFill>
@@ -7566,14 +8902,14 @@
       </p:sp>
       <p:sp>
         <p:nvSpPr>
-          <p:cNvPr id="43" name="Text 41"/>
-          <p:cNvSpPr/>
-          <p:nvPr/>
-        </p:nvSpPr>
-        <p:spPr>
-          <a:xfrm>
-            <a:off x="6519672" y="3950208"/>
-            <a:ext cx="4937760" cy="1572768"/>
+          <p:cNvPr id="48" name="Text 46"/>
+          <p:cNvSpPr/>
+          <p:nvPr/>
+        </p:nvSpPr>
+        <p:spPr>
+          <a:xfrm>
+            <a:off x="9208008" y="1618488"/>
+            <a:ext cx="2322576" cy="2322576"/>
           </a:xfrm>
           <a:prstGeom prst="rect">
             <a:avLst/>
@@ -7586,10 +8922,13 @@
           <a:lstStyle/>
           <a:p>
             <a:pPr algn="ctr" indent="0" marL="0">
-              <a:buNone/>
-            </a:pPr>
-            <a:r>
-              <a:rPr lang="en-US" sz="1200" dirty="0">
+              <a:lnSpc>
+                <a:spcPts val="1600"/>
+              </a:lnSpc>
+              <a:buNone/>
+            </a:pPr>
+            <a:r>
+              <a:rPr lang="en-US" sz="1100" dirty="0">
                 <a:solidFill>
                   <a:srgbClr val="B3A9A5"/>
                 </a:solidFill>
@@ -7597,38 +8936,19 @@
                 <a:ea typeface="맑은 고딕" pitchFamily="34" charset="-122"/>
                 <a:cs typeface="맑은 고딕" pitchFamily="34" charset="-120"/>
               </a:rPr>
-              <a:t>이곳에 사진 또는 화면 캡처를 넣으세요</a:t>
-            </a:r>
-            <a:endParaRPr lang="en-US" sz="1200" dirty="0"/>
-          </a:p>
-        </p:txBody>
-      </p:sp>
-      <p:sp>
-        <p:nvSpPr>
-          <p:cNvPr id="44" name="Text 42"/>
-          <p:cNvSpPr/>
-          <p:nvPr/>
-        </p:nvSpPr>
-        <p:spPr>
-          <a:xfrm>
-            <a:off x="6519672" y="5577840"/>
-            <a:ext cx="4937760" cy="237744"/>
-          </a:xfrm>
-          <a:prstGeom prst="rect">
-            <a:avLst/>
-          </a:prstGeom>
-          <a:noFill/>
-          <a:ln/>
-        </p:spPr>
-        <p:txBody>
-          <a:bodyPr wrap="square" lIns="0" tIns="0" rIns="0" bIns="0" rtlCol="0" anchor="ctr"/>
-          <a:lstStyle/>
+              <a:t>사진 / 화면</a:t>
+            </a:r>
+            <a:endParaRPr lang="en-US" sz="1100" dirty="0"/>
+          </a:p>
           <a:p>
             <a:pPr algn="ctr" indent="0" marL="0">
-              <a:buNone/>
-            </a:pPr>
-            <a:r>
-              <a:rPr lang="en-US" sz="1050" dirty="0">
+              <a:lnSpc>
+                <a:spcPts val="1600"/>
+              </a:lnSpc>
+              <a:buNone/>
+            </a:pPr>
+            <a:r>
+              <a:rPr lang="en-US" sz="1100" dirty="0">
                 <a:solidFill>
                   <a:srgbClr val="B3A9A5"/>
                 </a:solidFill>
@@ -7636,30 +8956,167 @@
                 <a:ea typeface="맑은 고딕" pitchFamily="34" charset="-122"/>
                 <a:cs typeface="맑은 고딕" pitchFamily="34" charset="-120"/>
               </a:rPr>
-              <a:t>캡션 — 무엇을 보여주는 화면인지 한 줄</a:t>
-            </a:r>
-            <a:endParaRPr lang="en-US" sz="1050" dirty="0"/>
-          </a:p>
-        </p:txBody>
-      </p:sp>
-      <p:sp>
-        <p:nvSpPr>
-          <p:cNvPr id="45" name="Shape 43"/>
-          <p:cNvSpPr/>
-          <p:nvPr/>
-        </p:nvSpPr>
-        <p:spPr>
-          <a:xfrm>
-            <a:off x="6291072" y="6053328"/>
-            <a:ext cx="5394960" cy="566928"/>
+              <a:t>(정사각형)</a:t>
+            </a:r>
+            <a:endParaRPr lang="en-US" sz="1100" dirty="0"/>
+          </a:p>
+        </p:txBody>
+      </p:sp>
+      <p:sp>
+        <p:nvSpPr>
+          <p:cNvPr id="49" name="Text 47"/>
+          <p:cNvSpPr/>
+          <p:nvPr/>
+        </p:nvSpPr>
+        <p:spPr>
+          <a:xfrm>
+            <a:off x="9162288" y="4005072"/>
+            <a:ext cx="2414016" cy="274320"/>
+          </a:xfrm>
+          <a:prstGeom prst="rect">
+            <a:avLst/>
+          </a:prstGeom>
+          <a:noFill/>
+          <a:ln/>
+        </p:spPr>
+        <p:txBody>
+          <a:bodyPr wrap="square" lIns="0" tIns="0" rIns="0" bIns="0" rtlCol="0" anchor="ctr"/>
+          <a:lstStyle/>
+          <a:p>
+            <a:pPr algn="ctr" indent="0" marL="0">
+              <a:buNone/>
+            </a:pPr>
+            <a:r>
+              <a:rPr lang="en-US" sz="950" dirty="0">
+                <a:solidFill>
+                  <a:srgbClr val="B3A9A5"/>
+                </a:solidFill>
+                <a:latin typeface="맑은 고딕" pitchFamily="34" charset="0"/>
+                <a:ea typeface="맑은 고딕" pitchFamily="34" charset="-122"/>
+                <a:cs typeface="맑은 고딕" pitchFamily="34" charset="-120"/>
+              </a:rPr>
+              <a:t>캡션 — 무엇을 보여주는지 한 줄</a:t>
+            </a:r>
+            <a:endParaRPr lang="en-US" sz="950" dirty="0"/>
+          </a:p>
+        </p:txBody>
+      </p:sp>
+      <p:sp>
+        <p:nvSpPr>
+          <p:cNvPr id="50" name="Shape 48"/>
+          <p:cNvSpPr/>
+          <p:nvPr/>
+        </p:nvSpPr>
+        <p:spPr>
+          <a:xfrm>
+            <a:off x="6291072" y="4581144"/>
+            <a:ext cx="237744" cy="237744"/>
+          </a:xfrm>
+          <a:prstGeom prst="ellipse">
+            <a:avLst/>
+          </a:prstGeom>
+          <a:solidFill>
+            <a:srgbClr val="EA002C"/>
+          </a:solidFill>
+          <a:ln/>
+        </p:spPr>
+      </p:sp>
+      <p:sp>
+        <p:nvSpPr>
+          <p:cNvPr id="51" name="Text 49"/>
+          <p:cNvSpPr/>
+          <p:nvPr/>
+        </p:nvSpPr>
+        <p:spPr>
+          <a:xfrm>
+            <a:off x="6656832" y="4535424"/>
+            <a:ext cx="2377440" cy="310896"/>
+          </a:xfrm>
+          <a:prstGeom prst="rect">
+            <a:avLst/>
+          </a:prstGeom>
+          <a:noFill/>
+          <a:ln/>
+        </p:spPr>
+        <p:txBody>
+          <a:bodyPr wrap="square" lIns="0" tIns="0" rIns="0" bIns="0" rtlCol="0" anchor="ctr"/>
+          <a:lstStyle/>
+          <a:p>
+            <a:pPr indent="0" marL="0">
+              <a:buNone/>
+            </a:pPr>
+            <a:r>
+              <a:rPr lang="en-US" sz="1350" b="1" dirty="0">
+                <a:solidFill>
+                  <a:srgbClr val="1F1A18"/>
+                </a:solidFill>
+                <a:latin typeface="맑은 고딕" pitchFamily="34" charset="0"/>
+                <a:ea typeface="맑은 고딕" pitchFamily="34" charset="-122"/>
+                <a:cs typeface="맑은 고딕" pitchFamily="34" charset="-120"/>
+              </a:rPr>
+              <a:t>향후 계획</a:t>
+            </a:r>
+            <a:endParaRPr lang="en-US" sz="1350" dirty="0"/>
+          </a:p>
+        </p:txBody>
+      </p:sp>
+      <p:sp>
+        <p:nvSpPr>
+          <p:cNvPr id="52" name="Text 50"/>
+          <p:cNvSpPr/>
+          <p:nvPr/>
+        </p:nvSpPr>
+        <p:spPr>
+          <a:xfrm>
+            <a:off x="9079992" y="4535424"/>
+            <a:ext cx="2606040" cy="310896"/>
+          </a:xfrm>
+          <a:prstGeom prst="rect">
+            <a:avLst/>
+          </a:prstGeom>
+          <a:noFill/>
+          <a:ln/>
+        </p:spPr>
+        <p:txBody>
+          <a:bodyPr wrap="square" lIns="0" tIns="0" rIns="0" bIns="0" rtlCol="0" anchor="ctr"/>
+          <a:lstStyle/>
+          <a:p>
+            <a:pPr algn="r" indent="0" marL="0">
+              <a:buNone/>
+            </a:pPr>
+            <a:r>
+              <a:rPr lang="en-US" sz="950" dirty="0">
+                <a:solidFill>
+                  <a:srgbClr val="B3A9A5"/>
+                </a:solidFill>
+                <a:latin typeface="맑은 고딕" pitchFamily="34" charset="0"/>
+                <a:ea typeface="맑은 고딕" pitchFamily="34" charset="-122"/>
+                <a:cs typeface="맑은 고딕" pitchFamily="34" charset="-120"/>
+              </a:rPr>
+              <a:t>다음 단계 · 일정</a:t>
+            </a:r>
+            <a:endParaRPr lang="en-US" sz="950" dirty="0"/>
+          </a:p>
+        </p:txBody>
+      </p:sp>
+      <p:sp>
+        <p:nvSpPr>
+          <p:cNvPr id="53" name="Shape 51"/>
+          <p:cNvSpPr/>
+          <p:nvPr/>
+        </p:nvSpPr>
+        <p:spPr>
+          <a:xfrm>
+            <a:off x="6291072" y="4919472"/>
+            <a:ext cx="5394960" cy="1700784"/>
           </a:xfrm>
           <a:prstGeom prst="roundRect">
             <a:avLst>
-              <a:gd name="adj" fmla="val 9677"/>
+              <a:gd name="adj" fmla="val 3226"/>
             </a:avLst>
           </a:prstGeom>
           <a:solidFill>
-            <a:srgbClr val="1F1A18"/>
+            <a:srgbClr val="FFFFFF"/>
           </a:solidFill>
           <a:ln w="12700">
             <a:solidFill>
@@ -7678,40 +9135,95 @@
       </p:sp>
       <p:sp>
         <p:nvSpPr>
-          <p:cNvPr id="46" name="Text 44"/>
-          <p:cNvSpPr/>
-          <p:nvPr/>
-        </p:nvSpPr>
-        <p:spPr>
-          <a:xfrm>
-            <a:off x="6565392" y="6144768"/>
-            <a:ext cx="4846320" cy="384048"/>
-          </a:xfrm>
-          <a:prstGeom prst="rect">
-            <a:avLst/>
-          </a:prstGeom>
-          <a:noFill/>
-          <a:ln/>
-        </p:spPr>
-        <p:txBody>
-          <a:bodyPr wrap="square" lIns="0" tIns="0" rIns="0" bIns="0" rtlCol="0" anchor="ctr"/>
-          <a:lstStyle/>
-          <a:p>
-            <a:pPr indent="0" marL="0">
-              <a:buNone/>
-            </a:pPr>
-            <a:r>
-              <a:rPr lang="en-US" sz="1150" b="1" dirty="0">
-                <a:solidFill>
-                  <a:srgbClr val="E8DFDB"/>
-                </a:solidFill>
-                <a:latin typeface="맑은 고딕" pitchFamily="34" charset="0"/>
-                <a:ea typeface="맑은 고딕" pitchFamily="34" charset="-122"/>
-                <a:cs typeface="맑은 고딕" pitchFamily="34" charset="-120"/>
-              </a:rPr>
-              <a:t>향후 계획 :  다음 단계에서 할 일을 한 줄로</a:t>
-            </a:r>
-            <a:endParaRPr lang="en-US" sz="1150" dirty="0"/>
+          <p:cNvPr id="54" name="Text 52"/>
+          <p:cNvSpPr/>
+          <p:nvPr/>
+        </p:nvSpPr>
+        <p:spPr>
+          <a:xfrm>
+            <a:off x="6611112" y="5138928"/>
+            <a:ext cx="4800600" cy="1280160"/>
+          </a:xfrm>
+          <a:prstGeom prst="rect">
+            <a:avLst/>
+          </a:prstGeom>
+          <a:noFill/>
+          <a:ln/>
+        </p:spPr>
+        <p:txBody>
+          <a:bodyPr wrap="square" lIns="0" tIns="0" rIns="0" bIns="0" rtlCol="0" anchor="ctr"/>
+          <a:lstStyle/>
+          <a:p>
+            <a:pPr marL="342900" indent="-342900">
+              <a:lnSpc>
+                <a:spcPts val="1500"/>
+              </a:lnSpc>
+              <a:spcAft>
+                <a:spcPts val="700"/>
+              </a:spcAft>
+              <a:buSzPct val="100000"/>
+              <a:buChar char="•"/>
+            </a:pPr>
+            <a:r>
+              <a:rPr lang="en-US" sz="1200" dirty="0">
+                <a:solidFill>
+                  <a:srgbClr val="B3A9A5"/>
+                </a:solidFill>
+                <a:latin typeface="맑은 고딕" pitchFamily="34" charset="0"/>
+                <a:ea typeface="맑은 고딕" pitchFamily="34" charset="-122"/>
+                <a:cs typeface="맑은 고딕" pitchFamily="34" charset="-120"/>
+              </a:rPr>
+              <a:t>다음 단계에서 할 일</a:t>
+            </a:r>
+            <a:endParaRPr lang="en-US" sz="1200" dirty="0"/>
+          </a:p>
+          <a:p>
+            <a:pPr marL="342900" indent="-342900">
+              <a:lnSpc>
+                <a:spcPts val="1500"/>
+              </a:lnSpc>
+              <a:spcAft>
+                <a:spcPts val="700"/>
+              </a:spcAft>
+              <a:buSzPct val="100000"/>
+              <a:buChar char="•"/>
+            </a:pPr>
+            <a:r>
+              <a:rPr lang="en-US" sz="1200" dirty="0">
+                <a:solidFill>
+                  <a:srgbClr val="B3A9A5"/>
+                </a:solidFill>
+                <a:latin typeface="맑은 고딕" pitchFamily="34" charset="0"/>
+                <a:ea typeface="맑은 고딕" pitchFamily="34" charset="-122"/>
+                <a:cs typeface="맑은 고딕" pitchFamily="34" charset="-120"/>
+              </a:rPr>
+              <a:t>목표 시점 (예: 26년 4분기)</a:t>
+            </a:r>
+            <a:endParaRPr lang="en-US" sz="1200" dirty="0"/>
+          </a:p>
+          <a:p>
+            <a:pPr marL="342900" indent="-342900">
+              <a:lnSpc>
+                <a:spcPts val="1500"/>
+              </a:lnSpc>
+              <a:spcAft>
+                <a:spcPts val="700"/>
+              </a:spcAft>
+              <a:buSzPct val="100000"/>
+              <a:buChar char="•"/>
+            </a:pPr>
+            <a:r>
+              <a:rPr lang="en-US" sz="1200" dirty="0">
+                <a:solidFill>
+                  <a:srgbClr val="B3A9A5"/>
+                </a:solidFill>
+                <a:latin typeface="맑은 고딕" pitchFamily="34" charset="0"/>
+                <a:ea typeface="맑은 고딕" pitchFamily="34" charset="-122"/>
+                <a:cs typeface="맑은 고딕" pitchFamily="34" charset="-120"/>
+              </a:rPr>
+              <a:t>필요한 지원 · 협조 사항</a:t>
+            </a:r>
+            <a:endParaRPr lang="en-US" sz="1200" dirty="0"/>
           </a:p>
         </p:txBody>
       </p:sp>
@@ -7775,8 +9287,8 @@
         </p:nvSpPr>
         <p:spPr>
           <a:xfrm>
-            <a:off x="411480" y="164592"/>
-            <a:ext cx="640080" cy="566928"/>
+            <a:off x="411480" y="182880"/>
+            <a:ext cx="640080" cy="548640"/>
           </a:xfrm>
           <a:prstGeom prst="rect">
             <a:avLst/>
@@ -7814,8 +9326,8 @@
         </p:nvSpPr>
         <p:spPr>
           <a:xfrm>
-            <a:off x="1051560" y="164592"/>
-            <a:ext cx="5120640" cy="566928"/>
+            <a:off x="1051560" y="182880"/>
+            <a:ext cx="6766560" cy="548640"/>
           </a:xfrm>
           <a:prstGeom prst="rect">
             <a:avLst/>
@@ -7833,66 +9345,105 @@
             <a:r>
               <a:rPr lang="en-US" sz="2300" b="1" dirty="0">
                 <a:solidFill>
+                  <a:srgbClr val="8E8480"/>
+                </a:solidFill>
+                <a:latin typeface="맑은 고딕" pitchFamily="34" charset="0"/>
+                <a:ea typeface="맑은 고딕" pitchFamily="34" charset="-122"/>
+                <a:cs typeface="맑은 고딕" pitchFamily="34" charset="-120"/>
+              </a:rPr>
+              <a:t>프로젝트명을 입력하세요</a:t>
+            </a:r>
+            <a:endParaRPr lang="en-US" sz="2300" dirty="0"/>
+          </a:p>
+        </p:txBody>
+      </p:sp>
+      <p:sp>
+        <p:nvSpPr>
+          <p:cNvPr id="5" name="Text 3"/>
+          <p:cNvSpPr/>
+          <p:nvPr/>
+        </p:nvSpPr>
+        <p:spPr>
+          <a:xfrm>
+            <a:off x="7955280" y="155448"/>
+            <a:ext cx="3840480" cy="292608"/>
+          </a:xfrm>
+          <a:prstGeom prst="rect">
+            <a:avLst/>
+          </a:prstGeom>
+          <a:noFill/>
+          <a:ln/>
+        </p:spPr>
+        <p:txBody>
+          <a:bodyPr wrap="square" lIns="0" tIns="0" rIns="0" bIns="0" rtlCol="0" anchor="ctr"/>
+          <a:lstStyle/>
+          <a:p>
+            <a:pPr algn="r" indent="0" marL="0">
+              <a:buNone/>
+            </a:pPr>
+            <a:r>
+              <a:rPr lang="en-US" sz="1200" dirty="0">
+                <a:solidFill>
+                  <a:srgbClr val="C9BFBB"/>
+                </a:solidFill>
+                <a:latin typeface="맑은 고딕" pitchFamily="34" charset="0"/>
+                <a:ea typeface="맑은 고딕" pitchFamily="34" charset="-122"/>
+                <a:cs typeface="맑은 고딕" pitchFamily="34" charset="-120"/>
+              </a:rPr>
+              <a:t>소속 : ○○팀</a:t>
+            </a:r>
+            <a:endParaRPr lang="en-US" sz="1200" dirty="0"/>
+          </a:p>
+        </p:txBody>
+      </p:sp>
+      <p:sp>
+        <p:nvSpPr>
+          <p:cNvPr id="6" name="Text 4"/>
+          <p:cNvSpPr/>
+          <p:nvPr/>
+        </p:nvSpPr>
+        <p:spPr>
+          <a:xfrm>
+            <a:off x="7955280" y="457200"/>
+            <a:ext cx="3840480" cy="292608"/>
+          </a:xfrm>
+          <a:prstGeom prst="rect">
+            <a:avLst/>
+          </a:prstGeom>
+          <a:noFill/>
+          <a:ln/>
+        </p:spPr>
+        <p:txBody>
+          <a:bodyPr wrap="square" lIns="0" tIns="0" rIns="0" bIns="0" rtlCol="0" anchor="ctr"/>
+          <a:lstStyle/>
+          <a:p>
+            <a:pPr algn="r" indent="0" marL="0">
+              <a:buNone/>
+            </a:pPr>
+            <a:r>
+              <a:rPr lang="en-US" sz="1200" b="1" dirty="0">
+                <a:solidFill>
                   <a:srgbClr val="FFFFFF"/>
                 </a:solidFill>
                 <a:latin typeface="맑은 고딕" pitchFamily="34" charset="0"/>
                 <a:ea typeface="맑은 고딕" pitchFamily="34" charset="-122"/>
                 <a:cs typeface="맑은 고딕" pitchFamily="34" charset="-120"/>
               </a:rPr>
-              <a:t>프로젝트 ⑤</a:t>
-            </a:r>
-            <a:endParaRPr lang="en-US" sz="2300" dirty="0"/>
-          </a:p>
-        </p:txBody>
-      </p:sp>
-      <p:sp>
-        <p:nvSpPr>
-          <p:cNvPr id="5" name="Text 3"/>
-          <p:cNvSpPr/>
-          <p:nvPr/>
-        </p:nvSpPr>
-        <p:spPr>
-          <a:xfrm>
-            <a:off x="6263640" y="164592"/>
-            <a:ext cx="5532120" cy="566928"/>
-          </a:xfrm>
-          <a:prstGeom prst="rect">
-            <a:avLst/>
-          </a:prstGeom>
-          <a:noFill/>
-          <a:ln/>
-        </p:spPr>
-        <p:txBody>
-          <a:bodyPr wrap="square" lIns="0" tIns="0" rIns="0" bIns="0" rtlCol="0" anchor="ctr"/>
-          <a:lstStyle/>
-          <a:p>
-            <a:pPr algn="r" indent="0" marL="0">
-              <a:buNone/>
-            </a:pPr>
-            <a:r>
-              <a:rPr lang="en-US" sz="1250" dirty="0">
-                <a:solidFill>
-                  <a:srgbClr val="C9BFBB"/>
-                </a:solidFill>
-                <a:latin typeface="맑은 고딕" pitchFamily="34" charset="0"/>
-                <a:ea typeface="맑은 고딕" pitchFamily="34" charset="-122"/>
-                <a:cs typeface="맑은 고딕" pitchFamily="34" charset="-120"/>
-              </a:rPr>
-              <a:t>프로젝트명을 입력하세요</a:t>
-            </a:r>
-            <a:endParaRPr lang="en-US" sz="1250" dirty="0"/>
-          </a:p>
-        </p:txBody>
-      </p:sp>
-      <p:sp>
-        <p:nvSpPr>
-          <p:cNvPr id="6" name="Shape 4"/>
-          <p:cNvSpPr/>
-          <p:nvPr/>
-        </p:nvSpPr>
-        <p:spPr>
-          <a:xfrm>
-            <a:off x="502920" y="1161288"/>
+              <a:t>담당자 : 홍길동</a:t>
+            </a:r>
+            <a:endParaRPr lang="en-US" sz="1200" dirty="0"/>
+          </a:p>
+        </p:txBody>
+      </p:sp>
+      <p:sp>
+        <p:nvSpPr>
+          <p:cNvPr id="7" name="Shape 5"/>
+          <p:cNvSpPr/>
+          <p:nvPr/>
+        </p:nvSpPr>
+        <p:spPr>
+          <a:xfrm>
+            <a:off x="502920" y="1124712"/>
             <a:ext cx="237744" cy="237744"/>
           </a:xfrm>
           <a:prstGeom prst="ellipse">
@@ -7906,14 +9457,14 @@
       </p:sp>
       <p:sp>
         <p:nvSpPr>
-          <p:cNvPr id="7" name="Text 5"/>
-          <p:cNvSpPr/>
-          <p:nvPr/>
-        </p:nvSpPr>
-        <p:spPr>
-          <a:xfrm>
-            <a:off x="868680" y="1115568"/>
-            <a:ext cx="4023360" cy="329184"/>
+          <p:cNvPr id="8" name="Text 6"/>
+          <p:cNvSpPr/>
+          <p:nvPr/>
+        </p:nvSpPr>
+        <p:spPr>
+          <a:xfrm>
+            <a:off x="868680" y="1078992"/>
+            <a:ext cx="2377440" cy="310896"/>
           </a:xfrm>
           <a:prstGeom prst="rect">
             <a:avLst/>
@@ -7945,18 +9496,18 @@
       </p:sp>
       <p:sp>
         <p:nvSpPr>
-          <p:cNvPr id="8" name="Shape 6"/>
-          <p:cNvSpPr/>
-          <p:nvPr/>
-        </p:nvSpPr>
-        <p:spPr>
-          <a:xfrm>
-            <a:off x="502920" y="1536192"/>
-            <a:ext cx="5394960" cy="1783080"/>
+          <p:cNvPr id="9" name="Shape 7"/>
+          <p:cNvSpPr/>
+          <p:nvPr/>
+        </p:nvSpPr>
+        <p:spPr>
+          <a:xfrm>
+            <a:off x="502920" y="1463040"/>
+            <a:ext cx="5394960" cy="1481328"/>
           </a:xfrm>
           <a:prstGeom prst="roundRect">
             <a:avLst>
-              <a:gd name="adj" fmla="val 3077"/>
+              <a:gd name="adj" fmla="val 3704"/>
             </a:avLst>
           </a:prstGeom>
           <a:solidFill>
@@ -7979,14 +9530,14 @@
       </p:sp>
       <p:sp>
         <p:nvSpPr>
-          <p:cNvPr id="9" name="Text 7"/>
-          <p:cNvSpPr/>
-          <p:nvPr/>
-        </p:nvSpPr>
-        <p:spPr>
-          <a:xfrm>
-            <a:off x="822960" y="1783080"/>
-            <a:ext cx="4754880" cy="1325880"/>
+          <p:cNvPr id="10" name="Text 8"/>
+          <p:cNvSpPr/>
+          <p:nvPr/>
+        </p:nvSpPr>
+        <p:spPr>
+          <a:xfrm>
+            <a:off x="822960" y="1682496"/>
+            <a:ext cx="4800600" cy="1097280"/>
           </a:xfrm>
           <a:prstGeom prst="rect">
             <a:avLst/>
@@ -8000,16 +9551,16 @@
           <a:p>
             <a:pPr marL="342900" indent="-342900">
               <a:lnSpc>
-                <a:spcPts val="1600"/>
+                <a:spcPts val="1500"/>
               </a:lnSpc>
               <a:spcAft>
-                <a:spcPts val="800"/>
+                <a:spcPts val="700"/>
               </a:spcAft>
               <a:buSzPct val="100000"/>
               <a:buChar char="•"/>
             </a:pPr>
             <a:r>
-              <a:rPr lang="en-US" sz="1250" dirty="0">
+              <a:rPr lang="en-US" sz="1200" dirty="0">
                 <a:solidFill>
                   <a:srgbClr val="B3A9A5"/>
                 </a:solidFill>
@@ -8017,23 +9568,23 @@
                 <a:ea typeface="맑은 고딕" pitchFamily="34" charset="-122"/>
                 <a:cs typeface="맑은 고딕" pitchFamily="34" charset="-120"/>
               </a:rPr>
-              <a:t>해결하려는 문제를 한 줄로 적으세요</a:t>
-            </a:r>
-            <a:endParaRPr lang="en-US" sz="1250" dirty="0"/>
+              <a:t>해결하려는 문제를 한 줄로</a:t>
+            </a:r>
+            <a:endParaRPr lang="en-US" sz="1200" dirty="0"/>
           </a:p>
           <a:p>
             <a:pPr marL="342900" indent="-342900">
               <a:lnSpc>
-                <a:spcPts val="1600"/>
+                <a:spcPts val="1500"/>
               </a:lnSpc>
               <a:spcAft>
-                <a:spcPts val="800"/>
+                <a:spcPts val="700"/>
               </a:spcAft>
               <a:buSzPct val="100000"/>
               <a:buChar char="•"/>
             </a:pPr>
             <a:r>
-              <a:rPr lang="en-US" sz="1250" dirty="0">
+              <a:rPr lang="en-US" sz="1200" dirty="0">
                 <a:solidFill>
                   <a:srgbClr val="B3A9A5"/>
                 </a:solidFill>
@@ -8041,23 +9592,23 @@
                 <a:ea typeface="맑은 고딕" pitchFamily="34" charset="-122"/>
                 <a:cs typeface="맑은 고딕" pitchFamily="34" charset="-120"/>
               </a:rPr>
-              <a:t>기대 효과(시간 절감·정확도·비용 등)</a:t>
-            </a:r>
-            <a:endParaRPr lang="en-US" sz="1250" dirty="0"/>
+              <a:t>기대 효과 (시간 절감 · 정확도 · 비용 등)</a:t>
+            </a:r>
+            <a:endParaRPr lang="en-US" sz="1200" dirty="0"/>
           </a:p>
           <a:p>
             <a:pPr marL="342900" indent="-342900">
               <a:lnSpc>
-                <a:spcPts val="1600"/>
+                <a:spcPts val="1500"/>
               </a:lnSpc>
               <a:spcAft>
-                <a:spcPts val="800"/>
+                <a:spcPts val="700"/>
               </a:spcAft>
               <a:buSzPct val="100000"/>
               <a:buChar char="•"/>
             </a:pPr>
             <a:r>
-              <a:rPr lang="en-US" sz="1250" dirty="0">
+              <a:rPr lang="en-US" sz="1200" dirty="0">
                 <a:solidFill>
                   <a:srgbClr val="B3A9A5"/>
                 </a:solidFill>
@@ -8067,19 +9618,19 @@
               </a:rPr>
               <a:t>적용 대상 설비 또는 업무 범위</a:t>
             </a:r>
-            <a:endParaRPr lang="en-US" sz="1250" dirty="0"/>
-          </a:p>
-        </p:txBody>
-      </p:sp>
-      <p:sp>
-        <p:nvSpPr>
-          <p:cNvPr id="10" name="Shape 8"/>
-          <p:cNvSpPr/>
-          <p:nvPr/>
-        </p:nvSpPr>
-        <p:spPr>
-          <a:xfrm>
-            <a:off x="502920" y="3538728"/>
+            <a:endParaRPr lang="en-US" sz="1200" dirty="0"/>
+          </a:p>
+        </p:txBody>
+      </p:sp>
+      <p:sp>
+        <p:nvSpPr>
+          <p:cNvPr id="11" name="Shape 9"/>
+          <p:cNvSpPr/>
+          <p:nvPr/>
+        </p:nvSpPr>
+        <p:spPr>
+          <a:xfrm>
+            <a:off x="502920" y="3154680"/>
             <a:ext cx="237744" cy="237744"/>
           </a:xfrm>
           <a:prstGeom prst="ellipse">
@@ -8093,14 +9644,14 @@
       </p:sp>
       <p:sp>
         <p:nvSpPr>
-          <p:cNvPr id="11" name="Text 9"/>
-          <p:cNvSpPr/>
-          <p:nvPr/>
-        </p:nvSpPr>
-        <p:spPr>
-          <a:xfrm>
-            <a:off x="868680" y="3493008"/>
-            <a:ext cx="4023360" cy="329184"/>
+          <p:cNvPr id="12" name="Text 10"/>
+          <p:cNvSpPr/>
+          <p:nvPr/>
+        </p:nvSpPr>
+        <p:spPr>
+          <a:xfrm>
+            <a:off x="868680" y="3108960"/>
+            <a:ext cx="2377440" cy="310896"/>
           </a:xfrm>
           <a:prstGeom prst="rect">
             <a:avLst/>
@@ -8132,13 +9683,52 @@
       </p:sp>
       <p:sp>
         <p:nvSpPr>
-          <p:cNvPr id="12" name="Shape 10"/>
-          <p:cNvSpPr/>
-          <p:nvPr/>
-        </p:nvSpPr>
-        <p:spPr>
-          <a:xfrm>
-            <a:off x="960120" y="4572000"/>
+          <p:cNvPr id="13" name="Text 11"/>
+          <p:cNvSpPr/>
+          <p:nvPr/>
+        </p:nvSpPr>
+        <p:spPr>
+          <a:xfrm>
+            <a:off x="3291840" y="3108960"/>
+            <a:ext cx="2606040" cy="310896"/>
+          </a:xfrm>
+          <a:prstGeom prst="rect">
+            <a:avLst/>
+          </a:prstGeom>
+          <a:noFill/>
+          <a:ln/>
+        </p:spPr>
+        <p:txBody>
+          <a:bodyPr wrap="square" lIns="0" tIns="0" rIns="0" bIns="0" rtlCol="0" anchor="ctr"/>
+          <a:lstStyle/>
+          <a:p>
+            <a:pPr algn="r" indent="0" marL="0">
+              <a:buNone/>
+            </a:pPr>
+            <a:r>
+              <a:rPr lang="en-US" sz="950" dirty="0">
+                <a:solidFill>
+                  <a:srgbClr val="B3A9A5"/>
+                </a:solidFill>
+                <a:latin typeface="맑은 고딕" pitchFamily="34" charset="0"/>
+                <a:ea typeface="맑은 고딕" pitchFamily="34" charset="-122"/>
+                <a:cs typeface="맑은 고딕" pitchFamily="34" charset="-120"/>
+              </a:rPr>
+              <a:t>단계명·색은 수정 가능</a:t>
+            </a:r>
+            <a:endParaRPr lang="en-US" sz="950" dirty="0"/>
+          </a:p>
+        </p:txBody>
+      </p:sp>
+      <p:sp>
+        <p:nvSpPr>
+          <p:cNvPr id="14" name="Shape 12"/>
+          <p:cNvSpPr/>
+          <p:nvPr/>
+        </p:nvSpPr>
+        <p:spPr>
+          <a:xfrm>
+            <a:off x="960120" y="3950208"/>
             <a:ext cx="4443984" cy="0"/>
           </a:xfrm>
           <a:prstGeom prst="line">
@@ -8155,13 +9745,13 @@
       </p:sp>
       <p:sp>
         <p:nvSpPr>
-          <p:cNvPr id="13" name="Shape 11"/>
-          <p:cNvSpPr/>
-          <p:nvPr/>
-        </p:nvSpPr>
-        <p:spPr>
-          <a:xfrm>
-            <a:off x="960120" y="4572000"/>
+          <p:cNvPr id="15" name="Shape 13"/>
+          <p:cNvSpPr/>
+          <p:nvPr/>
+        </p:nvSpPr>
+        <p:spPr>
+          <a:xfrm>
+            <a:off x="960120" y="3950208"/>
             <a:ext cx="1481328" cy="0"/>
           </a:xfrm>
           <a:prstGeom prst="line">
@@ -8178,13 +9768,13 @@
       </p:sp>
       <p:sp>
         <p:nvSpPr>
-          <p:cNvPr id="14" name="Shape 12"/>
-          <p:cNvSpPr/>
-          <p:nvPr/>
-        </p:nvSpPr>
-        <p:spPr>
-          <a:xfrm>
-            <a:off x="822960" y="4434840"/>
+          <p:cNvPr id="16" name="Shape 14"/>
+          <p:cNvSpPr/>
+          <p:nvPr/>
+        </p:nvSpPr>
+        <p:spPr>
+          <a:xfrm>
+            <a:off x="822960" y="3813048"/>
             <a:ext cx="274320" cy="274320"/>
           </a:xfrm>
           <a:prstGeom prst="ellipse">
@@ -8203,13 +9793,13 @@
       </p:sp>
       <p:sp>
         <p:nvSpPr>
-          <p:cNvPr id="15" name="Text 13"/>
-          <p:cNvSpPr/>
-          <p:nvPr/>
-        </p:nvSpPr>
-        <p:spPr>
-          <a:xfrm>
-            <a:off x="411480" y="4041648"/>
+          <p:cNvPr id="17" name="Text 15"/>
+          <p:cNvSpPr/>
+          <p:nvPr/>
+        </p:nvSpPr>
+        <p:spPr>
+          <a:xfrm>
+            <a:off x="411480" y="3438144"/>
             <a:ext cx="1097280" cy="219456"/>
           </a:xfrm>
           <a:prstGeom prst="rect">
@@ -8242,13 +9832,13 @@
       </p:sp>
       <p:sp>
         <p:nvSpPr>
-          <p:cNvPr id="16" name="Text 14"/>
-          <p:cNvSpPr/>
-          <p:nvPr/>
-        </p:nvSpPr>
-        <p:spPr>
-          <a:xfrm>
-            <a:off x="320040" y="4773168"/>
+          <p:cNvPr id="18" name="Text 16"/>
+          <p:cNvSpPr/>
+          <p:nvPr/>
+        </p:nvSpPr>
+        <p:spPr>
+          <a:xfrm>
+            <a:off x="320040" y="4151376"/>
             <a:ext cx="1280160" cy="256032"/>
           </a:xfrm>
           <a:prstGeom prst="rect">
@@ -8281,13 +9871,13 @@
       </p:sp>
       <p:sp>
         <p:nvSpPr>
-          <p:cNvPr id="17" name="Shape 15"/>
-          <p:cNvSpPr/>
-          <p:nvPr/>
-        </p:nvSpPr>
-        <p:spPr>
-          <a:xfrm>
-            <a:off x="2304288" y="4434840"/>
+          <p:cNvPr id="19" name="Shape 17"/>
+          <p:cNvSpPr/>
+          <p:nvPr/>
+        </p:nvSpPr>
+        <p:spPr>
+          <a:xfrm>
+            <a:off x="2304288" y="3813048"/>
             <a:ext cx="274320" cy="274320"/>
           </a:xfrm>
           <a:prstGeom prst="ellipse">
@@ -8306,13 +9896,13 @@
       </p:sp>
       <p:sp>
         <p:nvSpPr>
-          <p:cNvPr id="18" name="Text 16"/>
-          <p:cNvSpPr/>
-          <p:nvPr/>
-        </p:nvSpPr>
-        <p:spPr>
-          <a:xfrm>
-            <a:off x="1892808" y="4041648"/>
+          <p:cNvPr id="20" name="Text 18"/>
+          <p:cNvSpPr/>
+          <p:nvPr/>
+        </p:nvSpPr>
+        <p:spPr>
+          <a:xfrm>
+            <a:off x="1892808" y="3438144"/>
             <a:ext cx="1097280" cy="219456"/>
           </a:xfrm>
           <a:prstGeom prst="rect">
@@ -8345,13 +9935,13 @@
       </p:sp>
       <p:sp>
         <p:nvSpPr>
-          <p:cNvPr id="19" name="Text 17"/>
-          <p:cNvSpPr/>
-          <p:nvPr/>
-        </p:nvSpPr>
-        <p:spPr>
-          <a:xfrm>
-            <a:off x="1801368" y="4773168"/>
+          <p:cNvPr id="21" name="Text 19"/>
+          <p:cNvSpPr/>
+          <p:nvPr/>
+        </p:nvSpPr>
+        <p:spPr>
+          <a:xfrm>
+            <a:off x="1801368" y="4151376"/>
             <a:ext cx="1280160" cy="256032"/>
           </a:xfrm>
           <a:prstGeom prst="rect">
@@ -8384,13 +9974,13 @@
       </p:sp>
       <p:sp>
         <p:nvSpPr>
-          <p:cNvPr id="20" name="Shape 18"/>
-          <p:cNvSpPr/>
-          <p:nvPr/>
-        </p:nvSpPr>
-        <p:spPr>
-          <a:xfrm>
-            <a:off x="3785616" y="4434840"/>
+          <p:cNvPr id="22" name="Shape 20"/>
+          <p:cNvSpPr/>
+          <p:nvPr/>
+        </p:nvSpPr>
+        <p:spPr>
+          <a:xfrm>
+            <a:off x="3785616" y="3813048"/>
             <a:ext cx="274320" cy="274320"/>
           </a:xfrm>
           <a:prstGeom prst="ellipse">
@@ -8409,13 +9999,13 @@
       </p:sp>
       <p:sp>
         <p:nvSpPr>
-          <p:cNvPr id="21" name="Text 19"/>
-          <p:cNvSpPr/>
-          <p:nvPr/>
-        </p:nvSpPr>
-        <p:spPr>
-          <a:xfrm>
-            <a:off x="3374136" y="4041648"/>
+          <p:cNvPr id="23" name="Text 21"/>
+          <p:cNvSpPr/>
+          <p:nvPr/>
+        </p:nvSpPr>
+        <p:spPr>
+          <a:xfrm>
+            <a:off x="3374136" y="3438144"/>
             <a:ext cx="1097280" cy="219456"/>
           </a:xfrm>
           <a:prstGeom prst="rect">
@@ -8448,13 +10038,13 @@
       </p:sp>
       <p:sp>
         <p:nvSpPr>
-          <p:cNvPr id="22" name="Text 20"/>
-          <p:cNvSpPr/>
-          <p:nvPr/>
-        </p:nvSpPr>
-        <p:spPr>
-          <a:xfrm>
-            <a:off x="3282696" y="4773168"/>
+          <p:cNvPr id="24" name="Text 22"/>
+          <p:cNvSpPr/>
+          <p:nvPr/>
+        </p:nvSpPr>
+        <p:spPr>
+          <a:xfrm>
+            <a:off x="3282696" y="4151376"/>
             <a:ext cx="1280160" cy="256032"/>
           </a:xfrm>
           <a:prstGeom prst="rect">
@@ -8487,13 +10077,13 @@
       </p:sp>
       <p:sp>
         <p:nvSpPr>
-          <p:cNvPr id="23" name="Shape 21"/>
-          <p:cNvSpPr/>
-          <p:nvPr/>
-        </p:nvSpPr>
-        <p:spPr>
-          <a:xfrm>
-            <a:off x="5266944" y="4434840"/>
+          <p:cNvPr id="25" name="Shape 23"/>
+          <p:cNvSpPr/>
+          <p:nvPr/>
+        </p:nvSpPr>
+        <p:spPr>
+          <a:xfrm>
+            <a:off x="5266944" y="3813048"/>
             <a:ext cx="274320" cy="274320"/>
           </a:xfrm>
           <a:prstGeom prst="ellipse">
@@ -8512,13 +10102,13 @@
       </p:sp>
       <p:sp>
         <p:nvSpPr>
-          <p:cNvPr id="24" name="Text 22"/>
-          <p:cNvSpPr/>
-          <p:nvPr/>
-        </p:nvSpPr>
-        <p:spPr>
-          <a:xfrm>
-            <a:off x="4855464" y="4041648"/>
+          <p:cNvPr id="26" name="Text 24"/>
+          <p:cNvSpPr/>
+          <p:nvPr/>
+        </p:nvSpPr>
+        <p:spPr>
+          <a:xfrm>
+            <a:off x="4855464" y="3438144"/>
             <a:ext cx="1097280" cy="219456"/>
           </a:xfrm>
           <a:prstGeom prst="rect">
@@ -8551,13 +10141,13 @@
       </p:sp>
       <p:sp>
         <p:nvSpPr>
-          <p:cNvPr id="25" name="Text 23"/>
-          <p:cNvSpPr/>
-          <p:nvPr/>
-        </p:nvSpPr>
-        <p:spPr>
-          <a:xfrm>
-            <a:off x="4764024" y="4773168"/>
+          <p:cNvPr id="27" name="Text 25"/>
+          <p:cNvSpPr/>
+          <p:nvPr/>
+        </p:nvSpPr>
+        <p:spPr>
+          <a:xfrm>
+            <a:off x="4764024" y="4151376"/>
             <a:ext cx="1280160" cy="256032"/>
           </a:xfrm>
           <a:prstGeom prst="rect">
@@ -8590,14 +10180,34 @@
       </p:sp>
       <p:sp>
         <p:nvSpPr>
-          <p:cNvPr id="26" name="Text 24"/>
-          <p:cNvSpPr/>
-          <p:nvPr/>
-        </p:nvSpPr>
-        <p:spPr>
-          <a:xfrm>
-            <a:off x="502920" y="5084064"/>
-            <a:ext cx="5394960" cy="237744"/>
+          <p:cNvPr id="28" name="Shape 26"/>
+          <p:cNvSpPr/>
+          <p:nvPr/>
+        </p:nvSpPr>
+        <p:spPr>
+          <a:xfrm>
+            <a:off x="502920" y="4800600"/>
+            <a:ext cx="237744" cy="237744"/>
+          </a:xfrm>
+          <a:prstGeom prst="ellipse">
+            <a:avLst/>
+          </a:prstGeom>
+          <a:solidFill>
+            <a:srgbClr val="8A7F7A"/>
+          </a:solidFill>
+          <a:ln/>
+        </p:spPr>
+      </p:sp>
+      <p:sp>
+        <p:nvSpPr>
+          <p:cNvPr id="29" name="Text 27"/>
+          <p:cNvSpPr/>
+          <p:nvPr/>
+        </p:nvSpPr>
+        <p:spPr>
+          <a:xfrm>
+            <a:off x="868680" y="4754880"/>
+            <a:ext cx="2377440" cy="310896"/>
           </a:xfrm>
           <a:prstGeom prst="rect">
             <a:avLst/>
@@ -8613,6 +10223,45 @@
               <a:buNone/>
             </a:pPr>
             <a:r>
+              <a:rPr lang="en-US" sz="1350" b="1" dirty="0">
+                <a:solidFill>
+                  <a:srgbClr val="1F1A18"/>
+                </a:solidFill>
+                <a:latin typeface="맑은 고딕" pitchFamily="34" charset="0"/>
+                <a:ea typeface="맑은 고딕" pitchFamily="34" charset="-122"/>
+                <a:cs typeface="맑은 고딕" pitchFamily="34" charset="-120"/>
+              </a:rPr>
+              <a:t>핵심 지표</a:t>
+            </a:r>
+            <a:endParaRPr lang="en-US" sz="1350" dirty="0"/>
+          </a:p>
+        </p:txBody>
+      </p:sp>
+      <p:sp>
+        <p:nvSpPr>
+          <p:cNvPr id="30" name="Text 28"/>
+          <p:cNvSpPr/>
+          <p:nvPr/>
+        </p:nvSpPr>
+        <p:spPr>
+          <a:xfrm>
+            <a:off x="3291840" y="4754880"/>
+            <a:ext cx="2606040" cy="310896"/>
+          </a:xfrm>
+          <a:prstGeom prst="rect">
+            <a:avLst/>
+          </a:prstGeom>
+          <a:noFill/>
+          <a:ln/>
+        </p:spPr>
+        <p:txBody>
+          <a:bodyPr wrap="square" lIns="0" tIns="0" rIns="0" bIns="0" rtlCol="0" anchor="ctr"/>
+          <a:lstStyle/>
+          <a:p>
+            <a:pPr algn="r" indent="0" marL="0">
+              <a:buNone/>
+            </a:pPr>
+            <a:r>
               <a:rPr lang="en-US" sz="950" dirty="0">
                 <a:solidFill>
                   <a:srgbClr val="B3A9A5"/>
@@ -8621,7 +10270,7 @@
                 <a:ea typeface="맑은 고딕" pitchFamily="34" charset="-122"/>
                 <a:cs typeface="맑은 고딕" pitchFamily="34" charset="-120"/>
               </a:rPr>
-              <a:t>※ 단계명·완료 표시는 프로젝트에 맞게 수정</a:t>
+              <a:t>정량 수치가 있으면 기입</a:t>
             </a:r>
             <a:endParaRPr lang="en-US" sz="950" dirty="0"/>
           </a:p>
@@ -8629,18 +10278,18 @@
       </p:sp>
       <p:sp>
         <p:nvSpPr>
-          <p:cNvPr id="27" name="Shape 25"/>
-          <p:cNvSpPr/>
-          <p:nvPr/>
-        </p:nvSpPr>
-        <p:spPr>
-          <a:xfrm>
-            <a:off x="502920" y="5358384"/>
-            <a:ext cx="5394960" cy="1261872"/>
+          <p:cNvPr id="31" name="Shape 29"/>
+          <p:cNvSpPr/>
+          <p:nvPr/>
+        </p:nvSpPr>
+        <p:spPr>
+          <a:xfrm>
+            <a:off x="502920" y="5138928"/>
+            <a:ext cx="5394960" cy="1481328"/>
           </a:xfrm>
           <a:prstGeom prst="roundRect">
             <a:avLst>
-              <a:gd name="adj" fmla="val 4348"/>
+              <a:gd name="adj" fmla="val 3704"/>
             </a:avLst>
           </a:prstGeom>
           <a:solidFill>
@@ -8663,14 +10312,14 @@
       </p:sp>
       <p:sp>
         <p:nvSpPr>
-          <p:cNvPr id="28" name="Text 26"/>
-          <p:cNvSpPr/>
-          <p:nvPr/>
-        </p:nvSpPr>
-        <p:spPr>
-          <a:xfrm>
-            <a:off x="822960" y="5504688"/>
-            <a:ext cx="4754880" cy="237744"/>
+          <p:cNvPr id="32" name="Text 30"/>
+          <p:cNvSpPr/>
+          <p:nvPr/>
+        </p:nvSpPr>
+        <p:spPr>
+          <a:xfrm>
+            <a:off x="822960" y="5321808"/>
+            <a:ext cx="1572768" cy="219456"/>
           </a:xfrm>
           <a:prstGeom prst="rect">
             <a:avLst/>
@@ -8686,30 +10335,30 @@
               <a:buNone/>
             </a:pPr>
             <a:r>
-              <a:rPr lang="en-US" sz="1150" b="1" dirty="0">
-                <a:solidFill>
-                  <a:srgbClr val="EA002C"/>
-                </a:solidFill>
-                <a:latin typeface="맑은 고딕" pitchFamily="34" charset="0"/>
-                <a:ea typeface="맑은 고딕" pitchFamily="34" charset="-122"/>
-                <a:cs typeface="맑은 고딕" pitchFamily="34" charset="-120"/>
-              </a:rPr>
-              <a:t>주요 성과 · 수치</a:t>
-            </a:r>
-            <a:endParaRPr lang="en-US" sz="1150" dirty="0"/>
-          </a:p>
-        </p:txBody>
-      </p:sp>
-      <p:sp>
-        <p:nvSpPr>
-          <p:cNvPr id="29" name="Text 27"/>
-          <p:cNvSpPr/>
-          <p:nvPr/>
-        </p:nvSpPr>
-        <p:spPr>
-          <a:xfrm>
-            <a:off x="822960" y="5833872"/>
-            <a:ext cx="1463040" cy="201168"/>
+              <a:rPr lang="en-US" sz="950" dirty="0">
+                <a:solidFill>
+                  <a:srgbClr val="B3A9A5"/>
+                </a:solidFill>
+                <a:latin typeface="맑은 고딕" pitchFamily="34" charset="0"/>
+                <a:ea typeface="맑은 고딕" pitchFamily="34" charset="-122"/>
+                <a:cs typeface="맑은 고딕" pitchFamily="34" charset="-120"/>
+              </a:rPr>
+              <a:t>예) 작업시간</a:t>
+            </a:r>
+            <a:endParaRPr lang="en-US" sz="950" dirty="0"/>
+          </a:p>
+        </p:txBody>
+      </p:sp>
+      <p:sp>
+        <p:nvSpPr>
+          <p:cNvPr id="33" name="Text 31"/>
+          <p:cNvSpPr/>
+          <p:nvPr/>
+        </p:nvSpPr>
+        <p:spPr>
+          <a:xfrm>
+            <a:off x="822960" y="5541264"/>
+            <a:ext cx="1572768" cy="329184"/>
           </a:xfrm>
           <a:prstGeom prst="rect">
             <a:avLst/>
@@ -8725,6 +10374,45 @@
               <a:buNone/>
             </a:pPr>
             <a:r>
+              <a:rPr lang="en-US" sz="1500" b="1" dirty="0">
+                <a:solidFill>
+                  <a:srgbClr val="1F1A18"/>
+                </a:solidFill>
+                <a:latin typeface="맑은 고딕" pitchFamily="34" charset="0"/>
+                <a:ea typeface="맑은 고딕" pitchFamily="34" charset="-122"/>
+                <a:cs typeface="맑은 고딕" pitchFamily="34" charset="-120"/>
+              </a:rPr>
+              <a:t>3h → 10분</a:t>
+            </a:r>
+            <a:endParaRPr lang="en-US" sz="1500" dirty="0"/>
+          </a:p>
+        </p:txBody>
+      </p:sp>
+      <p:sp>
+        <p:nvSpPr>
+          <p:cNvPr id="34" name="Text 32"/>
+          <p:cNvSpPr/>
+          <p:nvPr/>
+        </p:nvSpPr>
+        <p:spPr>
+          <a:xfrm>
+            <a:off x="2496312" y="5321808"/>
+            <a:ext cx="1572768" cy="219456"/>
+          </a:xfrm>
+          <a:prstGeom prst="rect">
+            <a:avLst/>
+          </a:prstGeom>
+          <a:noFill/>
+          <a:ln/>
+        </p:spPr>
+        <p:txBody>
+          <a:bodyPr wrap="square" lIns="0" tIns="0" rIns="0" bIns="0" rtlCol="0" anchor="ctr"/>
+          <a:lstStyle/>
+          <a:p>
+            <a:pPr indent="0" marL="0">
+              <a:buNone/>
+            </a:pPr>
+            <a:r>
               <a:rPr lang="en-US" sz="950" dirty="0">
                 <a:solidFill>
                   <a:srgbClr val="B3A9A5"/>
@@ -8733,7 +10421,7 @@
                 <a:ea typeface="맑은 고딕" pitchFamily="34" charset="-122"/>
                 <a:cs typeface="맑은 고딕" pitchFamily="34" charset="-120"/>
               </a:rPr>
-              <a:t>항목</a:t>
+              <a:t>예) 오류 건수</a:t>
             </a:r>
             <a:endParaRPr lang="en-US" sz="950" dirty="0"/>
           </a:p>
@@ -8741,14 +10429,14 @@
       </p:sp>
       <p:sp>
         <p:nvSpPr>
-          <p:cNvPr id="30" name="Text 28"/>
-          <p:cNvSpPr/>
-          <p:nvPr/>
-        </p:nvSpPr>
-        <p:spPr>
-          <a:xfrm>
-            <a:off x="822960" y="6035040"/>
-            <a:ext cx="1463040" cy="384048"/>
+          <p:cNvPr id="35" name="Text 33"/>
+          <p:cNvSpPr/>
+          <p:nvPr/>
+        </p:nvSpPr>
+        <p:spPr>
+          <a:xfrm>
+            <a:off x="2496312" y="5541264"/>
+            <a:ext cx="1572768" cy="329184"/>
           </a:xfrm>
           <a:prstGeom prst="rect">
             <a:avLst/>
@@ -8764,7 +10452,7 @@
               <a:buNone/>
             </a:pPr>
             <a:r>
-              <a:rPr lang="en-US" sz="2000" b="1" dirty="0">
+              <a:rPr lang="en-US" sz="1500" b="1" dirty="0">
                 <a:solidFill>
                   <a:srgbClr val="1F1A18"/>
                 </a:solidFill>
@@ -8772,22 +10460,22 @@
                 <a:ea typeface="맑은 고딕" pitchFamily="34" charset="-122"/>
                 <a:cs typeface="맑은 고딕" pitchFamily="34" charset="-120"/>
               </a:rPr>
-              <a:t>00</a:t>
-            </a:r>
-            <a:endParaRPr lang="en-US" sz="2000" dirty="0"/>
-          </a:p>
-        </p:txBody>
-      </p:sp>
-      <p:sp>
-        <p:nvSpPr>
-          <p:cNvPr id="31" name="Text 29"/>
-          <p:cNvSpPr/>
-          <p:nvPr/>
-        </p:nvSpPr>
-        <p:spPr>
-          <a:xfrm>
-            <a:off x="2450592" y="5833872"/>
-            <a:ext cx="1463040" cy="201168"/>
+              <a:t>월 5건 → 0</a:t>
+            </a:r>
+            <a:endParaRPr lang="en-US" sz="1500" dirty="0"/>
+          </a:p>
+        </p:txBody>
+      </p:sp>
+      <p:sp>
+        <p:nvSpPr>
+          <p:cNvPr id="36" name="Text 34"/>
+          <p:cNvSpPr/>
+          <p:nvPr/>
+        </p:nvSpPr>
+        <p:spPr>
+          <a:xfrm>
+            <a:off x="4169664" y="5321808"/>
+            <a:ext cx="1572768" cy="219456"/>
           </a:xfrm>
           <a:prstGeom prst="rect">
             <a:avLst/>
@@ -8811,7 +10499,7 @@
                 <a:ea typeface="맑은 고딕" pitchFamily="34" charset="-122"/>
                 <a:cs typeface="맑은 고딕" pitchFamily="34" charset="-120"/>
               </a:rPr>
-              <a:t>항목</a:t>
+              <a:t>예) 적용 설비</a:t>
             </a:r>
             <a:endParaRPr lang="en-US" sz="950" dirty="0"/>
           </a:p>
@@ -8819,14 +10507,14 @@
       </p:sp>
       <p:sp>
         <p:nvSpPr>
-          <p:cNvPr id="32" name="Text 30"/>
-          <p:cNvSpPr/>
-          <p:nvPr/>
-        </p:nvSpPr>
-        <p:spPr>
-          <a:xfrm>
-            <a:off x="2450592" y="6035040"/>
-            <a:ext cx="1463040" cy="384048"/>
+          <p:cNvPr id="37" name="Text 35"/>
+          <p:cNvSpPr/>
+          <p:nvPr/>
+        </p:nvSpPr>
+        <p:spPr>
+          <a:xfrm>
+            <a:off x="4169664" y="5541264"/>
+            <a:ext cx="1572768" cy="329184"/>
           </a:xfrm>
           <a:prstGeom prst="rect">
             <a:avLst/>
@@ -8842,7 +10530,7 @@
               <a:buNone/>
             </a:pPr>
             <a:r>
-              <a:rPr lang="en-US" sz="2000" b="1" dirty="0">
+              <a:rPr lang="en-US" sz="1500" b="1" dirty="0">
                 <a:solidFill>
                   <a:srgbClr val="1F1A18"/>
                 </a:solidFill>
@@ -8850,22 +10538,22 @@
                 <a:ea typeface="맑은 고딕" pitchFamily="34" charset="-122"/>
                 <a:cs typeface="맑은 고딕" pitchFamily="34" charset="-120"/>
               </a:rPr>
-              <a:t>00</a:t>
-            </a:r>
-            <a:endParaRPr lang="en-US" sz="2000" dirty="0"/>
-          </a:p>
-        </p:txBody>
-      </p:sp>
-      <p:sp>
-        <p:nvSpPr>
-          <p:cNvPr id="33" name="Text 31"/>
-          <p:cNvSpPr/>
-          <p:nvPr/>
-        </p:nvSpPr>
-        <p:spPr>
-          <a:xfrm>
-            <a:off x="4078224" y="5833872"/>
-            <a:ext cx="1463040" cy="201168"/>
+              <a:t>3 호기</a:t>
+            </a:r>
+            <a:endParaRPr lang="en-US" sz="1500" dirty="0"/>
+          </a:p>
+        </p:txBody>
+      </p:sp>
+      <p:sp>
+        <p:nvSpPr>
+          <p:cNvPr id="38" name="Text 36"/>
+          <p:cNvSpPr/>
+          <p:nvPr/>
+        </p:nvSpPr>
+        <p:spPr>
+          <a:xfrm>
+            <a:off x="822960" y="5989320"/>
+            <a:ext cx="4800600" cy="512064"/>
           </a:xfrm>
           <a:prstGeom prst="rect">
             <a:avLst/>
@@ -8878,18 +10566,21 @@
           <a:lstStyle/>
           <a:p>
             <a:pPr indent="0" marL="0">
+              <a:lnSpc>
+                <a:spcPts val="1300"/>
+              </a:lnSpc>
               <a:buNone/>
             </a:pPr>
             <a:r>
               <a:rPr lang="en-US" sz="950" dirty="0">
                 <a:solidFill>
-                  <a:srgbClr val="B3A9A5"/>
-                </a:solidFill>
-                <a:latin typeface="맑은 고딕" pitchFamily="34" charset="0"/>
-                <a:ea typeface="맑은 고딕" pitchFamily="34" charset="-122"/>
-                <a:cs typeface="맑은 고딕" pitchFamily="34" charset="-120"/>
-              </a:rPr>
-              <a:t>항목</a:t>
+                  <a:srgbClr val="9A908C"/>
+                </a:solidFill>
+                <a:latin typeface="맑은 고딕" pitchFamily="34" charset="0"/>
+                <a:ea typeface="맑은 고딕" pitchFamily="34" charset="-122"/>
+                <a:cs typeface="맑은 고딕" pitchFamily="34" charset="-120"/>
+              </a:rPr>
+              <a:t>※ 정량 수치가 없으면 정성 효과로 대체 — 예) 수작업 제거, 이력 관리 체계화, 판단 근거 확보</a:t>
             </a:r>
             <a:endParaRPr lang="en-US" sz="950" dirty="0"/>
           </a:p>
@@ -8897,52 +10588,13 @@
       </p:sp>
       <p:sp>
         <p:nvSpPr>
-          <p:cNvPr id="34" name="Text 32"/>
-          <p:cNvSpPr/>
-          <p:nvPr/>
-        </p:nvSpPr>
-        <p:spPr>
-          <a:xfrm>
-            <a:off x="4078224" y="6035040"/>
-            <a:ext cx="1463040" cy="384048"/>
-          </a:xfrm>
-          <a:prstGeom prst="rect">
-            <a:avLst/>
-          </a:prstGeom>
-          <a:noFill/>
-          <a:ln/>
-        </p:spPr>
-        <p:txBody>
-          <a:bodyPr wrap="square" lIns="0" tIns="0" rIns="0" bIns="0" rtlCol="0" anchor="ctr"/>
-          <a:lstStyle/>
-          <a:p>
-            <a:pPr indent="0" marL="0">
-              <a:buNone/>
-            </a:pPr>
-            <a:r>
-              <a:rPr lang="en-US" sz="2000" b="1" dirty="0">
-                <a:solidFill>
-                  <a:srgbClr val="1F1A18"/>
-                </a:solidFill>
-                <a:latin typeface="맑은 고딕" pitchFamily="34" charset="0"/>
-                <a:ea typeface="맑은 고딕" pitchFamily="34" charset="-122"/>
-                <a:cs typeface="맑은 고딕" pitchFamily="34" charset="-120"/>
-              </a:rPr>
-              <a:t>00</a:t>
-            </a:r>
-            <a:endParaRPr lang="en-US" sz="2000" dirty="0"/>
-          </a:p>
-        </p:txBody>
-      </p:sp>
-      <p:sp>
-        <p:nvSpPr>
-          <p:cNvPr id="35" name="Shape 33"/>
-          <p:cNvSpPr/>
-          <p:nvPr/>
-        </p:nvSpPr>
-        <p:spPr>
-          <a:xfrm>
-            <a:off x="6291072" y="1161288"/>
+          <p:cNvPr id="39" name="Shape 37"/>
+          <p:cNvSpPr/>
+          <p:nvPr/>
+        </p:nvSpPr>
+        <p:spPr>
+          <a:xfrm>
+            <a:off x="6291072" y="1124712"/>
             <a:ext cx="237744" cy="237744"/>
           </a:xfrm>
           <a:prstGeom prst="ellipse">
@@ -8956,14 +10608,14 @@
       </p:sp>
       <p:sp>
         <p:nvSpPr>
-          <p:cNvPr id="36" name="Text 34"/>
-          <p:cNvSpPr/>
-          <p:nvPr/>
-        </p:nvSpPr>
-        <p:spPr>
-          <a:xfrm>
-            <a:off x="6656832" y="1115568"/>
-            <a:ext cx="4023360" cy="329184"/>
+          <p:cNvPr id="40" name="Text 38"/>
+          <p:cNvSpPr/>
+          <p:nvPr/>
+        </p:nvSpPr>
+        <p:spPr>
+          <a:xfrm>
+            <a:off x="6656832" y="1078992"/>
+            <a:ext cx="2377440" cy="310896"/>
           </a:xfrm>
           <a:prstGeom prst="rect">
             <a:avLst/>
@@ -8995,18 +10647,57 @@
       </p:sp>
       <p:sp>
         <p:nvSpPr>
-          <p:cNvPr id="37" name="Shape 35"/>
-          <p:cNvSpPr/>
-          <p:nvPr/>
-        </p:nvSpPr>
-        <p:spPr>
-          <a:xfrm>
-            <a:off x="6291072" y="1536192"/>
-            <a:ext cx="5394960" cy="2121408"/>
+          <p:cNvPr id="41" name="Text 39"/>
+          <p:cNvSpPr/>
+          <p:nvPr/>
+        </p:nvSpPr>
+        <p:spPr>
+          <a:xfrm>
+            <a:off x="9079992" y="1078992"/>
+            <a:ext cx="2606040" cy="310896"/>
+          </a:xfrm>
+          <a:prstGeom prst="rect">
+            <a:avLst/>
+          </a:prstGeom>
+          <a:noFill/>
+          <a:ln/>
+        </p:spPr>
+        <p:txBody>
+          <a:bodyPr wrap="square" lIns="0" tIns="0" rIns="0" bIns="0" rtlCol="0" anchor="ctr"/>
+          <a:lstStyle/>
+          <a:p>
+            <a:pPr algn="r" indent="0" marL="0">
+              <a:buNone/>
+            </a:pPr>
+            <a:r>
+              <a:rPr lang="en-US" sz="950" dirty="0">
+                <a:solidFill>
+                  <a:srgbClr val="B3A9A5"/>
+                </a:solidFill>
+                <a:latin typeface="맑은 고딕" pitchFamily="34" charset="0"/>
+                <a:ea typeface="맑은 고딕" pitchFamily="34" charset="-122"/>
+                <a:cs typeface="맑은 고딕" pitchFamily="34" charset="-120"/>
+              </a:rPr>
+              <a:t>정사각형 영역</a:t>
+            </a:r>
+            <a:endParaRPr lang="en-US" sz="950" dirty="0"/>
+          </a:p>
+        </p:txBody>
+      </p:sp>
+      <p:sp>
+        <p:nvSpPr>
+          <p:cNvPr id="42" name="Shape 40"/>
+          <p:cNvSpPr/>
+          <p:nvPr/>
+        </p:nvSpPr>
+        <p:spPr>
+          <a:xfrm>
+            <a:off x="6291072" y="1463040"/>
+            <a:ext cx="2633472" cy="2889504"/>
           </a:xfrm>
           <a:prstGeom prst="roundRect">
             <a:avLst>
-              <a:gd name="adj" fmla="val 2586"/>
+              <a:gd name="adj" fmla="val 2083"/>
             </a:avLst>
           </a:prstGeom>
           <a:solidFill>
@@ -9029,18 +10720,18 @@
       </p:sp>
       <p:sp>
         <p:nvSpPr>
-          <p:cNvPr id="38" name="Shape 36"/>
-          <p:cNvSpPr/>
-          <p:nvPr/>
-        </p:nvSpPr>
-        <p:spPr>
-          <a:xfrm>
-            <a:off x="6519672" y="1691640"/>
-            <a:ext cx="4937760" cy="1572768"/>
+          <p:cNvPr id="43" name="Shape 41"/>
+          <p:cNvSpPr/>
+          <p:nvPr/>
+        </p:nvSpPr>
+        <p:spPr>
+          <a:xfrm>
+            <a:off x="6446520" y="1618488"/>
+            <a:ext cx="2322576" cy="2322576"/>
           </a:xfrm>
           <a:prstGeom prst="roundRect">
             <a:avLst>
-              <a:gd name="adj" fmla="val 2326"/>
+              <a:gd name="adj" fmla="val 1575"/>
             </a:avLst>
           </a:prstGeom>
           <a:solidFill>
@@ -9056,14 +10747,14 @@
       </p:sp>
       <p:sp>
         <p:nvSpPr>
-          <p:cNvPr id="39" name="Text 37"/>
-          <p:cNvSpPr/>
-          <p:nvPr/>
-        </p:nvSpPr>
-        <p:spPr>
-          <a:xfrm>
-            <a:off x="6519672" y="1691640"/>
-            <a:ext cx="4937760" cy="1572768"/>
+          <p:cNvPr id="44" name="Text 42"/>
+          <p:cNvSpPr/>
+          <p:nvPr/>
+        </p:nvSpPr>
+        <p:spPr>
+          <a:xfrm>
+            <a:off x="6446520" y="1618488"/>
+            <a:ext cx="2322576" cy="2322576"/>
           </a:xfrm>
           <a:prstGeom prst="rect">
             <a:avLst/>
@@ -9076,10 +10767,13 @@
           <a:lstStyle/>
           <a:p>
             <a:pPr algn="ctr" indent="0" marL="0">
-              <a:buNone/>
-            </a:pPr>
-            <a:r>
-              <a:rPr lang="en-US" sz="1200" dirty="0">
+              <a:lnSpc>
+                <a:spcPts val="1600"/>
+              </a:lnSpc>
+              <a:buNone/>
+            </a:pPr>
+            <a:r>
+              <a:rPr lang="en-US" sz="1100" dirty="0">
                 <a:solidFill>
                   <a:srgbClr val="B3A9A5"/>
                 </a:solidFill>
@@ -9087,38 +10781,19 @@
                 <a:ea typeface="맑은 고딕" pitchFamily="34" charset="-122"/>
                 <a:cs typeface="맑은 고딕" pitchFamily="34" charset="-120"/>
               </a:rPr>
-              <a:t>이곳에 사진 또는 화면 캡처를 넣으세요</a:t>
-            </a:r>
-            <a:endParaRPr lang="en-US" sz="1200" dirty="0"/>
-          </a:p>
-        </p:txBody>
-      </p:sp>
-      <p:sp>
-        <p:nvSpPr>
-          <p:cNvPr id="40" name="Text 38"/>
-          <p:cNvSpPr/>
-          <p:nvPr/>
-        </p:nvSpPr>
-        <p:spPr>
-          <a:xfrm>
-            <a:off x="6519672" y="3319272"/>
-            <a:ext cx="4937760" cy="237744"/>
-          </a:xfrm>
-          <a:prstGeom prst="rect">
-            <a:avLst/>
-          </a:prstGeom>
-          <a:noFill/>
-          <a:ln/>
-        </p:spPr>
-        <p:txBody>
-          <a:bodyPr wrap="square" lIns="0" tIns="0" rIns="0" bIns="0" rtlCol="0" anchor="ctr"/>
-          <a:lstStyle/>
+              <a:t>사진 / 화면</a:t>
+            </a:r>
+            <a:endParaRPr lang="en-US" sz="1100" dirty="0"/>
+          </a:p>
           <a:p>
             <a:pPr algn="ctr" indent="0" marL="0">
-              <a:buNone/>
-            </a:pPr>
-            <a:r>
-              <a:rPr lang="en-US" sz="1050" dirty="0">
+              <a:lnSpc>
+                <a:spcPts val="1600"/>
+              </a:lnSpc>
+              <a:buNone/>
+            </a:pPr>
+            <a:r>
+              <a:rPr lang="en-US" sz="1100" dirty="0">
                 <a:solidFill>
                   <a:srgbClr val="B3A9A5"/>
                 </a:solidFill>
@@ -9126,26 +10801,65 @@
                 <a:ea typeface="맑은 고딕" pitchFamily="34" charset="-122"/>
                 <a:cs typeface="맑은 고딕" pitchFamily="34" charset="-120"/>
               </a:rPr>
-              <a:t>캡션 — 무엇을 보여주는 화면인지 한 줄</a:t>
-            </a:r>
-            <a:endParaRPr lang="en-US" sz="1050" dirty="0"/>
-          </a:p>
-        </p:txBody>
-      </p:sp>
-      <p:sp>
-        <p:nvSpPr>
-          <p:cNvPr id="41" name="Shape 39"/>
-          <p:cNvSpPr/>
-          <p:nvPr/>
-        </p:nvSpPr>
-        <p:spPr>
-          <a:xfrm>
-            <a:off x="6291072" y="3794760"/>
-            <a:ext cx="5394960" cy="2121408"/>
+              <a:t>(정사각형)</a:t>
+            </a:r>
+            <a:endParaRPr lang="en-US" sz="1100" dirty="0"/>
+          </a:p>
+        </p:txBody>
+      </p:sp>
+      <p:sp>
+        <p:nvSpPr>
+          <p:cNvPr id="45" name="Text 43"/>
+          <p:cNvSpPr/>
+          <p:nvPr/>
+        </p:nvSpPr>
+        <p:spPr>
+          <a:xfrm>
+            <a:off x="6400800" y="4005072"/>
+            <a:ext cx="2414016" cy="274320"/>
+          </a:xfrm>
+          <a:prstGeom prst="rect">
+            <a:avLst/>
+          </a:prstGeom>
+          <a:noFill/>
+          <a:ln/>
+        </p:spPr>
+        <p:txBody>
+          <a:bodyPr wrap="square" lIns="0" tIns="0" rIns="0" bIns="0" rtlCol="0" anchor="ctr"/>
+          <a:lstStyle/>
+          <a:p>
+            <a:pPr algn="ctr" indent="0" marL="0">
+              <a:buNone/>
+            </a:pPr>
+            <a:r>
+              <a:rPr lang="en-US" sz="950" dirty="0">
+                <a:solidFill>
+                  <a:srgbClr val="B3A9A5"/>
+                </a:solidFill>
+                <a:latin typeface="맑은 고딕" pitchFamily="34" charset="0"/>
+                <a:ea typeface="맑은 고딕" pitchFamily="34" charset="-122"/>
+                <a:cs typeface="맑은 고딕" pitchFamily="34" charset="-120"/>
+              </a:rPr>
+              <a:t>캡션 — 무엇을 보여주는지 한 줄</a:t>
+            </a:r>
+            <a:endParaRPr lang="en-US" sz="950" dirty="0"/>
+          </a:p>
+        </p:txBody>
+      </p:sp>
+      <p:sp>
+        <p:nvSpPr>
+          <p:cNvPr id="46" name="Shape 44"/>
+          <p:cNvSpPr/>
+          <p:nvPr/>
+        </p:nvSpPr>
+        <p:spPr>
+          <a:xfrm>
+            <a:off x="9052560" y="1463040"/>
+            <a:ext cx="2633472" cy="2889504"/>
           </a:xfrm>
           <a:prstGeom prst="roundRect">
             <a:avLst>
-              <a:gd name="adj" fmla="val 2586"/>
+              <a:gd name="adj" fmla="val 2083"/>
             </a:avLst>
           </a:prstGeom>
           <a:solidFill>
@@ -9168,18 +10882,18 @@
       </p:sp>
       <p:sp>
         <p:nvSpPr>
-          <p:cNvPr id="42" name="Shape 40"/>
-          <p:cNvSpPr/>
-          <p:nvPr/>
-        </p:nvSpPr>
-        <p:spPr>
-          <a:xfrm>
-            <a:off x="6519672" y="3950208"/>
-            <a:ext cx="4937760" cy="1572768"/>
+          <p:cNvPr id="47" name="Shape 45"/>
+          <p:cNvSpPr/>
+          <p:nvPr/>
+        </p:nvSpPr>
+        <p:spPr>
+          <a:xfrm>
+            <a:off x="9208008" y="1618488"/>
+            <a:ext cx="2322576" cy="2322576"/>
           </a:xfrm>
           <a:prstGeom prst="roundRect">
             <a:avLst>
-              <a:gd name="adj" fmla="val 2326"/>
+              <a:gd name="adj" fmla="val 1575"/>
             </a:avLst>
           </a:prstGeom>
           <a:solidFill>
@@ -9195,14 +10909,14 @@
       </p:sp>
       <p:sp>
         <p:nvSpPr>
-          <p:cNvPr id="43" name="Text 41"/>
-          <p:cNvSpPr/>
-          <p:nvPr/>
-        </p:nvSpPr>
-        <p:spPr>
-          <a:xfrm>
-            <a:off x="6519672" y="3950208"/>
-            <a:ext cx="4937760" cy="1572768"/>
+          <p:cNvPr id="48" name="Text 46"/>
+          <p:cNvSpPr/>
+          <p:nvPr/>
+        </p:nvSpPr>
+        <p:spPr>
+          <a:xfrm>
+            <a:off x="9208008" y="1618488"/>
+            <a:ext cx="2322576" cy="2322576"/>
           </a:xfrm>
           <a:prstGeom prst="rect">
             <a:avLst/>
@@ -9215,10 +10929,13 @@
           <a:lstStyle/>
           <a:p>
             <a:pPr algn="ctr" indent="0" marL="0">
-              <a:buNone/>
-            </a:pPr>
-            <a:r>
-              <a:rPr lang="en-US" sz="1200" dirty="0">
+              <a:lnSpc>
+                <a:spcPts val="1600"/>
+              </a:lnSpc>
+              <a:buNone/>
+            </a:pPr>
+            <a:r>
+              <a:rPr lang="en-US" sz="1100" dirty="0">
                 <a:solidFill>
                   <a:srgbClr val="B3A9A5"/>
                 </a:solidFill>
@@ -9226,38 +10943,19 @@
                 <a:ea typeface="맑은 고딕" pitchFamily="34" charset="-122"/>
                 <a:cs typeface="맑은 고딕" pitchFamily="34" charset="-120"/>
               </a:rPr>
-              <a:t>이곳에 사진 또는 화면 캡처를 넣으세요</a:t>
-            </a:r>
-            <a:endParaRPr lang="en-US" sz="1200" dirty="0"/>
-          </a:p>
-        </p:txBody>
-      </p:sp>
-      <p:sp>
-        <p:nvSpPr>
-          <p:cNvPr id="44" name="Text 42"/>
-          <p:cNvSpPr/>
-          <p:nvPr/>
-        </p:nvSpPr>
-        <p:spPr>
-          <a:xfrm>
-            <a:off x="6519672" y="5577840"/>
-            <a:ext cx="4937760" cy="237744"/>
-          </a:xfrm>
-          <a:prstGeom prst="rect">
-            <a:avLst/>
-          </a:prstGeom>
-          <a:noFill/>
-          <a:ln/>
-        </p:spPr>
-        <p:txBody>
-          <a:bodyPr wrap="square" lIns="0" tIns="0" rIns="0" bIns="0" rtlCol="0" anchor="ctr"/>
-          <a:lstStyle/>
+              <a:t>사진 / 화면</a:t>
+            </a:r>
+            <a:endParaRPr lang="en-US" sz="1100" dirty="0"/>
+          </a:p>
           <a:p>
             <a:pPr algn="ctr" indent="0" marL="0">
-              <a:buNone/>
-            </a:pPr>
-            <a:r>
-              <a:rPr lang="en-US" sz="1050" dirty="0">
+              <a:lnSpc>
+                <a:spcPts val="1600"/>
+              </a:lnSpc>
+              <a:buNone/>
+            </a:pPr>
+            <a:r>
+              <a:rPr lang="en-US" sz="1100" dirty="0">
                 <a:solidFill>
                   <a:srgbClr val="B3A9A5"/>
                 </a:solidFill>
@@ -9265,30 +10963,167 @@
                 <a:ea typeface="맑은 고딕" pitchFamily="34" charset="-122"/>
                 <a:cs typeface="맑은 고딕" pitchFamily="34" charset="-120"/>
               </a:rPr>
-              <a:t>캡션 — 무엇을 보여주는 화면인지 한 줄</a:t>
-            </a:r>
-            <a:endParaRPr lang="en-US" sz="1050" dirty="0"/>
-          </a:p>
-        </p:txBody>
-      </p:sp>
-      <p:sp>
-        <p:nvSpPr>
-          <p:cNvPr id="45" name="Shape 43"/>
-          <p:cNvSpPr/>
-          <p:nvPr/>
-        </p:nvSpPr>
-        <p:spPr>
-          <a:xfrm>
-            <a:off x="6291072" y="6053328"/>
-            <a:ext cx="5394960" cy="566928"/>
+              <a:t>(정사각형)</a:t>
+            </a:r>
+            <a:endParaRPr lang="en-US" sz="1100" dirty="0"/>
+          </a:p>
+        </p:txBody>
+      </p:sp>
+      <p:sp>
+        <p:nvSpPr>
+          <p:cNvPr id="49" name="Text 47"/>
+          <p:cNvSpPr/>
+          <p:nvPr/>
+        </p:nvSpPr>
+        <p:spPr>
+          <a:xfrm>
+            <a:off x="9162288" y="4005072"/>
+            <a:ext cx="2414016" cy="274320"/>
+          </a:xfrm>
+          <a:prstGeom prst="rect">
+            <a:avLst/>
+          </a:prstGeom>
+          <a:noFill/>
+          <a:ln/>
+        </p:spPr>
+        <p:txBody>
+          <a:bodyPr wrap="square" lIns="0" tIns="0" rIns="0" bIns="0" rtlCol="0" anchor="ctr"/>
+          <a:lstStyle/>
+          <a:p>
+            <a:pPr algn="ctr" indent="0" marL="0">
+              <a:buNone/>
+            </a:pPr>
+            <a:r>
+              <a:rPr lang="en-US" sz="950" dirty="0">
+                <a:solidFill>
+                  <a:srgbClr val="B3A9A5"/>
+                </a:solidFill>
+                <a:latin typeface="맑은 고딕" pitchFamily="34" charset="0"/>
+                <a:ea typeface="맑은 고딕" pitchFamily="34" charset="-122"/>
+                <a:cs typeface="맑은 고딕" pitchFamily="34" charset="-120"/>
+              </a:rPr>
+              <a:t>캡션 — 무엇을 보여주는지 한 줄</a:t>
+            </a:r>
+            <a:endParaRPr lang="en-US" sz="950" dirty="0"/>
+          </a:p>
+        </p:txBody>
+      </p:sp>
+      <p:sp>
+        <p:nvSpPr>
+          <p:cNvPr id="50" name="Shape 48"/>
+          <p:cNvSpPr/>
+          <p:nvPr/>
+        </p:nvSpPr>
+        <p:spPr>
+          <a:xfrm>
+            <a:off x="6291072" y="4581144"/>
+            <a:ext cx="237744" cy="237744"/>
+          </a:xfrm>
+          <a:prstGeom prst="ellipse">
+            <a:avLst/>
+          </a:prstGeom>
+          <a:solidFill>
+            <a:srgbClr val="EA002C"/>
+          </a:solidFill>
+          <a:ln/>
+        </p:spPr>
+      </p:sp>
+      <p:sp>
+        <p:nvSpPr>
+          <p:cNvPr id="51" name="Text 49"/>
+          <p:cNvSpPr/>
+          <p:nvPr/>
+        </p:nvSpPr>
+        <p:spPr>
+          <a:xfrm>
+            <a:off x="6656832" y="4535424"/>
+            <a:ext cx="2377440" cy="310896"/>
+          </a:xfrm>
+          <a:prstGeom prst="rect">
+            <a:avLst/>
+          </a:prstGeom>
+          <a:noFill/>
+          <a:ln/>
+        </p:spPr>
+        <p:txBody>
+          <a:bodyPr wrap="square" lIns="0" tIns="0" rIns="0" bIns="0" rtlCol="0" anchor="ctr"/>
+          <a:lstStyle/>
+          <a:p>
+            <a:pPr indent="0" marL="0">
+              <a:buNone/>
+            </a:pPr>
+            <a:r>
+              <a:rPr lang="en-US" sz="1350" b="1" dirty="0">
+                <a:solidFill>
+                  <a:srgbClr val="1F1A18"/>
+                </a:solidFill>
+                <a:latin typeface="맑은 고딕" pitchFamily="34" charset="0"/>
+                <a:ea typeface="맑은 고딕" pitchFamily="34" charset="-122"/>
+                <a:cs typeface="맑은 고딕" pitchFamily="34" charset="-120"/>
+              </a:rPr>
+              <a:t>향후 계획</a:t>
+            </a:r>
+            <a:endParaRPr lang="en-US" sz="1350" dirty="0"/>
+          </a:p>
+        </p:txBody>
+      </p:sp>
+      <p:sp>
+        <p:nvSpPr>
+          <p:cNvPr id="52" name="Text 50"/>
+          <p:cNvSpPr/>
+          <p:nvPr/>
+        </p:nvSpPr>
+        <p:spPr>
+          <a:xfrm>
+            <a:off x="9079992" y="4535424"/>
+            <a:ext cx="2606040" cy="310896"/>
+          </a:xfrm>
+          <a:prstGeom prst="rect">
+            <a:avLst/>
+          </a:prstGeom>
+          <a:noFill/>
+          <a:ln/>
+        </p:spPr>
+        <p:txBody>
+          <a:bodyPr wrap="square" lIns="0" tIns="0" rIns="0" bIns="0" rtlCol="0" anchor="ctr"/>
+          <a:lstStyle/>
+          <a:p>
+            <a:pPr algn="r" indent="0" marL="0">
+              <a:buNone/>
+            </a:pPr>
+            <a:r>
+              <a:rPr lang="en-US" sz="950" dirty="0">
+                <a:solidFill>
+                  <a:srgbClr val="B3A9A5"/>
+                </a:solidFill>
+                <a:latin typeface="맑은 고딕" pitchFamily="34" charset="0"/>
+                <a:ea typeface="맑은 고딕" pitchFamily="34" charset="-122"/>
+                <a:cs typeface="맑은 고딕" pitchFamily="34" charset="-120"/>
+              </a:rPr>
+              <a:t>다음 단계 · 일정</a:t>
+            </a:r>
+            <a:endParaRPr lang="en-US" sz="950" dirty="0"/>
+          </a:p>
+        </p:txBody>
+      </p:sp>
+      <p:sp>
+        <p:nvSpPr>
+          <p:cNvPr id="53" name="Shape 51"/>
+          <p:cNvSpPr/>
+          <p:nvPr/>
+        </p:nvSpPr>
+        <p:spPr>
+          <a:xfrm>
+            <a:off x="6291072" y="4919472"/>
+            <a:ext cx="5394960" cy="1700784"/>
           </a:xfrm>
           <a:prstGeom prst="roundRect">
             <a:avLst>
-              <a:gd name="adj" fmla="val 9677"/>
+              <a:gd name="adj" fmla="val 3226"/>
             </a:avLst>
           </a:prstGeom>
           <a:solidFill>
-            <a:srgbClr val="1F1A18"/>
+            <a:srgbClr val="FFFFFF"/>
           </a:solidFill>
           <a:ln w="12700">
             <a:solidFill>
@@ -9307,40 +11142,95 @@
       </p:sp>
       <p:sp>
         <p:nvSpPr>
-          <p:cNvPr id="46" name="Text 44"/>
-          <p:cNvSpPr/>
-          <p:nvPr/>
-        </p:nvSpPr>
-        <p:spPr>
-          <a:xfrm>
-            <a:off x="6565392" y="6144768"/>
-            <a:ext cx="4846320" cy="384048"/>
-          </a:xfrm>
-          <a:prstGeom prst="rect">
-            <a:avLst/>
-          </a:prstGeom>
-          <a:noFill/>
-          <a:ln/>
-        </p:spPr>
-        <p:txBody>
-          <a:bodyPr wrap="square" lIns="0" tIns="0" rIns="0" bIns="0" rtlCol="0" anchor="ctr"/>
-          <a:lstStyle/>
-          <a:p>
-            <a:pPr indent="0" marL="0">
-              <a:buNone/>
-            </a:pPr>
-            <a:r>
-              <a:rPr lang="en-US" sz="1150" b="1" dirty="0">
-                <a:solidFill>
-                  <a:srgbClr val="E8DFDB"/>
-                </a:solidFill>
-                <a:latin typeface="맑은 고딕" pitchFamily="34" charset="0"/>
-                <a:ea typeface="맑은 고딕" pitchFamily="34" charset="-122"/>
-                <a:cs typeface="맑은 고딕" pitchFamily="34" charset="-120"/>
-              </a:rPr>
-              <a:t>향후 계획 :  다음 단계에서 할 일을 한 줄로</a:t>
-            </a:r>
-            <a:endParaRPr lang="en-US" sz="1150" dirty="0"/>
+          <p:cNvPr id="54" name="Text 52"/>
+          <p:cNvSpPr/>
+          <p:nvPr/>
+        </p:nvSpPr>
+        <p:spPr>
+          <a:xfrm>
+            <a:off x="6611112" y="5138928"/>
+            <a:ext cx="4800600" cy="1280160"/>
+          </a:xfrm>
+          <a:prstGeom prst="rect">
+            <a:avLst/>
+          </a:prstGeom>
+          <a:noFill/>
+          <a:ln/>
+        </p:spPr>
+        <p:txBody>
+          <a:bodyPr wrap="square" lIns="0" tIns="0" rIns="0" bIns="0" rtlCol="0" anchor="ctr"/>
+          <a:lstStyle/>
+          <a:p>
+            <a:pPr marL="342900" indent="-342900">
+              <a:lnSpc>
+                <a:spcPts val="1500"/>
+              </a:lnSpc>
+              <a:spcAft>
+                <a:spcPts val="700"/>
+              </a:spcAft>
+              <a:buSzPct val="100000"/>
+              <a:buChar char="•"/>
+            </a:pPr>
+            <a:r>
+              <a:rPr lang="en-US" sz="1200" dirty="0">
+                <a:solidFill>
+                  <a:srgbClr val="B3A9A5"/>
+                </a:solidFill>
+                <a:latin typeface="맑은 고딕" pitchFamily="34" charset="0"/>
+                <a:ea typeface="맑은 고딕" pitchFamily="34" charset="-122"/>
+                <a:cs typeface="맑은 고딕" pitchFamily="34" charset="-120"/>
+              </a:rPr>
+              <a:t>다음 단계에서 할 일</a:t>
+            </a:r>
+            <a:endParaRPr lang="en-US" sz="1200" dirty="0"/>
+          </a:p>
+          <a:p>
+            <a:pPr marL="342900" indent="-342900">
+              <a:lnSpc>
+                <a:spcPts val="1500"/>
+              </a:lnSpc>
+              <a:spcAft>
+                <a:spcPts val="700"/>
+              </a:spcAft>
+              <a:buSzPct val="100000"/>
+              <a:buChar char="•"/>
+            </a:pPr>
+            <a:r>
+              <a:rPr lang="en-US" sz="1200" dirty="0">
+                <a:solidFill>
+                  <a:srgbClr val="B3A9A5"/>
+                </a:solidFill>
+                <a:latin typeface="맑은 고딕" pitchFamily="34" charset="0"/>
+                <a:ea typeface="맑은 고딕" pitchFamily="34" charset="-122"/>
+                <a:cs typeface="맑은 고딕" pitchFamily="34" charset="-120"/>
+              </a:rPr>
+              <a:t>목표 시점 (예: 26년 4분기)</a:t>
+            </a:r>
+            <a:endParaRPr lang="en-US" sz="1200" dirty="0"/>
+          </a:p>
+          <a:p>
+            <a:pPr marL="342900" indent="-342900">
+              <a:lnSpc>
+                <a:spcPts val="1500"/>
+              </a:lnSpc>
+              <a:spcAft>
+                <a:spcPts val="700"/>
+              </a:spcAft>
+              <a:buSzPct val="100000"/>
+              <a:buChar char="•"/>
+            </a:pPr>
+            <a:r>
+              <a:rPr lang="en-US" sz="1200" dirty="0">
+                <a:solidFill>
+                  <a:srgbClr val="B3A9A5"/>
+                </a:solidFill>
+                <a:latin typeface="맑은 고딕" pitchFamily="34" charset="0"/>
+                <a:ea typeface="맑은 고딕" pitchFamily="34" charset="-122"/>
+                <a:cs typeface="맑은 고딕" pitchFamily="34" charset="-120"/>
+              </a:rPr>
+              <a:t>필요한 지원 · 협조 사항</a:t>
+            </a:r>
+            <a:endParaRPr lang="en-US" sz="1200" dirty="0"/>
           </a:p>
         </p:txBody>
       </p:sp>
